--- a/assets/_CLEAN.pptx
+++ b/assets/_CLEAN.pptx
@@ -5,18 +5,23 @@
     <p:sldMasterId id="2147483648" r:id="rId4"/>
   </p:sldMasterIdLst>
   <p:notesMasterIdLst>
-    <p:notesMasterId r:id="rId6"/>
+    <p:notesMasterId r:id="rId11"/>
   </p:notesMasterIdLst>
   <p:handoutMasterIdLst>
-    <p:handoutMasterId r:id="rId7"/>
+    <p:handoutMasterId r:id="rId12"/>
   </p:handoutMasterIdLst>
   <p:sldIdLst>
     <p:sldId id="548" r:id="rId5"/>
+    <p:sldId id="549" r:id="rId6"/>
+    <p:sldId id="550" r:id="rId7"/>
+    <p:sldId id="551" r:id="rId8"/>
+    <p:sldId id="552" r:id="rId9"/>
+    <p:sldId id="553" r:id="rId10"/>
   </p:sldIdLst>
   <p:sldSz cx="7559675" cy="10691813"/>
   <p:notesSz cx="6858000" cy="9144000"/>
   <p:custDataLst>
-    <p:tags r:id="rId8"/>
+    <p:tags r:id="rId13"/>
   </p:custDataLst>
   <p:defaultTextStyle>
     <a:defPPr marL="0" marR="0" indent="0" algn="l" defTabSz="673547" rtl="0" fontAlgn="auto" latinLnBrk="1" hangingPunct="0">
@@ -1162,6 +1167,311 @@
     <p:extLst>
       <p:ext uri="{BB962C8B-B14F-4D97-AF65-F5344CB8AC3E}">
         <p14:creationId xmlns:p14="http://schemas.microsoft.com/office/powerpoint/2010/main" val="528213199"/>
+      </p:ext>
+    </p:extLst>
+  </p:cSld>
+  <p:clrMapOvr>
+    <a:masterClrMapping/>
+  </p:clrMapOvr>
+</p:notes>
+</file>
+
+<file path=ppt/notesSlides/notesSlide2.xml><?xml version="1.0" encoding="utf-8"?>
+<p:notes xmlns:a="http://schemas.openxmlformats.org/drawingml/2006/main" xmlns:r="http://schemas.openxmlformats.org/officeDocument/2006/relationships" xmlns:p="http://schemas.openxmlformats.org/presentationml/2006/main">
+  <p:cSld>
+    <p:spTree>
+      <p:nvGrpSpPr>
+        <p:cNvPr id="1" name="">
+          <a:extLst>
+            <a:ext uri="{FF2B5EF4-FFF2-40B4-BE49-F238E27FC236}">
+              <a16:creationId xmlns:a16="http://schemas.microsoft.com/office/drawing/2014/main" id="{E35C7CBB-7EF0-F642-B404-84532A7DCF73}"/>
+            </a:ext>
+          </a:extLst>
+        </p:cNvPr>
+        <p:cNvGrpSpPr/>
+        <p:nvPr/>
+      </p:nvGrpSpPr>
+      <p:grpSpPr>
+        <a:xfrm>
+          <a:off x="0" y="0"/>
+          <a:ext cx="0" cy="0"/>
+          <a:chOff x="0" y="0"/>
+          <a:chExt cx="0" cy="0"/>
+        </a:xfrm>
+      </p:grpSpPr>
+      <p:sp>
+        <p:nvSpPr>
+          <p:cNvPr id="2" name="Segnaposto note 1">
+            <a:extLst>
+              <a:ext uri="{FF2B5EF4-FFF2-40B4-BE49-F238E27FC236}">
+                <a16:creationId xmlns:a16="http://schemas.microsoft.com/office/drawing/2014/main" id="{6DA8C3FB-B9B3-A8AE-D704-CA37C71E36FE}"/>
+              </a:ext>
+            </a:extLst>
+          </p:cNvPr>
+          <p:cNvSpPr>
+            <a:spLocks noGrp="1"/>
+          </p:cNvSpPr>
+          <p:nvPr>
+            <p:ph type="body" idx="1"/>
+          </p:nvPr>
+        </p:nvSpPr>
+        <p:spPr/>
+        <p:txBody>
+          <a:bodyPr/>
+          <a:lstStyle/>
+          <a:p>
+            <a:endParaRPr lang="it-IT"/>
+          </a:p>
+        </p:txBody>
+      </p:sp>
+    </p:spTree>
+    <p:extLst>
+      <p:ext uri="{BB962C8B-B14F-4D97-AF65-F5344CB8AC3E}">
+        <p14:creationId xmlns:p14="http://schemas.microsoft.com/office/powerpoint/2010/main" val="2612806729"/>
+      </p:ext>
+    </p:extLst>
+  </p:cSld>
+  <p:clrMapOvr>
+    <a:masterClrMapping/>
+  </p:clrMapOvr>
+</p:notes>
+</file>
+
+<file path=ppt/notesSlides/notesSlide3.xml><?xml version="1.0" encoding="utf-8"?>
+<p:notes xmlns:a="http://schemas.openxmlformats.org/drawingml/2006/main" xmlns:r="http://schemas.openxmlformats.org/officeDocument/2006/relationships" xmlns:p="http://schemas.openxmlformats.org/presentationml/2006/main">
+  <p:cSld>
+    <p:spTree>
+      <p:nvGrpSpPr>
+        <p:cNvPr id="1" name="">
+          <a:extLst>
+            <a:ext uri="{FF2B5EF4-FFF2-40B4-BE49-F238E27FC236}">
+              <a16:creationId xmlns:a16="http://schemas.microsoft.com/office/drawing/2014/main" id="{DCD593B4-F014-CCDE-C00C-E30621AD196D}"/>
+            </a:ext>
+          </a:extLst>
+        </p:cNvPr>
+        <p:cNvGrpSpPr/>
+        <p:nvPr/>
+      </p:nvGrpSpPr>
+      <p:grpSpPr>
+        <a:xfrm>
+          <a:off x="0" y="0"/>
+          <a:ext cx="0" cy="0"/>
+          <a:chOff x="0" y="0"/>
+          <a:chExt cx="0" cy="0"/>
+        </a:xfrm>
+      </p:grpSpPr>
+      <p:sp>
+        <p:nvSpPr>
+          <p:cNvPr id="2" name="Segnaposto note 1">
+            <a:extLst>
+              <a:ext uri="{FF2B5EF4-FFF2-40B4-BE49-F238E27FC236}">
+                <a16:creationId xmlns:a16="http://schemas.microsoft.com/office/drawing/2014/main" id="{07C76389-3244-5342-22C2-9C233EEA2EBB}"/>
+              </a:ext>
+            </a:extLst>
+          </p:cNvPr>
+          <p:cNvSpPr>
+            <a:spLocks noGrp="1"/>
+          </p:cNvSpPr>
+          <p:nvPr>
+            <p:ph type="body" idx="1"/>
+          </p:nvPr>
+        </p:nvSpPr>
+        <p:spPr/>
+        <p:txBody>
+          <a:bodyPr/>
+          <a:lstStyle/>
+          <a:p>
+            <a:endParaRPr lang="it-IT"/>
+          </a:p>
+        </p:txBody>
+      </p:sp>
+    </p:spTree>
+    <p:extLst>
+      <p:ext uri="{BB962C8B-B14F-4D97-AF65-F5344CB8AC3E}">
+        <p14:creationId xmlns:p14="http://schemas.microsoft.com/office/powerpoint/2010/main" val="1782831691"/>
+      </p:ext>
+    </p:extLst>
+  </p:cSld>
+  <p:clrMapOvr>
+    <a:masterClrMapping/>
+  </p:clrMapOvr>
+</p:notes>
+</file>
+
+<file path=ppt/notesSlides/notesSlide4.xml><?xml version="1.0" encoding="utf-8"?>
+<p:notes xmlns:a="http://schemas.openxmlformats.org/drawingml/2006/main" xmlns:r="http://schemas.openxmlformats.org/officeDocument/2006/relationships" xmlns:p="http://schemas.openxmlformats.org/presentationml/2006/main">
+  <p:cSld>
+    <p:spTree>
+      <p:nvGrpSpPr>
+        <p:cNvPr id="1" name="">
+          <a:extLst>
+            <a:ext uri="{FF2B5EF4-FFF2-40B4-BE49-F238E27FC236}">
+              <a16:creationId xmlns:a16="http://schemas.microsoft.com/office/drawing/2014/main" id="{D0E1E359-3F98-EB73-0AE6-8C3ECC219780}"/>
+            </a:ext>
+          </a:extLst>
+        </p:cNvPr>
+        <p:cNvGrpSpPr/>
+        <p:nvPr/>
+      </p:nvGrpSpPr>
+      <p:grpSpPr>
+        <a:xfrm>
+          <a:off x="0" y="0"/>
+          <a:ext cx="0" cy="0"/>
+          <a:chOff x="0" y="0"/>
+          <a:chExt cx="0" cy="0"/>
+        </a:xfrm>
+      </p:grpSpPr>
+      <p:sp>
+        <p:nvSpPr>
+          <p:cNvPr id="2" name="Segnaposto note 1">
+            <a:extLst>
+              <a:ext uri="{FF2B5EF4-FFF2-40B4-BE49-F238E27FC236}">
+                <a16:creationId xmlns:a16="http://schemas.microsoft.com/office/drawing/2014/main" id="{863478BC-F168-5449-3947-A13CE0419052}"/>
+              </a:ext>
+            </a:extLst>
+          </p:cNvPr>
+          <p:cNvSpPr>
+            <a:spLocks noGrp="1"/>
+          </p:cNvSpPr>
+          <p:nvPr>
+            <p:ph type="body" idx="1"/>
+          </p:nvPr>
+        </p:nvSpPr>
+        <p:spPr/>
+        <p:txBody>
+          <a:bodyPr/>
+          <a:lstStyle/>
+          <a:p>
+            <a:endParaRPr lang="it-IT"/>
+          </a:p>
+        </p:txBody>
+      </p:sp>
+    </p:spTree>
+    <p:extLst>
+      <p:ext uri="{BB962C8B-B14F-4D97-AF65-F5344CB8AC3E}">
+        <p14:creationId xmlns:p14="http://schemas.microsoft.com/office/powerpoint/2010/main" val="2400361089"/>
+      </p:ext>
+    </p:extLst>
+  </p:cSld>
+  <p:clrMapOvr>
+    <a:masterClrMapping/>
+  </p:clrMapOvr>
+</p:notes>
+</file>
+
+<file path=ppt/notesSlides/notesSlide5.xml><?xml version="1.0" encoding="utf-8"?>
+<p:notes xmlns:a="http://schemas.openxmlformats.org/drawingml/2006/main" xmlns:r="http://schemas.openxmlformats.org/officeDocument/2006/relationships" xmlns:p="http://schemas.openxmlformats.org/presentationml/2006/main">
+  <p:cSld>
+    <p:spTree>
+      <p:nvGrpSpPr>
+        <p:cNvPr id="1" name="">
+          <a:extLst>
+            <a:ext uri="{FF2B5EF4-FFF2-40B4-BE49-F238E27FC236}">
+              <a16:creationId xmlns:a16="http://schemas.microsoft.com/office/drawing/2014/main" id="{CE37C252-D32D-ED20-2D4D-9DABFA8628A2}"/>
+            </a:ext>
+          </a:extLst>
+        </p:cNvPr>
+        <p:cNvGrpSpPr/>
+        <p:nvPr/>
+      </p:nvGrpSpPr>
+      <p:grpSpPr>
+        <a:xfrm>
+          <a:off x="0" y="0"/>
+          <a:ext cx="0" cy="0"/>
+          <a:chOff x="0" y="0"/>
+          <a:chExt cx="0" cy="0"/>
+        </a:xfrm>
+      </p:grpSpPr>
+      <p:sp>
+        <p:nvSpPr>
+          <p:cNvPr id="2" name="Segnaposto note 1">
+            <a:extLst>
+              <a:ext uri="{FF2B5EF4-FFF2-40B4-BE49-F238E27FC236}">
+                <a16:creationId xmlns:a16="http://schemas.microsoft.com/office/drawing/2014/main" id="{B79C113F-F9DB-514F-D0DB-4E4AC95B4969}"/>
+              </a:ext>
+            </a:extLst>
+          </p:cNvPr>
+          <p:cNvSpPr>
+            <a:spLocks noGrp="1"/>
+          </p:cNvSpPr>
+          <p:nvPr>
+            <p:ph type="body" idx="1"/>
+          </p:nvPr>
+        </p:nvSpPr>
+        <p:spPr/>
+        <p:txBody>
+          <a:bodyPr/>
+          <a:lstStyle/>
+          <a:p>
+            <a:endParaRPr lang="it-IT"/>
+          </a:p>
+        </p:txBody>
+      </p:sp>
+    </p:spTree>
+    <p:extLst>
+      <p:ext uri="{BB962C8B-B14F-4D97-AF65-F5344CB8AC3E}">
+        <p14:creationId xmlns:p14="http://schemas.microsoft.com/office/powerpoint/2010/main" val="3750109315"/>
+      </p:ext>
+    </p:extLst>
+  </p:cSld>
+  <p:clrMapOvr>
+    <a:masterClrMapping/>
+  </p:clrMapOvr>
+</p:notes>
+</file>
+
+<file path=ppt/notesSlides/notesSlide6.xml><?xml version="1.0" encoding="utf-8"?>
+<p:notes xmlns:a="http://schemas.openxmlformats.org/drawingml/2006/main" xmlns:r="http://schemas.openxmlformats.org/officeDocument/2006/relationships" xmlns:p="http://schemas.openxmlformats.org/presentationml/2006/main">
+  <p:cSld>
+    <p:spTree>
+      <p:nvGrpSpPr>
+        <p:cNvPr id="1" name="">
+          <a:extLst>
+            <a:ext uri="{FF2B5EF4-FFF2-40B4-BE49-F238E27FC236}">
+              <a16:creationId xmlns:a16="http://schemas.microsoft.com/office/drawing/2014/main" id="{728AA943-9B00-4DF0-23AC-76A6018E8A43}"/>
+            </a:ext>
+          </a:extLst>
+        </p:cNvPr>
+        <p:cNvGrpSpPr/>
+        <p:nvPr/>
+      </p:nvGrpSpPr>
+      <p:grpSpPr>
+        <a:xfrm>
+          <a:off x="0" y="0"/>
+          <a:ext cx="0" cy="0"/>
+          <a:chOff x="0" y="0"/>
+          <a:chExt cx="0" cy="0"/>
+        </a:xfrm>
+      </p:grpSpPr>
+      <p:sp>
+        <p:nvSpPr>
+          <p:cNvPr id="2" name="Segnaposto note 1">
+            <a:extLst>
+              <a:ext uri="{FF2B5EF4-FFF2-40B4-BE49-F238E27FC236}">
+                <a16:creationId xmlns:a16="http://schemas.microsoft.com/office/drawing/2014/main" id="{E492FEBD-860B-B64E-720B-9C2B9F7C7BAD}"/>
+              </a:ext>
+            </a:extLst>
+          </p:cNvPr>
+          <p:cNvSpPr>
+            <a:spLocks noGrp="1"/>
+          </p:cNvSpPr>
+          <p:nvPr>
+            <p:ph type="body" idx="1"/>
+          </p:nvPr>
+        </p:nvSpPr>
+        <p:spPr/>
+        <p:txBody>
+          <a:bodyPr/>
+          <a:lstStyle/>
+          <a:p>
+            <a:endParaRPr lang="it-IT"/>
+          </a:p>
+        </p:txBody>
+      </p:sp>
+    </p:spTree>
+    <p:extLst>
+      <p:ext uri="{BB962C8B-B14F-4D97-AF65-F5344CB8AC3E}">
+        <p14:creationId xmlns:p14="http://schemas.microsoft.com/office/powerpoint/2010/main" val="2445396285"/>
       </p:ext>
     </p:extLst>
   </p:cSld>
@@ -2829,7 +3139,7 @@
           </a:ln>
           <a:extLst>
             <a:ext uri="{C572A759-6A51-4108-AA02-DFA0A04FC94B}">
-              <ma14:wrappingTextBoxFlag xmlns="" xmlns:ma14="http://schemas.microsoft.com/office/mac/drawingml/2011/main" val="1"/>
+              <ma14:wrappingTextBoxFlag xmlns:ma14="http://schemas.microsoft.com/office/mac/drawingml/2011/main" xmlns="" val="1"/>
             </a:ext>
           </a:extLst>
         </p:spPr>
@@ -3386,6 +3696,4691 @@
 </p:sld>
 </file>
 
+<file path=ppt/slides/slide2.xml><?xml version="1.0" encoding="utf-8"?>
+<p:sld xmlns:a="http://schemas.openxmlformats.org/drawingml/2006/main" xmlns:r="http://schemas.openxmlformats.org/officeDocument/2006/relationships" xmlns:p="http://schemas.openxmlformats.org/presentationml/2006/main">
+  <p:cSld>
+    <p:spTree>
+      <p:nvGrpSpPr>
+        <p:cNvPr id="1" name="">
+          <a:extLst>
+            <a:ext uri="{FF2B5EF4-FFF2-40B4-BE49-F238E27FC236}">
+              <a16:creationId xmlns:a16="http://schemas.microsoft.com/office/drawing/2014/main" id="{5FC378D2-F268-EC16-4410-2C3BA29F0B3B}"/>
+            </a:ext>
+          </a:extLst>
+        </p:cNvPr>
+        <p:cNvGrpSpPr/>
+        <p:nvPr/>
+      </p:nvGrpSpPr>
+      <p:grpSpPr>
+        <a:xfrm>
+          <a:off x="0" y="0"/>
+          <a:ext cx="0" cy="0"/>
+          <a:chOff x="0" y="0"/>
+          <a:chExt cx="0" cy="0"/>
+        </a:xfrm>
+      </p:grpSpPr>
+      <p:graphicFrame>
+        <p:nvGraphicFramePr>
+          <p:cNvPr id="2" name="Oggetto 1" hidden="1">
+            <a:extLst>
+              <a:ext uri="{FF2B5EF4-FFF2-40B4-BE49-F238E27FC236}">
+                <a16:creationId xmlns:a16="http://schemas.microsoft.com/office/drawing/2014/main" id="{714AE683-9214-DDC5-4D61-1999D6CCE19A}"/>
+              </a:ext>
+            </a:extLst>
+          </p:cNvPr>
+          <p:cNvGraphicFramePr>
+            <a:graphicFrameLocks noChangeAspect="1"/>
+          </p:cNvGraphicFramePr>
+          <p:nvPr>
+            <p:custDataLst>
+              <p:tags r:id="rId1"/>
+            </p:custDataLst>
+          </p:nvPr>
+        </p:nvGraphicFramePr>
+        <p:xfrm>
+          <a:off x="1588" y="1588"/>
+          <a:ext cx="1588" cy="1588"/>
+        </p:xfrm>
+        <a:graphic>
+          <a:graphicData uri="http://schemas.openxmlformats.org/presentationml/2006/ole">
+            <mc:AlternateContent xmlns:mc="http://schemas.openxmlformats.org/markup-compatibility/2006">
+              <mc:Choice xmlns:v="urn:schemas-microsoft-com:vml" Requires="v">
+                <p:oleObj name="Diapositiva think-cell" r:id="rId4" imgW="395" imgH="394" progId="TCLayout.ActiveDocument.1">
+                  <p:embed/>
+                </p:oleObj>
+              </mc:Choice>
+              <mc:Fallback>
+                <p:oleObj name="Diapositiva think-cell" r:id="rId4" imgW="395" imgH="394" progId="TCLayout.ActiveDocument.1">
+                  <p:embed/>
+                  <p:pic>
+                    <p:nvPicPr>
+                      <p:cNvPr id="2" name="Oggetto 1" hidden="1">
+                        <a:extLst>
+                          <a:ext uri="{FF2B5EF4-FFF2-40B4-BE49-F238E27FC236}">
+                            <a16:creationId xmlns:a16="http://schemas.microsoft.com/office/drawing/2014/main" id="{EF346082-47DA-1971-A8FD-456BA3626250}"/>
+                          </a:ext>
+                        </a:extLst>
+                      </p:cNvPr>
+                      <p:cNvPicPr/>
+                      <p:nvPr/>
+                    </p:nvPicPr>
+                    <p:blipFill>
+                      <a:blip r:embed="rId5"/>
+                      <a:stretch>
+                        <a:fillRect/>
+                      </a:stretch>
+                    </p:blipFill>
+                    <p:spPr>
+                      <a:xfrm>
+                        <a:off x="1588" y="1588"/>
+                        <a:ext cx="1588" cy="1588"/>
+                      </a:xfrm>
+                      <a:prstGeom prst="rect">
+                        <a:avLst/>
+                      </a:prstGeom>
+                    </p:spPr>
+                  </p:pic>
+                </p:oleObj>
+              </mc:Fallback>
+            </mc:AlternateContent>
+          </a:graphicData>
+        </a:graphic>
+      </p:graphicFrame>
+      <p:sp>
+        <p:nvSpPr>
+          <p:cNvPr id="51" name="Casella di testo 36">
+            <a:extLst>
+              <a:ext uri="{FF2B5EF4-FFF2-40B4-BE49-F238E27FC236}">
+                <a16:creationId xmlns:a16="http://schemas.microsoft.com/office/drawing/2014/main" id="{1314AC13-EE82-1C83-0F52-8B352DE1249B}"/>
+              </a:ext>
+            </a:extLst>
+          </p:cNvPr>
+          <p:cNvSpPr txBox="1">
+            <a:spLocks noChangeArrowheads="1"/>
+          </p:cNvSpPr>
+          <p:nvPr/>
+        </p:nvSpPr>
+        <p:spPr bwMode="auto">
+          <a:xfrm>
+            <a:off x="1365790" y="1603849"/>
+            <a:ext cx="4828095" cy="367119"/>
+          </a:xfrm>
+          <a:prstGeom prst="rect">
+            <a:avLst/>
+          </a:prstGeom>
+          <a:noFill/>
+          <a:ln>
+            <a:noFill/>
+          </a:ln>
+          <a:effectLst/>
+        </p:spPr>
+        <p:txBody>
+          <a:bodyPr rot="0" vert="horz" wrap="square" lIns="36576" tIns="36576" rIns="36576" bIns="36576" anchor="ctr" anchorCtr="0" upright="1">
+            <a:noAutofit/>
+          </a:bodyPr>
+          <a:lstStyle/>
+          <a:p>
+            <a:pPr>
+              <a:lnSpc>
+                <a:spcPct val="107000"/>
+              </a:lnSpc>
+              <a:spcAft>
+                <a:spcPts val="800"/>
+              </a:spcAft>
+            </a:pPr>
+            <a:r>
+              <a:rPr lang="it-IT" sz="1600">
+                <a:solidFill>
+                  <a:schemeClr val="bg1"/>
+                </a:solidFill>
+                <a:effectLst/>
+                <a:latin typeface="Trebuchet MS" panose="020B0603020202020204" pitchFamily="34" charset="0"/>
+                <a:ea typeface="Calibri" panose="020F0502020204030204" pitchFamily="34" charset="0"/>
+                <a:cs typeface="Traditional Arabic" panose="020B0604020202020204" pitchFamily="18" charset="-78"/>
+              </a:rPr>
+              <a:t>SOMMARIO</a:t>
+            </a:r>
+          </a:p>
+        </p:txBody>
+      </p:sp>
+      <p:sp>
+        <p:nvSpPr>
+          <p:cNvPr id="19" name="Rettangolo 18">
+            <a:extLst>
+              <a:ext uri="{FF2B5EF4-FFF2-40B4-BE49-F238E27FC236}">
+                <a16:creationId xmlns:a16="http://schemas.microsoft.com/office/drawing/2014/main" id="{5B76DB67-414C-F0ED-C19B-3F5D4C091273}"/>
+              </a:ext>
+            </a:extLst>
+          </p:cNvPr>
+          <p:cNvSpPr>
+            <a:spLocks noChangeArrowheads="1"/>
+          </p:cNvSpPr>
+          <p:nvPr/>
+        </p:nvSpPr>
+        <p:spPr bwMode="auto">
+          <a:xfrm rot="16200000">
+            <a:off x="3635841" y="-1992428"/>
+            <a:ext cx="288000" cy="7559672"/>
+          </a:xfrm>
+          <a:prstGeom prst="rect">
+            <a:avLst/>
+          </a:prstGeom>
+          <a:solidFill>
+            <a:srgbClr val="333F50"/>
+          </a:solidFill>
+          <a:ln>
+            <a:noFill/>
+          </a:ln>
+          <a:effectLst/>
+          <a:extLst>
+            <a:ext uri="{91240B29-F687-4F45-9708-019B960494DF}">
+              <a14:hiddenLine xmlns:a14="http://schemas.microsoft.com/office/drawing/2010/main" w="9525" algn="in">
+                <a:solidFill>
+                  <a:srgbClr val="212120"/>
+                </a:solidFill>
+                <a:miter lim="800000"/>
+                <a:headEnd/>
+                <a:tailEnd/>
+              </a14:hiddenLine>
+            </a:ext>
+            <a:ext uri="{AF507438-7753-43E0-B8FC-AC1667EBCBE1}">
+              <a14:hiddenEffects xmlns:a14="http://schemas.microsoft.com/office/drawing/2010/main">
+                <a:effectLst>
+                  <a:outerShdw dist="35921" dir="2700000" algn="ctr" rotWithShape="0">
+                    <a:srgbClr val="DCD6D4"/>
+                  </a:outerShdw>
+                </a:effectLst>
+              </a14:hiddenEffects>
+            </a:ext>
+          </a:extLst>
+        </p:spPr>
+        <p:txBody>
+          <a:bodyPr rot="0" vert="horz" wrap="square" lIns="36576" tIns="36576" rIns="36576" bIns="36576" anchor="t" anchorCtr="0" upright="1">
+            <a:noAutofit/>
+          </a:bodyPr>
+          <a:lstStyle/>
+          <a:p>
+            <a:endParaRPr lang="it-IT"/>
+          </a:p>
+        </p:txBody>
+      </p:sp>
+      <p:sp>
+        <p:nvSpPr>
+          <p:cNvPr id="20" name="Casella di testo 36">
+            <a:extLst>
+              <a:ext uri="{FF2B5EF4-FFF2-40B4-BE49-F238E27FC236}">
+                <a16:creationId xmlns:a16="http://schemas.microsoft.com/office/drawing/2014/main" id="{C1AF6753-C9FF-C751-D6D7-2E207F5B298D}"/>
+              </a:ext>
+            </a:extLst>
+          </p:cNvPr>
+          <p:cNvSpPr txBox="1">
+            <a:spLocks noChangeArrowheads="1"/>
+          </p:cNvSpPr>
+          <p:nvPr/>
+        </p:nvSpPr>
+        <p:spPr bwMode="auto">
+          <a:xfrm>
+            <a:off x="1201372" y="1598434"/>
+            <a:ext cx="5156930" cy="367119"/>
+          </a:xfrm>
+          <a:prstGeom prst="rect">
+            <a:avLst/>
+          </a:prstGeom>
+          <a:noFill/>
+          <a:ln>
+            <a:noFill/>
+          </a:ln>
+          <a:effectLst/>
+        </p:spPr>
+        <p:txBody>
+          <a:bodyPr rot="0" vert="horz" wrap="square" lIns="36576" tIns="36576" rIns="36576" bIns="36576" anchor="ctr" anchorCtr="0" upright="1">
+            <a:noAutofit/>
+          </a:bodyPr>
+          <a:lstStyle/>
+          <a:p>
+            <a:pPr>
+              <a:lnSpc>
+                <a:spcPct val="107000"/>
+              </a:lnSpc>
+              <a:spcAft>
+                <a:spcPts val="800"/>
+              </a:spcAft>
+            </a:pPr>
+            <a:r>
+              <a:rPr lang="it-IT" sz="1500">
+                <a:solidFill>
+                  <a:schemeClr val="bg1"/>
+                </a:solidFill>
+                <a:effectLst/>
+                <a:latin typeface="Avenir Next LT Pro" panose="020B0504020202020204" pitchFamily="34" charset="0"/>
+                <a:ea typeface="Calibri" panose="020F0502020204030204" pitchFamily="34" charset="0"/>
+                <a:cs typeface="Times New Roman" panose="02020603050405020304" pitchFamily="18" charset="0"/>
+              </a:rPr>
+              <a:t>Principali aggiornamenti normativi</a:t>
+            </a:r>
+          </a:p>
+        </p:txBody>
+      </p:sp>
+      <p:pic>
+        <p:nvPicPr>
+          <p:cNvPr id="25" name="Immagine 24" descr="Immagine che contiene interni, metallo, sedendo, edificio&#10;&#10;Descrizione generata automaticamente">
+            <a:extLst>
+              <a:ext uri="{FF2B5EF4-FFF2-40B4-BE49-F238E27FC236}">
+                <a16:creationId xmlns:a16="http://schemas.microsoft.com/office/drawing/2014/main" id="{160A2117-ED78-5A9F-5C18-7EC322B5827B}"/>
+              </a:ext>
+            </a:extLst>
+          </p:cNvPr>
+          <p:cNvPicPr/>
+          <p:nvPr/>
+        </p:nvPicPr>
+        <p:blipFill rotWithShape="1">
+          <a:blip r:embed="rId6" cstate="print">
+            <a:extLst>
+              <a:ext uri="{28A0092B-C50C-407E-A947-70E740481C1C}">
+                <a14:useLocalDpi xmlns:a14="http://schemas.microsoft.com/office/drawing/2010/main" val="0"/>
+              </a:ext>
+            </a:extLst>
+          </a:blip>
+          <a:srcRect t="17038" b="38097"/>
+          <a:stretch/>
+        </p:blipFill>
+        <p:spPr bwMode="auto">
+          <a:xfrm>
+            <a:off x="3176" y="0"/>
+            <a:ext cx="7556499" cy="1662545"/>
+          </a:xfrm>
+          <a:prstGeom prst="rect">
+            <a:avLst/>
+          </a:prstGeom>
+          <a:ln>
+            <a:noFill/>
+          </a:ln>
+          <a:extLst>
+            <a:ext uri="{53640926-AAD7-44D8-BBD7-CCE9431645EC}">
+              <a14:shadowObscured xmlns:a14="http://schemas.microsoft.com/office/drawing/2010/main"/>
+            </a:ext>
+          </a:extLst>
+        </p:spPr>
+      </p:pic>
+      <p:sp>
+        <p:nvSpPr>
+          <p:cNvPr id="34" name="Rettangolo 33">
+            <a:extLst>
+              <a:ext uri="{FF2B5EF4-FFF2-40B4-BE49-F238E27FC236}">
+                <a16:creationId xmlns:a16="http://schemas.microsoft.com/office/drawing/2014/main" id="{A167D32C-9441-979B-CF7F-1365A084FE28}"/>
+              </a:ext>
+            </a:extLst>
+          </p:cNvPr>
+          <p:cNvSpPr/>
+          <p:nvPr/>
+        </p:nvSpPr>
+        <p:spPr>
+          <a:xfrm>
+            <a:off x="0" y="0"/>
+            <a:ext cx="7559675" cy="1662545"/>
+          </a:xfrm>
+          <a:prstGeom prst="rect">
+            <a:avLst/>
+          </a:prstGeom>
+          <a:solidFill>
+            <a:srgbClr val="100F16">
+              <a:alpha val="48000"/>
+            </a:srgbClr>
+          </a:solidFill>
+          <a:ln w="12700">
+            <a:miter lim="400000"/>
+          </a:ln>
+          <a:effectLst/>
+        </p:spPr>
+        <p:txBody>
+          <a:bodyPr lIns="50800" tIns="50800" rIns="50800" bIns="50800" anchor="ctr"/>
+          <a:lstStyle/>
+          <a:p>
+            <a:pPr algn="ctr" defTabSz="1828754" hangingPunct="1">
+              <a:lnSpc>
+                <a:spcPct val="100000"/>
+              </a:lnSpc>
+            </a:pPr>
+            <a:endParaRPr lang="it-IT" sz="3200" kern="1200" cap="none" spc="0">
+              <a:solidFill>
+                <a:srgbClr val="FFFFFF"/>
+              </a:solidFill>
+              <a:latin typeface="Helvetica Light"/>
+              <a:sym typeface="Helvetica Light"/>
+            </a:endParaRPr>
+          </a:p>
+        </p:txBody>
+      </p:sp>
+      <p:sp>
+        <p:nvSpPr>
+          <p:cNvPr id="39" name="Titolo della presentazione…">
+            <a:extLst>
+              <a:ext uri="{FF2B5EF4-FFF2-40B4-BE49-F238E27FC236}">
+                <a16:creationId xmlns:a16="http://schemas.microsoft.com/office/drawing/2014/main" id="{4F43DB77-4268-DA80-1C1D-CA9DDCE0944B}"/>
+              </a:ext>
+            </a:extLst>
+          </p:cNvPr>
+          <p:cNvSpPr txBox="1"/>
+          <p:nvPr/>
+        </p:nvSpPr>
+        <p:spPr>
+          <a:xfrm>
+            <a:off x="1348384" y="559834"/>
+            <a:ext cx="4862907" cy="547493"/>
+          </a:xfrm>
+          <a:prstGeom prst="rect">
+            <a:avLst/>
+          </a:prstGeom>
+          <a:ln w="12700">
+            <a:miter lim="400000"/>
+          </a:ln>
+          <a:extLst>
+            <a:ext uri="{C572A759-6A51-4108-AA02-DFA0A04FC94B}">
+              <ma14:wrappingTextBoxFlag xmlns="" xmlns:ma14="http://schemas.microsoft.com/office/mac/drawingml/2011/main" val="1"/>
+            </a:ext>
+          </a:extLst>
+        </p:spPr>
+        <p:txBody>
+          <a:bodyPr wrap="square" lIns="27259" tIns="27259" rIns="27259" bIns="27259">
+            <a:spAutoFit/>
+          </a:bodyPr>
+          <a:lstStyle/>
+          <a:p>
+            <a:pPr>
+              <a:defRPr sz="3200">
+                <a:solidFill>
+                  <a:srgbClr val="1F4B80"/>
+                </a:solidFill>
+                <a:latin typeface="Lucida Sans"/>
+                <a:ea typeface="Lucida Sans"/>
+                <a:cs typeface="Lucida Sans"/>
+                <a:sym typeface="Lucida Sans"/>
+              </a:defRPr>
+            </a:pPr>
+            <a:r>
+              <a:rPr lang="it-IT" sz="3200" i="1" dirty="0">
+                <a:solidFill>
+                  <a:schemeClr val="bg1"/>
+                </a:solidFill>
+                <a:latin typeface="Avenir Next LT Pro" panose="020B0504020202020204" pitchFamily="34" charset="0"/>
+              </a:rPr>
+              <a:t>Alert Normativo</a:t>
+            </a:r>
+          </a:p>
+        </p:txBody>
+      </p:sp>
+      <p:pic>
+        <p:nvPicPr>
+          <p:cNvPr id="40" name="Immagine 39">
+            <a:extLst>
+              <a:ext uri="{FF2B5EF4-FFF2-40B4-BE49-F238E27FC236}">
+                <a16:creationId xmlns:a16="http://schemas.microsoft.com/office/drawing/2014/main" id="{411FB66B-4A3F-AA41-9DD0-D66F41C1BDFE}"/>
+              </a:ext>
+            </a:extLst>
+          </p:cNvPr>
+          <p:cNvPicPr>
+            <a:picLocks noChangeAspect="1"/>
+          </p:cNvPicPr>
+          <p:nvPr/>
+        </p:nvPicPr>
+        <p:blipFill>
+          <a:blip r:embed="rId7"/>
+          <a:stretch>
+            <a:fillRect/>
+          </a:stretch>
+        </p:blipFill>
+        <p:spPr>
+          <a:xfrm>
+            <a:off x="71438" y="305346"/>
+            <a:ext cx="1775227" cy="1186673"/>
+          </a:xfrm>
+          <a:prstGeom prst="rect">
+            <a:avLst/>
+          </a:prstGeom>
+        </p:spPr>
+      </p:pic>
+      <p:pic>
+        <p:nvPicPr>
+          <p:cNvPr id="41" name="Immagine 40">
+            <a:extLst>
+              <a:ext uri="{FF2B5EF4-FFF2-40B4-BE49-F238E27FC236}">
+                <a16:creationId xmlns:a16="http://schemas.microsoft.com/office/drawing/2014/main" id="{A69C57D1-C089-5A2A-7E7F-4E44E5683875}"/>
+              </a:ext>
+            </a:extLst>
+          </p:cNvPr>
+          <p:cNvPicPr>
+            <a:picLocks noChangeAspect="1"/>
+          </p:cNvPicPr>
+          <p:nvPr/>
+        </p:nvPicPr>
+        <p:blipFill>
+          <a:blip r:embed="rId8" cstate="print">
+            <a:extLst>
+              <a:ext uri="{28A0092B-C50C-407E-A947-70E740481C1C}">
+                <a14:useLocalDpi xmlns:a14="http://schemas.microsoft.com/office/drawing/2010/main" val="0"/>
+              </a:ext>
+            </a:extLst>
+          </a:blip>
+          <a:srcRect/>
+          <a:stretch/>
+        </p:blipFill>
+        <p:spPr>
+          <a:xfrm>
+            <a:off x="7010998" y="10363699"/>
+            <a:ext cx="467110" cy="264444"/>
+          </a:xfrm>
+          <a:prstGeom prst="rect">
+            <a:avLst/>
+          </a:prstGeom>
+        </p:spPr>
+      </p:pic>
+      <p:sp>
+        <p:nvSpPr>
+          <p:cNvPr id="3" name="Rettangolo 2">
+            <a:extLst>
+              <a:ext uri="{FF2B5EF4-FFF2-40B4-BE49-F238E27FC236}">
+                <a16:creationId xmlns:a16="http://schemas.microsoft.com/office/drawing/2014/main" id="{2FBF742E-F682-7085-EE4E-3DF4F0B23964}"/>
+              </a:ext>
+            </a:extLst>
+          </p:cNvPr>
+          <p:cNvSpPr>
+            <a:spLocks noChangeArrowheads="1"/>
+          </p:cNvSpPr>
+          <p:nvPr/>
+        </p:nvSpPr>
+        <p:spPr bwMode="auto">
+          <a:xfrm rot="16200000">
+            <a:off x="3316380" y="6446398"/>
+            <a:ext cx="923396" cy="7563199"/>
+          </a:xfrm>
+          <a:prstGeom prst="rect">
+            <a:avLst/>
+          </a:prstGeom>
+          <a:solidFill>
+            <a:srgbClr val="333F50"/>
+          </a:solidFill>
+          <a:ln>
+            <a:noFill/>
+          </a:ln>
+          <a:effectLst/>
+          <a:extLst>
+            <a:ext uri="{91240B29-F687-4F45-9708-019B960494DF}">
+              <a14:hiddenLine xmlns:a14="http://schemas.microsoft.com/office/drawing/2010/main" w="9525" algn="in">
+                <a:solidFill>
+                  <a:srgbClr val="212120"/>
+                </a:solidFill>
+                <a:miter lim="800000"/>
+                <a:headEnd/>
+                <a:tailEnd/>
+              </a14:hiddenLine>
+            </a:ext>
+            <a:ext uri="{AF507438-7753-43E0-B8FC-AC1667EBCBE1}">
+              <a14:hiddenEffects xmlns:a14="http://schemas.microsoft.com/office/drawing/2010/main">
+                <a:effectLst>
+                  <a:outerShdw dist="35921" dir="2700000" algn="ctr" rotWithShape="0">
+                    <a:srgbClr val="DCD6D4"/>
+                  </a:outerShdw>
+                </a:effectLst>
+              </a14:hiddenEffects>
+            </a:ext>
+          </a:extLst>
+        </p:spPr>
+        <p:txBody>
+          <a:bodyPr rot="0" vert="horz" wrap="square" lIns="36576" tIns="36576" rIns="36576" bIns="36576" anchor="t" anchorCtr="0" upright="1">
+            <a:noAutofit/>
+          </a:bodyPr>
+          <a:lstStyle/>
+          <a:p>
+            <a:pPr marL="0" marR="0" lvl="0" indent="0" algn="ctr" defTabSz="430322" rtl="0" eaLnBrk="1" fontAlgn="auto" latinLnBrk="0" hangingPunct="0">
+              <a:lnSpc>
+                <a:spcPct val="100000"/>
+              </a:lnSpc>
+              <a:spcBef>
+                <a:spcPts val="0"/>
+              </a:spcBef>
+              <a:spcAft>
+                <a:spcPts val="0"/>
+              </a:spcAft>
+              <a:buClrTx/>
+              <a:buSzTx/>
+              <a:buFontTx/>
+              <a:buNone/>
+              <a:tabLst/>
+              <a:defRPr/>
+            </a:pPr>
+            <a:endParaRPr kumimoji="0" lang="it-IT" sz="1768" b="1" i="0" u="none" strike="noStrike" kern="0" cap="none" spc="0" normalizeH="0" baseline="0" noProof="0">
+              <a:ln>
+                <a:noFill/>
+              </a:ln>
+              <a:solidFill>
+                <a:srgbClr val="000000"/>
+              </a:solidFill>
+              <a:effectLst/>
+              <a:uLnTx/>
+              <a:uFillTx/>
+              <a:latin typeface="Helvetica Neue"/>
+              <a:sym typeface="Helvetica Neue"/>
+            </a:endParaRPr>
+          </a:p>
+        </p:txBody>
+      </p:sp>
+      <p:sp>
+        <p:nvSpPr>
+          <p:cNvPr id="5" name="CasellaDiTesto 4">
+            <a:extLst>
+              <a:ext uri="{FF2B5EF4-FFF2-40B4-BE49-F238E27FC236}">
+                <a16:creationId xmlns:a16="http://schemas.microsoft.com/office/drawing/2014/main" id="{72A0793B-4E1B-4A78-E940-83EEF5D9AD02}"/>
+              </a:ext>
+            </a:extLst>
+          </p:cNvPr>
+          <p:cNvSpPr txBox="1"/>
+          <p:nvPr/>
+        </p:nvSpPr>
+        <p:spPr>
+          <a:xfrm>
+            <a:off x="101586" y="9873419"/>
+            <a:ext cx="6667513" cy="441146"/>
+          </a:xfrm>
+          <a:prstGeom prst="rect">
+            <a:avLst/>
+          </a:prstGeom>
+          <a:noFill/>
+          <a:ln w="12700" cap="flat">
+            <a:noFill/>
+            <a:miter lim="400000"/>
+          </a:ln>
+          <a:effectLst/>
+          <a:sp3d/>
+        </p:spPr>
+        <p:style>
+          <a:lnRef idx="0">
+            <a:scrgbClr r="0" g="0" b="0"/>
+          </a:lnRef>
+          <a:fillRef idx="0">
+            <a:scrgbClr r="0" g="0" b="0"/>
+          </a:fillRef>
+          <a:effectRef idx="0">
+            <a:scrgbClr r="0" g="0" b="0"/>
+          </a:effectRef>
+          <a:fontRef idx="none"/>
+        </p:style>
+        <p:txBody>
+          <a:bodyPr rot="0" spcFirstLastPara="1" vertOverflow="overflow" horzOverflow="overflow" vert="horz" wrap="square" lIns="50800" tIns="50800" rIns="50800" bIns="50800" numCol="1" spcCol="38100" rtlCol="0" anchor="ctr">
+            <a:spAutoFit/>
+          </a:bodyPr>
+          <a:lstStyle/>
+          <a:p>
+            <a:pPr marL="0" marR="0" lvl="0" indent="0" algn="l" defTabSz="584200" rtl="0" eaLnBrk="1" fontAlgn="auto" latinLnBrk="0" hangingPunct="0">
+              <a:lnSpc>
+                <a:spcPct val="100000"/>
+              </a:lnSpc>
+              <a:spcBef>
+                <a:spcPts val="0"/>
+              </a:spcBef>
+              <a:spcAft>
+                <a:spcPts val="0"/>
+              </a:spcAft>
+              <a:buClrTx/>
+              <a:buSzTx/>
+              <a:buFontTx/>
+              <a:buNone/>
+              <a:tabLst/>
+              <a:defRPr/>
+            </a:pPr>
+            <a:r>
+              <a:rPr kumimoji="0" lang="it-IT" sz="1050" b="1" i="0" u="none" strike="noStrike" kern="0" cap="none" spc="0" normalizeH="0" baseline="0" noProof="0">
+                <a:ln>
+                  <a:noFill/>
+                </a:ln>
+                <a:solidFill>
+                  <a:srgbClr val="FFFFFF"/>
+                </a:solidFill>
+                <a:effectLst/>
+                <a:uLnTx/>
+                <a:uFillTx/>
+                <a:latin typeface="Avenir Next LT Pro" panose="020B0504020202020204" pitchFamily="34" charset="0"/>
+                <a:sym typeface="Helvetica Neue"/>
+              </a:rPr>
+              <a:t>Per informazioni e approfondimenti rivolgersi al Presidio Normativo Finance di SCS al seguente indirizzo e-mail: alert@scsconsulting.it</a:t>
+            </a:r>
+          </a:p>
+        </p:txBody>
+      </p:sp>
+      <p:sp>
+        <p:nvSpPr>
+          <p:cNvPr id="6" name="Rectangle 23">
+            <a:extLst>
+              <a:ext uri="{FF2B5EF4-FFF2-40B4-BE49-F238E27FC236}">
+                <a16:creationId xmlns:a16="http://schemas.microsoft.com/office/drawing/2014/main" id="{913652EC-EAAA-978B-D557-4AF43638C302}"/>
+              </a:ext>
+            </a:extLst>
+          </p:cNvPr>
+          <p:cNvSpPr>
+            <a:spLocks noChangeArrowheads="1"/>
+          </p:cNvSpPr>
+          <p:nvPr/>
+        </p:nvSpPr>
+        <p:spPr bwMode="auto">
+          <a:xfrm>
+            <a:off x="85726" y="10372647"/>
+            <a:ext cx="6588000" cy="200055"/>
+          </a:xfrm>
+          <a:prstGeom prst="rect">
+            <a:avLst/>
+          </a:prstGeom>
+          <a:noFill/>
+          <a:ln>
+            <a:noFill/>
+          </a:ln>
+          <a:effectLst/>
+          <a:extLst>
+            <a:ext uri="{909E8E84-426E-40DD-AFC4-6F175D3DCCD1}">
+              <a14:hiddenFill xmlns:a14="http://schemas.microsoft.com/office/drawing/2010/main">
+                <a:solidFill>
+                  <a:schemeClr val="accent1"/>
+                </a:solidFill>
+              </a14:hiddenFill>
+            </a:ext>
+            <a:ext uri="{91240B29-F687-4F45-9708-019B960494DF}">
+              <a14:hiddenLine xmlns:a14="http://schemas.microsoft.com/office/drawing/2010/main" w="9525">
+                <a:solidFill>
+                  <a:schemeClr val="tx1"/>
+                </a:solidFill>
+                <a:miter lim="800000"/>
+                <a:headEnd/>
+                <a:tailEnd/>
+              </a14:hiddenLine>
+            </a:ext>
+            <a:ext uri="{AF507438-7753-43E0-B8FC-AC1667EBCBE1}">
+              <a14:hiddenEffects xmlns:a14="http://schemas.microsoft.com/office/drawing/2010/main">
+                <a:effectLst>
+                  <a:outerShdw dist="35921" dir="2700000" algn="ctr" rotWithShape="0">
+                    <a:schemeClr val="bg2"/>
+                  </a:outerShdw>
+                </a:effectLst>
+              </a14:hiddenEffects>
+            </a:ext>
+          </a:extLst>
+        </p:spPr>
+        <p:txBody>
+          <a:bodyPr vert="horz" wrap="square" lIns="91440" tIns="45720" rIns="91440" bIns="45720" numCol="1" anchor="ctr" anchorCtr="0" compatLnSpc="1">
+            <a:prstTxWarp prst="textNoShape">
+              <a:avLst/>
+            </a:prstTxWarp>
+            <a:spAutoFit/>
+          </a:bodyPr>
+          <a:lstStyle/>
+          <a:p>
+            <a:pPr marL="0" marR="0" lvl="0" indent="0" algn="l" defTabSz="914400" rtl="0" eaLnBrk="0" fontAlgn="base" latinLnBrk="0" hangingPunct="0">
+              <a:lnSpc>
+                <a:spcPct val="100000"/>
+              </a:lnSpc>
+              <a:spcBef>
+                <a:spcPct val="0"/>
+              </a:spcBef>
+              <a:spcAft>
+                <a:spcPct val="0"/>
+              </a:spcAft>
+              <a:buClrTx/>
+              <a:buSzTx/>
+              <a:buFontTx/>
+              <a:buNone/>
+              <a:tabLst/>
+              <a:defRPr/>
+            </a:pPr>
+            <a:r>
+              <a:rPr kumimoji="0" lang="it-IT" altLang="it-IT" sz="700" b="0" i="1" u="none" strike="noStrike" kern="0" cap="none" spc="0" normalizeH="0" baseline="0" noProof="0">
+                <a:ln>
+                  <a:noFill/>
+                </a:ln>
+                <a:solidFill>
+                  <a:srgbClr val="FFFFFF"/>
+                </a:solidFill>
+                <a:effectLst/>
+                <a:uLnTx/>
+                <a:uFillTx/>
+                <a:latin typeface="Avenir Next LT Pro" panose="020B0504020202020204" pitchFamily="34" charset="0"/>
+                <a:ea typeface="Calibri" panose="020F0502020204030204" pitchFamily="34" charset="0"/>
+                <a:cs typeface="Calibri" panose="020F0502020204030204" pitchFamily="34" charset="0"/>
+                <a:sym typeface="Helvetica Neue"/>
+              </a:rPr>
+              <a:t>Il presente documento comprende le news identificate come coerenti con il focus aziendale dell’Area Finance ed in linea con gli eventuali interessi correlati</a:t>
+            </a:r>
+            <a:endParaRPr kumimoji="0" lang="it-IT" altLang="it-IT" sz="700" b="0" i="0" u="none" strike="noStrike" kern="0" cap="none" spc="0" normalizeH="0" baseline="0" noProof="0">
+              <a:ln>
+                <a:noFill/>
+              </a:ln>
+              <a:solidFill>
+                <a:srgbClr val="FFFFFF"/>
+              </a:solidFill>
+              <a:effectLst/>
+              <a:uLnTx/>
+              <a:uFillTx/>
+              <a:latin typeface="Avenir Next LT Pro" panose="020B0504020202020204" pitchFamily="34" charset="0"/>
+              <a:cs typeface="Calibri" panose="020F0502020204030204" pitchFamily="34" charset="0"/>
+              <a:sym typeface="Helvetica Neue"/>
+            </a:endParaRPr>
+          </a:p>
+        </p:txBody>
+      </p:sp>
+      <p:pic>
+        <p:nvPicPr>
+          <p:cNvPr id="8" name="Immagine 7" descr="Immagine che contiene testo, clipart&#10;&#10;Descrizione generata automaticamente">
+            <a:extLst>
+              <a:ext uri="{FF2B5EF4-FFF2-40B4-BE49-F238E27FC236}">
+                <a16:creationId xmlns:a16="http://schemas.microsoft.com/office/drawing/2014/main" id="{27D05DDE-F95A-D769-F1FD-E3C8534884BC}"/>
+              </a:ext>
+            </a:extLst>
+          </p:cNvPr>
+          <p:cNvPicPr>
+            <a:picLocks noChangeAspect="1"/>
+          </p:cNvPicPr>
+          <p:nvPr/>
+        </p:nvPicPr>
+        <p:blipFill>
+          <a:blip r:embed="rId7"/>
+          <a:stretch>
+            <a:fillRect/>
+          </a:stretch>
+        </p:blipFill>
+        <p:spPr>
+          <a:xfrm>
+            <a:off x="6769100" y="10092340"/>
+            <a:ext cx="654557" cy="437547"/>
+          </a:xfrm>
+          <a:prstGeom prst="rect">
+            <a:avLst/>
+          </a:prstGeom>
+        </p:spPr>
+      </p:pic>
+      <p:sp>
+        <p:nvSpPr>
+          <p:cNvPr id="24" name="CasellaDiTesto 23">
+            <a:extLst>
+              <a:ext uri="{FF2B5EF4-FFF2-40B4-BE49-F238E27FC236}">
+                <a16:creationId xmlns:a16="http://schemas.microsoft.com/office/drawing/2014/main" id="{D852CF60-BBA1-AB84-0235-A35E7C7392E2}"/>
+              </a:ext>
+            </a:extLst>
+          </p:cNvPr>
+          <p:cNvSpPr txBox="1"/>
+          <p:nvPr/>
+        </p:nvSpPr>
+        <p:spPr>
+          <a:xfrm>
+            <a:off x="4825994" y="89322"/>
+            <a:ext cx="2433740" cy="595035"/>
+          </a:xfrm>
+          <a:prstGeom prst="rect">
+            <a:avLst/>
+          </a:prstGeom>
+          <a:noFill/>
+          <a:ln w="12700" cap="flat">
+            <a:noFill/>
+            <a:miter lim="400000"/>
+          </a:ln>
+          <a:effectLst/>
+          <a:sp3d/>
+        </p:spPr>
+        <p:style>
+          <a:lnRef idx="0">
+            <a:scrgbClr r="0" g="0" b="0"/>
+          </a:lnRef>
+          <a:fillRef idx="0">
+            <a:scrgbClr r="0" g="0" b="0"/>
+          </a:fillRef>
+          <a:effectRef idx="0">
+            <a:scrgbClr r="0" g="0" b="0"/>
+          </a:effectRef>
+          <a:fontRef idx="none"/>
+        </p:style>
+        <p:txBody>
+          <a:bodyPr rot="0" spcFirstLastPara="1" vertOverflow="overflow" horzOverflow="overflow" vert="horz" wrap="square" lIns="50800" tIns="50800" rIns="50800" bIns="50800" numCol="1" spcCol="38100" rtlCol="0" anchor="ctr">
+            <a:spAutoFit/>
+          </a:bodyPr>
+          <a:lstStyle/>
+          <a:p>
+            <a:pPr marL="0" marR="0" indent="0" algn="r" defTabSz="584200" rtl="0" fontAlgn="auto" latinLnBrk="0" hangingPunct="0">
+              <a:lnSpc>
+                <a:spcPct val="100000"/>
+              </a:lnSpc>
+              <a:spcBef>
+                <a:spcPts val="0"/>
+              </a:spcBef>
+              <a:spcAft>
+                <a:spcPts val="0"/>
+              </a:spcAft>
+              <a:buClrTx/>
+              <a:buSzTx/>
+              <a:buFontTx/>
+              <a:buNone/>
+              <a:tabLst/>
+            </a:pPr>
+            <a:r>
+              <a:rPr kumimoji="0" lang="it-IT" sz="1600" b="1" i="1" u="none" strike="noStrike" cap="none" spc="0" normalizeH="0" baseline="0" dirty="0">
+                <a:ln>
+                  <a:noFill/>
+                </a:ln>
+                <a:solidFill>
+                  <a:schemeClr val="bg1"/>
+                </a:solidFill>
+                <a:effectLst/>
+                <a:uFillTx/>
+                <a:latin typeface="Avenir Next LT Pro" panose="020B0504020202020204" pitchFamily="34" charset="0"/>
+                <a:cs typeface="Calibri Light"/>
+                <a:sym typeface="Helvetica Neue"/>
+              </a:rPr>
+              <a:t>N. 2</a:t>
+            </a:r>
+            <a:endParaRPr kumimoji="0" lang="it-IT" sz="1600" b="1" i="1" u="none" strike="noStrike" cap="none" spc="0" normalizeH="0" baseline="0" dirty="0">
+              <a:ln>
+                <a:noFill/>
+              </a:ln>
+              <a:solidFill>
+                <a:schemeClr val="bg1"/>
+              </a:solidFill>
+              <a:effectLst/>
+              <a:uFillTx/>
+              <a:latin typeface="Avenir Next LT Pro" panose="020B0504020202020204" pitchFamily="34" charset="0"/>
+              <a:cs typeface="Calibri Light" panose="020F0302020204030204" pitchFamily="34" charset="0"/>
+              <a:sym typeface="Helvetica Neue"/>
+            </a:endParaRPr>
+          </a:p>
+          <a:p>
+            <a:pPr algn="r" defTabSz="584200"/>
+            <a:r>
+              <a:rPr lang="it-IT" sz="1600" i="1" dirty="0">
+                <a:solidFill>
+                  <a:schemeClr val="bg1"/>
+                </a:solidFill>
+                <a:latin typeface="Avenir Next LT Pro" panose="020B0504020202020204" pitchFamily="34" charset="0"/>
+                <a:cs typeface="Calibri Light"/>
+              </a:rPr>
+              <a:t>Maggio 2026</a:t>
+            </a:r>
+            <a:endParaRPr lang="it-IT" sz="1600" b="1" i="1" u="none" strike="noStrike" cap="none" spc="0" normalizeH="0" baseline="0" dirty="0">
+              <a:ln>
+                <a:noFill/>
+              </a:ln>
+              <a:solidFill>
+                <a:schemeClr val="bg1"/>
+              </a:solidFill>
+              <a:effectLst/>
+              <a:uFillTx/>
+              <a:latin typeface="Avenir Next LT Pro" panose="020B0504020202020204" pitchFamily="34" charset="0"/>
+              <a:cs typeface="Calibri Light" panose="020F0302020204030204" pitchFamily="34" charset="0"/>
+            </a:endParaRPr>
+          </a:p>
+        </p:txBody>
+      </p:sp>
+    </p:spTree>
+    <p:extLst>
+      <p:ext uri="{BB962C8B-B14F-4D97-AF65-F5344CB8AC3E}">
+        <p14:creationId xmlns:p14="http://schemas.microsoft.com/office/powerpoint/2010/main" val="3220581202"/>
+      </p:ext>
+    </p:extLst>
+  </p:cSld>
+  <p:clrMapOvr>
+    <a:masterClrMapping/>
+  </p:clrMapOvr>
+  <mc:AlternateContent xmlns:mc="http://schemas.openxmlformats.org/markup-compatibility/2006">
+    <mc:Choice xmlns:p14="http://schemas.microsoft.com/office/powerpoint/2010/main" Requires="p14">
+      <p:transition p14:dur="10"/>
+    </mc:Choice>
+    <mc:Fallback>
+      <p:transition/>
+    </mc:Fallback>
+  </mc:AlternateContent>
+</p:sld>
+</file>
+
+<file path=ppt/slides/slide3.xml><?xml version="1.0" encoding="utf-8"?>
+<p:sld xmlns:a="http://schemas.openxmlformats.org/drawingml/2006/main" xmlns:r="http://schemas.openxmlformats.org/officeDocument/2006/relationships" xmlns:p="http://schemas.openxmlformats.org/presentationml/2006/main">
+  <p:cSld>
+    <p:spTree>
+      <p:nvGrpSpPr>
+        <p:cNvPr id="1" name="">
+          <a:extLst>
+            <a:ext uri="{FF2B5EF4-FFF2-40B4-BE49-F238E27FC236}">
+              <a16:creationId xmlns:a16="http://schemas.microsoft.com/office/drawing/2014/main" id="{AFBE4FAB-664C-94D7-984B-2C798AAF92D7}"/>
+            </a:ext>
+          </a:extLst>
+        </p:cNvPr>
+        <p:cNvGrpSpPr/>
+        <p:nvPr/>
+      </p:nvGrpSpPr>
+      <p:grpSpPr>
+        <a:xfrm>
+          <a:off x="0" y="0"/>
+          <a:ext cx="0" cy="0"/>
+          <a:chOff x="0" y="0"/>
+          <a:chExt cx="0" cy="0"/>
+        </a:xfrm>
+      </p:grpSpPr>
+      <p:graphicFrame>
+        <p:nvGraphicFramePr>
+          <p:cNvPr id="2" name="Oggetto 1" hidden="1">
+            <a:extLst>
+              <a:ext uri="{FF2B5EF4-FFF2-40B4-BE49-F238E27FC236}">
+                <a16:creationId xmlns:a16="http://schemas.microsoft.com/office/drawing/2014/main" id="{B1A5811A-2F00-D975-D072-806601324AC2}"/>
+              </a:ext>
+            </a:extLst>
+          </p:cNvPr>
+          <p:cNvGraphicFramePr>
+            <a:graphicFrameLocks noChangeAspect="1"/>
+          </p:cNvGraphicFramePr>
+          <p:nvPr>
+            <p:custDataLst>
+              <p:tags r:id="rId1"/>
+            </p:custDataLst>
+          </p:nvPr>
+        </p:nvGraphicFramePr>
+        <p:xfrm>
+          <a:off x="1588" y="1588"/>
+          <a:ext cx="1588" cy="1588"/>
+        </p:xfrm>
+        <a:graphic>
+          <a:graphicData uri="http://schemas.openxmlformats.org/presentationml/2006/ole">
+            <mc:AlternateContent xmlns:mc="http://schemas.openxmlformats.org/markup-compatibility/2006">
+              <mc:Choice xmlns:v="urn:schemas-microsoft-com:vml" Requires="v">
+                <p:oleObj name="Diapositiva think-cell" r:id="rId4" imgW="395" imgH="394" progId="TCLayout.ActiveDocument.1">
+                  <p:embed/>
+                </p:oleObj>
+              </mc:Choice>
+              <mc:Fallback>
+                <p:oleObj name="Diapositiva think-cell" r:id="rId4" imgW="395" imgH="394" progId="TCLayout.ActiveDocument.1">
+                  <p:embed/>
+                  <p:pic>
+                    <p:nvPicPr>
+                      <p:cNvPr id="2" name="Oggetto 1" hidden="1">
+                        <a:extLst>
+                          <a:ext uri="{FF2B5EF4-FFF2-40B4-BE49-F238E27FC236}">
+                            <a16:creationId xmlns:a16="http://schemas.microsoft.com/office/drawing/2014/main" id="{714AE683-9214-DDC5-4D61-1999D6CCE19A}"/>
+                          </a:ext>
+                        </a:extLst>
+                      </p:cNvPr>
+                      <p:cNvPicPr/>
+                      <p:nvPr/>
+                    </p:nvPicPr>
+                    <p:blipFill>
+                      <a:blip r:embed="rId5"/>
+                      <a:stretch>
+                        <a:fillRect/>
+                      </a:stretch>
+                    </p:blipFill>
+                    <p:spPr>
+                      <a:xfrm>
+                        <a:off x="1588" y="1588"/>
+                        <a:ext cx="1588" cy="1588"/>
+                      </a:xfrm>
+                      <a:prstGeom prst="rect">
+                        <a:avLst/>
+                      </a:prstGeom>
+                    </p:spPr>
+                  </p:pic>
+                </p:oleObj>
+              </mc:Fallback>
+            </mc:AlternateContent>
+          </a:graphicData>
+        </a:graphic>
+      </p:graphicFrame>
+      <p:sp>
+        <p:nvSpPr>
+          <p:cNvPr id="51" name="Casella di testo 36">
+            <a:extLst>
+              <a:ext uri="{FF2B5EF4-FFF2-40B4-BE49-F238E27FC236}">
+                <a16:creationId xmlns:a16="http://schemas.microsoft.com/office/drawing/2014/main" id="{D6C7C773-F272-4CFD-547C-63F7F89F2C12}"/>
+              </a:ext>
+            </a:extLst>
+          </p:cNvPr>
+          <p:cNvSpPr txBox="1">
+            <a:spLocks noChangeArrowheads="1"/>
+          </p:cNvSpPr>
+          <p:nvPr/>
+        </p:nvSpPr>
+        <p:spPr bwMode="auto">
+          <a:xfrm>
+            <a:off x="1365790" y="1603849"/>
+            <a:ext cx="4828095" cy="367119"/>
+          </a:xfrm>
+          <a:prstGeom prst="rect">
+            <a:avLst/>
+          </a:prstGeom>
+          <a:noFill/>
+          <a:ln>
+            <a:noFill/>
+          </a:ln>
+          <a:effectLst/>
+        </p:spPr>
+        <p:txBody>
+          <a:bodyPr rot="0" vert="horz" wrap="square" lIns="36576" tIns="36576" rIns="36576" bIns="36576" anchor="ctr" anchorCtr="0" upright="1">
+            <a:noAutofit/>
+          </a:bodyPr>
+          <a:lstStyle/>
+          <a:p>
+            <a:pPr>
+              <a:lnSpc>
+                <a:spcPct val="107000"/>
+              </a:lnSpc>
+              <a:spcAft>
+                <a:spcPts val="800"/>
+              </a:spcAft>
+            </a:pPr>
+            <a:r>
+              <a:rPr lang="it-IT" sz="1600">
+                <a:solidFill>
+                  <a:schemeClr val="bg1"/>
+                </a:solidFill>
+                <a:effectLst/>
+                <a:latin typeface="Trebuchet MS" panose="020B0603020202020204" pitchFamily="34" charset="0"/>
+                <a:ea typeface="Calibri" panose="020F0502020204030204" pitchFamily="34" charset="0"/>
+                <a:cs typeface="Traditional Arabic" panose="020B0604020202020204" pitchFamily="18" charset="-78"/>
+              </a:rPr>
+              <a:t>SOMMARIO</a:t>
+            </a:r>
+          </a:p>
+        </p:txBody>
+      </p:sp>
+      <p:sp>
+        <p:nvSpPr>
+          <p:cNvPr id="19" name="Rettangolo 18">
+            <a:extLst>
+              <a:ext uri="{FF2B5EF4-FFF2-40B4-BE49-F238E27FC236}">
+                <a16:creationId xmlns:a16="http://schemas.microsoft.com/office/drawing/2014/main" id="{1EE580A9-E26D-88FC-FDCD-4C3B9CC5D4D5}"/>
+              </a:ext>
+            </a:extLst>
+          </p:cNvPr>
+          <p:cNvSpPr>
+            <a:spLocks noChangeArrowheads="1"/>
+          </p:cNvSpPr>
+          <p:nvPr/>
+        </p:nvSpPr>
+        <p:spPr bwMode="auto">
+          <a:xfrm rot="16200000">
+            <a:off x="3635841" y="-1992428"/>
+            <a:ext cx="288000" cy="7559672"/>
+          </a:xfrm>
+          <a:prstGeom prst="rect">
+            <a:avLst/>
+          </a:prstGeom>
+          <a:solidFill>
+            <a:srgbClr val="333F50"/>
+          </a:solidFill>
+          <a:ln>
+            <a:noFill/>
+          </a:ln>
+          <a:effectLst/>
+          <a:extLst>
+            <a:ext uri="{91240B29-F687-4F45-9708-019B960494DF}">
+              <a14:hiddenLine xmlns:a14="http://schemas.microsoft.com/office/drawing/2010/main" w="9525" algn="in">
+                <a:solidFill>
+                  <a:srgbClr val="212120"/>
+                </a:solidFill>
+                <a:miter lim="800000"/>
+                <a:headEnd/>
+                <a:tailEnd/>
+              </a14:hiddenLine>
+            </a:ext>
+            <a:ext uri="{AF507438-7753-43E0-B8FC-AC1667EBCBE1}">
+              <a14:hiddenEffects xmlns:a14="http://schemas.microsoft.com/office/drawing/2010/main">
+                <a:effectLst>
+                  <a:outerShdw dist="35921" dir="2700000" algn="ctr" rotWithShape="0">
+                    <a:srgbClr val="DCD6D4"/>
+                  </a:outerShdw>
+                </a:effectLst>
+              </a14:hiddenEffects>
+            </a:ext>
+          </a:extLst>
+        </p:spPr>
+        <p:txBody>
+          <a:bodyPr rot="0" vert="horz" wrap="square" lIns="36576" tIns="36576" rIns="36576" bIns="36576" anchor="t" anchorCtr="0" upright="1">
+            <a:noAutofit/>
+          </a:bodyPr>
+          <a:lstStyle/>
+          <a:p>
+            <a:endParaRPr lang="it-IT"/>
+          </a:p>
+        </p:txBody>
+      </p:sp>
+      <p:sp>
+        <p:nvSpPr>
+          <p:cNvPr id="20" name="Casella di testo 36">
+            <a:extLst>
+              <a:ext uri="{FF2B5EF4-FFF2-40B4-BE49-F238E27FC236}">
+                <a16:creationId xmlns:a16="http://schemas.microsoft.com/office/drawing/2014/main" id="{C6ECE5A2-784E-E657-85A9-2E18ACA98D26}"/>
+              </a:ext>
+            </a:extLst>
+          </p:cNvPr>
+          <p:cNvSpPr txBox="1">
+            <a:spLocks noChangeArrowheads="1"/>
+          </p:cNvSpPr>
+          <p:nvPr/>
+        </p:nvSpPr>
+        <p:spPr bwMode="auto">
+          <a:xfrm>
+            <a:off x="1201372" y="1598434"/>
+            <a:ext cx="5156930" cy="367119"/>
+          </a:xfrm>
+          <a:prstGeom prst="rect">
+            <a:avLst/>
+          </a:prstGeom>
+          <a:noFill/>
+          <a:ln>
+            <a:noFill/>
+          </a:ln>
+          <a:effectLst/>
+        </p:spPr>
+        <p:txBody>
+          <a:bodyPr rot="0" vert="horz" wrap="square" lIns="36576" tIns="36576" rIns="36576" bIns="36576" anchor="ctr" anchorCtr="0" upright="1">
+            <a:noAutofit/>
+          </a:bodyPr>
+          <a:lstStyle/>
+          <a:p>
+            <a:pPr>
+              <a:lnSpc>
+                <a:spcPct val="107000"/>
+              </a:lnSpc>
+              <a:spcAft>
+                <a:spcPts val="800"/>
+              </a:spcAft>
+            </a:pPr>
+            <a:r>
+              <a:rPr lang="it-IT" sz="1500">
+                <a:solidFill>
+                  <a:schemeClr val="bg1"/>
+                </a:solidFill>
+                <a:effectLst/>
+                <a:latin typeface="Avenir Next LT Pro" panose="020B0504020202020204" pitchFamily="34" charset="0"/>
+                <a:ea typeface="Calibri" panose="020F0502020204030204" pitchFamily="34" charset="0"/>
+                <a:cs typeface="Times New Roman" panose="02020603050405020304" pitchFamily="18" charset="0"/>
+              </a:rPr>
+              <a:t>Principali aggiornamenti normativi</a:t>
+            </a:r>
+          </a:p>
+        </p:txBody>
+      </p:sp>
+      <p:pic>
+        <p:nvPicPr>
+          <p:cNvPr id="25" name="Immagine 24" descr="Immagine che contiene interni, metallo, sedendo, edificio&#10;&#10;Descrizione generata automaticamente">
+            <a:extLst>
+              <a:ext uri="{FF2B5EF4-FFF2-40B4-BE49-F238E27FC236}">
+                <a16:creationId xmlns:a16="http://schemas.microsoft.com/office/drawing/2014/main" id="{D824A658-0AEF-0238-D8D9-6F96E986EBEA}"/>
+              </a:ext>
+            </a:extLst>
+          </p:cNvPr>
+          <p:cNvPicPr/>
+          <p:nvPr/>
+        </p:nvPicPr>
+        <p:blipFill rotWithShape="1">
+          <a:blip r:embed="rId6" cstate="print">
+            <a:extLst>
+              <a:ext uri="{28A0092B-C50C-407E-A947-70E740481C1C}">
+                <a14:useLocalDpi xmlns:a14="http://schemas.microsoft.com/office/drawing/2010/main" val="0"/>
+              </a:ext>
+            </a:extLst>
+          </a:blip>
+          <a:srcRect t="17038" b="38097"/>
+          <a:stretch/>
+        </p:blipFill>
+        <p:spPr bwMode="auto">
+          <a:xfrm>
+            <a:off x="3176" y="0"/>
+            <a:ext cx="7556499" cy="1662545"/>
+          </a:xfrm>
+          <a:prstGeom prst="rect">
+            <a:avLst/>
+          </a:prstGeom>
+          <a:ln>
+            <a:noFill/>
+          </a:ln>
+          <a:extLst>
+            <a:ext uri="{53640926-AAD7-44D8-BBD7-CCE9431645EC}">
+              <a14:shadowObscured xmlns:a14="http://schemas.microsoft.com/office/drawing/2010/main"/>
+            </a:ext>
+          </a:extLst>
+        </p:spPr>
+      </p:pic>
+      <p:sp>
+        <p:nvSpPr>
+          <p:cNvPr id="34" name="Rettangolo 33">
+            <a:extLst>
+              <a:ext uri="{FF2B5EF4-FFF2-40B4-BE49-F238E27FC236}">
+                <a16:creationId xmlns:a16="http://schemas.microsoft.com/office/drawing/2014/main" id="{E8E53BB3-5C40-02DD-19E5-730C136502D1}"/>
+              </a:ext>
+            </a:extLst>
+          </p:cNvPr>
+          <p:cNvSpPr/>
+          <p:nvPr/>
+        </p:nvSpPr>
+        <p:spPr>
+          <a:xfrm>
+            <a:off x="0" y="0"/>
+            <a:ext cx="7559675" cy="1662545"/>
+          </a:xfrm>
+          <a:prstGeom prst="rect">
+            <a:avLst/>
+          </a:prstGeom>
+          <a:solidFill>
+            <a:srgbClr val="100F16">
+              <a:alpha val="48000"/>
+            </a:srgbClr>
+          </a:solidFill>
+          <a:ln w="12700">
+            <a:miter lim="400000"/>
+          </a:ln>
+          <a:effectLst/>
+        </p:spPr>
+        <p:txBody>
+          <a:bodyPr lIns="50800" tIns="50800" rIns="50800" bIns="50800" anchor="ctr"/>
+          <a:lstStyle/>
+          <a:p>
+            <a:pPr algn="ctr" defTabSz="1828754" hangingPunct="1">
+              <a:lnSpc>
+                <a:spcPct val="100000"/>
+              </a:lnSpc>
+            </a:pPr>
+            <a:endParaRPr lang="it-IT" sz="3200" kern="1200" cap="none" spc="0">
+              <a:solidFill>
+                <a:srgbClr val="FFFFFF"/>
+              </a:solidFill>
+              <a:latin typeface="Helvetica Light"/>
+              <a:sym typeface="Helvetica Light"/>
+            </a:endParaRPr>
+          </a:p>
+        </p:txBody>
+      </p:sp>
+      <p:sp>
+        <p:nvSpPr>
+          <p:cNvPr id="39" name="Titolo della presentazione…">
+            <a:extLst>
+              <a:ext uri="{FF2B5EF4-FFF2-40B4-BE49-F238E27FC236}">
+                <a16:creationId xmlns:a16="http://schemas.microsoft.com/office/drawing/2014/main" id="{14E60945-833B-71A7-E9AD-C4A1C1444C01}"/>
+              </a:ext>
+            </a:extLst>
+          </p:cNvPr>
+          <p:cNvSpPr txBox="1"/>
+          <p:nvPr/>
+        </p:nvSpPr>
+        <p:spPr>
+          <a:xfrm>
+            <a:off x="1348384" y="559834"/>
+            <a:ext cx="4862907" cy="547493"/>
+          </a:xfrm>
+          <a:prstGeom prst="rect">
+            <a:avLst/>
+          </a:prstGeom>
+          <a:ln w="12700">
+            <a:miter lim="400000"/>
+          </a:ln>
+          <a:extLst>
+            <a:ext uri="{C572A759-6A51-4108-AA02-DFA0A04FC94B}">
+              <ma14:wrappingTextBoxFlag xmlns:ma14="http://schemas.microsoft.com/office/mac/drawingml/2011/main" xmlns="" val="1"/>
+            </a:ext>
+          </a:extLst>
+        </p:spPr>
+        <p:txBody>
+          <a:bodyPr wrap="square" lIns="27259" tIns="27259" rIns="27259" bIns="27259">
+            <a:spAutoFit/>
+          </a:bodyPr>
+          <a:lstStyle/>
+          <a:p>
+            <a:pPr>
+              <a:defRPr sz="3200">
+                <a:solidFill>
+                  <a:srgbClr val="1F4B80"/>
+                </a:solidFill>
+                <a:latin typeface="Lucida Sans"/>
+                <a:ea typeface="Lucida Sans"/>
+                <a:cs typeface="Lucida Sans"/>
+                <a:sym typeface="Lucida Sans"/>
+              </a:defRPr>
+            </a:pPr>
+            <a:r>
+              <a:rPr lang="it-IT" sz="3200" i="1" dirty="0">
+                <a:solidFill>
+                  <a:schemeClr val="bg1"/>
+                </a:solidFill>
+                <a:latin typeface="Avenir Next LT Pro" panose="020B0504020202020204" pitchFamily="34" charset="0"/>
+              </a:rPr>
+              <a:t>Alert Normativo</a:t>
+            </a:r>
+          </a:p>
+        </p:txBody>
+      </p:sp>
+      <p:pic>
+        <p:nvPicPr>
+          <p:cNvPr id="40" name="Immagine 39">
+            <a:extLst>
+              <a:ext uri="{FF2B5EF4-FFF2-40B4-BE49-F238E27FC236}">
+                <a16:creationId xmlns:a16="http://schemas.microsoft.com/office/drawing/2014/main" id="{6013F692-6DAD-0F02-3EAF-82CCC82B7C8F}"/>
+              </a:ext>
+            </a:extLst>
+          </p:cNvPr>
+          <p:cNvPicPr>
+            <a:picLocks noChangeAspect="1"/>
+          </p:cNvPicPr>
+          <p:nvPr/>
+        </p:nvPicPr>
+        <p:blipFill>
+          <a:blip r:embed="rId7"/>
+          <a:stretch>
+            <a:fillRect/>
+          </a:stretch>
+        </p:blipFill>
+        <p:spPr>
+          <a:xfrm>
+            <a:off x="71438" y="305346"/>
+            <a:ext cx="1775227" cy="1186673"/>
+          </a:xfrm>
+          <a:prstGeom prst="rect">
+            <a:avLst/>
+          </a:prstGeom>
+        </p:spPr>
+      </p:pic>
+      <p:pic>
+        <p:nvPicPr>
+          <p:cNvPr id="41" name="Immagine 40">
+            <a:extLst>
+              <a:ext uri="{FF2B5EF4-FFF2-40B4-BE49-F238E27FC236}">
+                <a16:creationId xmlns:a16="http://schemas.microsoft.com/office/drawing/2014/main" id="{9BC82553-A29A-0EA4-2FFC-9D754530A460}"/>
+              </a:ext>
+            </a:extLst>
+          </p:cNvPr>
+          <p:cNvPicPr>
+            <a:picLocks noChangeAspect="1"/>
+          </p:cNvPicPr>
+          <p:nvPr/>
+        </p:nvPicPr>
+        <p:blipFill>
+          <a:blip r:embed="rId8" cstate="print">
+            <a:extLst>
+              <a:ext uri="{28A0092B-C50C-407E-A947-70E740481C1C}">
+                <a14:useLocalDpi xmlns:a14="http://schemas.microsoft.com/office/drawing/2010/main" val="0"/>
+              </a:ext>
+            </a:extLst>
+          </a:blip>
+          <a:srcRect/>
+          <a:stretch/>
+        </p:blipFill>
+        <p:spPr>
+          <a:xfrm>
+            <a:off x="7010998" y="10363699"/>
+            <a:ext cx="467110" cy="264444"/>
+          </a:xfrm>
+          <a:prstGeom prst="rect">
+            <a:avLst/>
+          </a:prstGeom>
+        </p:spPr>
+      </p:pic>
+      <p:sp>
+        <p:nvSpPr>
+          <p:cNvPr id="3" name="Rettangolo 2">
+            <a:extLst>
+              <a:ext uri="{FF2B5EF4-FFF2-40B4-BE49-F238E27FC236}">
+                <a16:creationId xmlns:a16="http://schemas.microsoft.com/office/drawing/2014/main" id="{52630A08-4C33-45AD-E234-31DB7D024BE6}"/>
+              </a:ext>
+            </a:extLst>
+          </p:cNvPr>
+          <p:cNvSpPr>
+            <a:spLocks noChangeArrowheads="1"/>
+          </p:cNvSpPr>
+          <p:nvPr/>
+        </p:nvSpPr>
+        <p:spPr bwMode="auto">
+          <a:xfrm rot="16200000">
+            <a:off x="3316380" y="6446398"/>
+            <a:ext cx="923396" cy="7563199"/>
+          </a:xfrm>
+          <a:prstGeom prst="rect">
+            <a:avLst/>
+          </a:prstGeom>
+          <a:solidFill>
+            <a:srgbClr val="333F50"/>
+          </a:solidFill>
+          <a:ln>
+            <a:noFill/>
+          </a:ln>
+          <a:effectLst/>
+          <a:extLst>
+            <a:ext uri="{91240B29-F687-4F45-9708-019B960494DF}">
+              <a14:hiddenLine xmlns:a14="http://schemas.microsoft.com/office/drawing/2010/main" w="9525" algn="in">
+                <a:solidFill>
+                  <a:srgbClr val="212120"/>
+                </a:solidFill>
+                <a:miter lim="800000"/>
+                <a:headEnd/>
+                <a:tailEnd/>
+              </a14:hiddenLine>
+            </a:ext>
+            <a:ext uri="{AF507438-7753-43E0-B8FC-AC1667EBCBE1}">
+              <a14:hiddenEffects xmlns:a14="http://schemas.microsoft.com/office/drawing/2010/main">
+                <a:effectLst>
+                  <a:outerShdw dist="35921" dir="2700000" algn="ctr" rotWithShape="0">
+                    <a:srgbClr val="DCD6D4"/>
+                  </a:outerShdw>
+                </a:effectLst>
+              </a14:hiddenEffects>
+            </a:ext>
+          </a:extLst>
+        </p:spPr>
+        <p:txBody>
+          <a:bodyPr rot="0" vert="horz" wrap="square" lIns="36576" tIns="36576" rIns="36576" bIns="36576" anchor="t" anchorCtr="0" upright="1">
+            <a:noAutofit/>
+          </a:bodyPr>
+          <a:lstStyle/>
+          <a:p>
+            <a:pPr marL="0" marR="0" lvl="0" indent="0" algn="ctr" defTabSz="430322" rtl="0" eaLnBrk="1" fontAlgn="auto" latinLnBrk="0" hangingPunct="0">
+              <a:lnSpc>
+                <a:spcPct val="100000"/>
+              </a:lnSpc>
+              <a:spcBef>
+                <a:spcPts val="0"/>
+              </a:spcBef>
+              <a:spcAft>
+                <a:spcPts val="0"/>
+              </a:spcAft>
+              <a:buClrTx/>
+              <a:buSzTx/>
+              <a:buFontTx/>
+              <a:buNone/>
+              <a:tabLst/>
+              <a:defRPr/>
+            </a:pPr>
+            <a:endParaRPr kumimoji="0" lang="it-IT" sz="1768" b="1" i="0" u="none" strike="noStrike" kern="0" cap="none" spc="0" normalizeH="0" baseline="0" noProof="0">
+              <a:ln>
+                <a:noFill/>
+              </a:ln>
+              <a:solidFill>
+                <a:srgbClr val="000000"/>
+              </a:solidFill>
+              <a:effectLst/>
+              <a:uLnTx/>
+              <a:uFillTx/>
+              <a:latin typeface="Helvetica Neue"/>
+              <a:sym typeface="Helvetica Neue"/>
+            </a:endParaRPr>
+          </a:p>
+        </p:txBody>
+      </p:sp>
+      <p:sp>
+        <p:nvSpPr>
+          <p:cNvPr id="5" name="CasellaDiTesto 4">
+            <a:extLst>
+              <a:ext uri="{FF2B5EF4-FFF2-40B4-BE49-F238E27FC236}">
+                <a16:creationId xmlns:a16="http://schemas.microsoft.com/office/drawing/2014/main" id="{80D4579A-CACF-3B0B-BCDA-BA4BBD8CB887}"/>
+              </a:ext>
+            </a:extLst>
+          </p:cNvPr>
+          <p:cNvSpPr txBox="1"/>
+          <p:nvPr/>
+        </p:nvSpPr>
+        <p:spPr>
+          <a:xfrm>
+            <a:off x="101586" y="9873419"/>
+            <a:ext cx="6667513" cy="441146"/>
+          </a:xfrm>
+          <a:prstGeom prst="rect">
+            <a:avLst/>
+          </a:prstGeom>
+          <a:noFill/>
+          <a:ln w="12700" cap="flat">
+            <a:noFill/>
+            <a:miter lim="400000"/>
+          </a:ln>
+          <a:effectLst/>
+          <a:sp3d/>
+        </p:spPr>
+        <p:style>
+          <a:lnRef idx="0">
+            <a:scrgbClr r="0" g="0" b="0"/>
+          </a:lnRef>
+          <a:fillRef idx="0">
+            <a:scrgbClr r="0" g="0" b="0"/>
+          </a:fillRef>
+          <a:effectRef idx="0">
+            <a:scrgbClr r="0" g="0" b="0"/>
+          </a:effectRef>
+          <a:fontRef idx="none"/>
+        </p:style>
+        <p:txBody>
+          <a:bodyPr rot="0" spcFirstLastPara="1" vertOverflow="overflow" horzOverflow="overflow" vert="horz" wrap="square" lIns="50800" tIns="50800" rIns="50800" bIns="50800" numCol="1" spcCol="38100" rtlCol="0" anchor="ctr">
+            <a:spAutoFit/>
+          </a:bodyPr>
+          <a:lstStyle/>
+          <a:p>
+            <a:pPr marL="0" marR="0" lvl="0" indent="0" algn="l" defTabSz="584200" rtl="0" eaLnBrk="1" fontAlgn="auto" latinLnBrk="0" hangingPunct="0">
+              <a:lnSpc>
+                <a:spcPct val="100000"/>
+              </a:lnSpc>
+              <a:spcBef>
+                <a:spcPts val="0"/>
+              </a:spcBef>
+              <a:spcAft>
+                <a:spcPts val="0"/>
+              </a:spcAft>
+              <a:buClrTx/>
+              <a:buSzTx/>
+              <a:buFontTx/>
+              <a:buNone/>
+              <a:tabLst/>
+              <a:defRPr/>
+            </a:pPr>
+            <a:r>
+              <a:rPr kumimoji="0" lang="it-IT" sz="1050" b="1" i="0" u="none" strike="noStrike" kern="0" cap="none" spc="0" normalizeH="0" baseline="0" noProof="0">
+                <a:ln>
+                  <a:noFill/>
+                </a:ln>
+                <a:solidFill>
+                  <a:srgbClr val="FFFFFF"/>
+                </a:solidFill>
+                <a:effectLst/>
+                <a:uLnTx/>
+                <a:uFillTx/>
+                <a:latin typeface="Avenir Next LT Pro" panose="020B0504020202020204" pitchFamily="34" charset="0"/>
+                <a:sym typeface="Helvetica Neue"/>
+              </a:rPr>
+              <a:t>Per informazioni e approfondimenti rivolgersi al Presidio Normativo Finance di SCS al seguente indirizzo e-mail: alert@scsconsulting.it</a:t>
+            </a:r>
+          </a:p>
+        </p:txBody>
+      </p:sp>
+      <p:sp>
+        <p:nvSpPr>
+          <p:cNvPr id="6" name="Rectangle 23">
+            <a:extLst>
+              <a:ext uri="{FF2B5EF4-FFF2-40B4-BE49-F238E27FC236}">
+                <a16:creationId xmlns:a16="http://schemas.microsoft.com/office/drawing/2014/main" id="{5A1EA2DA-2FE3-341A-D4D3-BB59D687F5BA}"/>
+              </a:ext>
+            </a:extLst>
+          </p:cNvPr>
+          <p:cNvSpPr>
+            <a:spLocks noChangeArrowheads="1"/>
+          </p:cNvSpPr>
+          <p:nvPr/>
+        </p:nvSpPr>
+        <p:spPr bwMode="auto">
+          <a:xfrm>
+            <a:off x="85726" y="10372647"/>
+            <a:ext cx="6588000" cy="200055"/>
+          </a:xfrm>
+          <a:prstGeom prst="rect">
+            <a:avLst/>
+          </a:prstGeom>
+          <a:noFill/>
+          <a:ln>
+            <a:noFill/>
+          </a:ln>
+          <a:effectLst/>
+          <a:extLst>
+            <a:ext uri="{909E8E84-426E-40DD-AFC4-6F175D3DCCD1}">
+              <a14:hiddenFill xmlns:a14="http://schemas.microsoft.com/office/drawing/2010/main">
+                <a:solidFill>
+                  <a:schemeClr val="accent1"/>
+                </a:solidFill>
+              </a14:hiddenFill>
+            </a:ext>
+            <a:ext uri="{91240B29-F687-4F45-9708-019B960494DF}">
+              <a14:hiddenLine xmlns:a14="http://schemas.microsoft.com/office/drawing/2010/main" w="9525">
+                <a:solidFill>
+                  <a:schemeClr val="tx1"/>
+                </a:solidFill>
+                <a:miter lim="800000"/>
+                <a:headEnd/>
+                <a:tailEnd/>
+              </a14:hiddenLine>
+            </a:ext>
+            <a:ext uri="{AF507438-7753-43E0-B8FC-AC1667EBCBE1}">
+              <a14:hiddenEffects xmlns:a14="http://schemas.microsoft.com/office/drawing/2010/main">
+                <a:effectLst>
+                  <a:outerShdw dist="35921" dir="2700000" algn="ctr" rotWithShape="0">
+                    <a:schemeClr val="bg2"/>
+                  </a:outerShdw>
+                </a:effectLst>
+              </a14:hiddenEffects>
+            </a:ext>
+          </a:extLst>
+        </p:spPr>
+        <p:txBody>
+          <a:bodyPr vert="horz" wrap="square" lIns="91440" tIns="45720" rIns="91440" bIns="45720" numCol="1" anchor="ctr" anchorCtr="0" compatLnSpc="1">
+            <a:prstTxWarp prst="textNoShape">
+              <a:avLst/>
+            </a:prstTxWarp>
+            <a:spAutoFit/>
+          </a:bodyPr>
+          <a:lstStyle/>
+          <a:p>
+            <a:pPr marL="0" marR="0" lvl="0" indent="0" algn="l" defTabSz="914400" rtl="0" eaLnBrk="0" fontAlgn="base" latinLnBrk="0" hangingPunct="0">
+              <a:lnSpc>
+                <a:spcPct val="100000"/>
+              </a:lnSpc>
+              <a:spcBef>
+                <a:spcPct val="0"/>
+              </a:spcBef>
+              <a:spcAft>
+                <a:spcPct val="0"/>
+              </a:spcAft>
+              <a:buClrTx/>
+              <a:buSzTx/>
+              <a:buFontTx/>
+              <a:buNone/>
+              <a:tabLst/>
+              <a:defRPr/>
+            </a:pPr>
+            <a:r>
+              <a:rPr kumimoji="0" lang="it-IT" altLang="it-IT" sz="700" b="0" i="1" u="none" strike="noStrike" kern="0" cap="none" spc="0" normalizeH="0" baseline="0" noProof="0">
+                <a:ln>
+                  <a:noFill/>
+                </a:ln>
+                <a:solidFill>
+                  <a:srgbClr val="FFFFFF"/>
+                </a:solidFill>
+                <a:effectLst/>
+                <a:uLnTx/>
+                <a:uFillTx/>
+                <a:latin typeface="Avenir Next LT Pro" panose="020B0504020202020204" pitchFamily="34" charset="0"/>
+                <a:ea typeface="Calibri" panose="020F0502020204030204" pitchFamily="34" charset="0"/>
+                <a:cs typeface="Calibri" panose="020F0502020204030204" pitchFamily="34" charset="0"/>
+                <a:sym typeface="Helvetica Neue"/>
+              </a:rPr>
+              <a:t>Il presente documento comprende le news identificate come coerenti con il focus aziendale dell’Area Finance ed in linea con gli eventuali interessi correlati</a:t>
+            </a:r>
+            <a:endParaRPr kumimoji="0" lang="it-IT" altLang="it-IT" sz="700" b="0" i="0" u="none" strike="noStrike" kern="0" cap="none" spc="0" normalizeH="0" baseline="0" noProof="0">
+              <a:ln>
+                <a:noFill/>
+              </a:ln>
+              <a:solidFill>
+                <a:srgbClr val="FFFFFF"/>
+              </a:solidFill>
+              <a:effectLst/>
+              <a:uLnTx/>
+              <a:uFillTx/>
+              <a:latin typeface="Avenir Next LT Pro" panose="020B0504020202020204" pitchFamily="34" charset="0"/>
+              <a:cs typeface="Calibri" panose="020F0502020204030204" pitchFamily="34" charset="0"/>
+              <a:sym typeface="Helvetica Neue"/>
+            </a:endParaRPr>
+          </a:p>
+        </p:txBody>
+      </p:sp>
+      <p:pic>
+        <p:nvPicPr>
+          <p:cNvPr id="8" name="Immagine 7" descr="Immagine che contiene testo, clipart&#10;&#10;Descrizione generata automaticamente">
+            <a:extLst>
+              <a:ext uri="{FF2B5EF4-FFF2-40B4-BE49-F238E27FC236}">
+                <a16:creationId xmlns:a16="http://schemas.microsoft.com/office/drawing/2014/main" id="{8D80D333-BCC1-6FF4-8AAE-F9F203FD3E5E}"/>
+              </a:ext>
+            </a:extLst>
+          </p:cNvPr>
+          <p:cNvPicPr>
+            <a:picLocks noChangeAspect="1"/>
+          </p:cNvPicPr>
+          <p:nvPr/>
+        </p:nvPicPr>
+        <p:blipFill>
+          <a:blip r:embed="rId7"/>
+          <a:stretch>
+            <a:fillRect/>
+          </a:stretch>
+        </p:blipFill>
+        <p:spPr>
+          <a:xfrm>
+            <a:off x="6769100" y="10092340"/>
+            <a:ext cx="654557" cy="437547"/>
+          </a:xfrm>
+          <a:prstGeom prst="rect">
+            <a:avLst/>
+          </a:prstGeom>
+        </p:spPr>
+      </p:pic>
+      <p:sp>
+        <p:nvSpPr>
+          <p:cNvPr id="24" name="CasellaDiTesto 23">
+            <a:extLst>
+              <a:ext uri="{FF2B5EF4-FFF2-40B4-BE49-F238E27FC236}">
+                <a16:creationId xmlns:a16="http://schemas.microsoft.com/office/drawing/2014/main" id="{541B2A00-035E-06FE-B4A4-1E846C583AE0}"/>
+              </a:ext>
+            </a:extLst>
+          </p:cNvPr>
+          <p:cNvSpPr txBox="1"/>
+          <p:nvPr/>
+        </p:nvSpPr>
+        <p:spPr>
+          <a:xfrm>
+            <a:off x="4825994" y="89322"/>
+            <a:ext cx="2433740" cy="595035"/>
+          </a:xfrm>
+          <a:prstGeom prst="rect">
+            <a:avLst/>
+          </a:prstGeom>
+          <a:noFill/>
+          <a:ln w="12700" cap="flat">
+            <a:noFill/>
+            <a:miter lim="400000"/>
+          </a:ln>
+          <a:effectLst/>
+          <a:sp3d/>
+        </p:spPr>
+        <p:style>
+          <a:lnRef idx="0">
+            <a:scrgbClr r="0" g="0" b="0"/>
+          </a:lnRef>
+          <a:fillRef idx="0">
+            <a:scrgbClr r="0" g="0" b="0"/>
+          </a:fillRef>
+          <a:effectRef idx="0">
+            <a:scrgbClr r="0" g="0" b="0"/>
+          </a:effectRef>
+          <a:fontRef idx="none"/>
+        </p:style>
+        <p:txBody>
+          <a:bodyPr rot="0" spcFirstLastPara="1" vertOverflow="overflow" horzOverflow="overflow" vert="horz" wrap="square" lIns="50800" tIns="50800" rIns="50800" bIns="50800" numCol="1" spcCol="38100" rtlCol="0" anchor="ctr">
+            <a:spAutoFit/>
+          </a:bodyPr>
+          <a:lstStyle/>
+          <a:p>
+            <a:pPr marL="0" marR="0" indent="0" algn="r" defTabSz="584200" rtl="0" fontAlgn="auto" latinLnBrk="0" hangingPunct="0">
+              <a:lnSpc>
+                <a:spcPct val="100000"/>
+              </a:lnSpc>
+              <a:spcBef>
+                <a:spcPts val="0"/>
+              </a:spcBef>
+              <a:spcAft>
+                <a:spcPts val="0"/>
+              </a:spcAft>
+              <a:buClrTx/>
+              <a:buSzTx/>
+              <a:buFontTx/>
+              <a:buNone/>
+              <a:tabLst/>
+            </a:pPr>
+            <a:r>
+              <a:rPr kumimoji="0" lang="it-IT" sz="1600" b="1" i="1" u="none" strike="noStrike" cap="none" spc="0" normalizeH="0" baseline="0" dirty="0">
+                <a:ln>
+                  <a:noFill/>
+                </a:ln>
+                <a:solidFill>
+                  <a:schemeClr val="bg1"/>
+                </a:solidFill>
+                <a:effectLst/>
+                <a:uFillTx/>
+                <a:latin typeface="Avenir Next LT Pro" panose="020B0504020202020204" pitchFamily="34" charset="0"/>
+                <a:cs typeface="Calibri Light"/>
+                <a:sym typeface="Helvetica Neue"/>
+              </a:rPr>
+              <a:t>N. 2</a:t>
+            </a:r>
+            <a:endParaRPr kumimoji="0" lang="it-IT" sz="1600" b="1" i="1" u="none" strike="noStrike" cap="none" spc="0" normalizeH="0" baseline="0" dirty="0">
+              <a:ln>
+                <a:noFill/>
+              </a:ln>
+              <a:solidFill>
+                <a:schemeClr val="bg1"/>
+              </a:solidFill>
+              <a:effectLst/>
+              <a:uFillTx/>
+              <a:latin typeface="Avenir Next LT Pro" panose="020B0504020202020204" pitchFamily="34" charset="0"/>
+              <a:cs typeface="Calibri Light" panose="020F0302020204030204" pitchFamily="34" charset="0"/>
+              <a:sym typeface="Helvetica Neue"/>
+            </a:endParaRPr>
+          </a:p>
+          <a:p>
+            <a:pPr algn="r" defTabSz="584200"/>
+            <a:r>
+              <a:rPr lang="it-IT" sz="1600" i="1" dirty="0">
+                <a:solidFill>
+                  <a:schemeClr val="bg1"/>
+                </a:solidFill>
+                <a:latin typeface="Avenir Next LT Pro" panose="020B0504020202020204" pitchFamily="34" charset="0"/>
+                <a:cs typeface="Calibri Light"/>
+              </a:rPr>
+              <a:t>Maggio 2026</a:t>
+            </a:r>
+            <a:endParaRPr lang="it-IT" sz="1600" b="1" i="1" u="none" strike="noStrike" cap="none" spc="0" normalizeH="0" baseline="0" dirty="0">
+              <a:ln>
+                <a:noFill/>
+              </a:ln>
+              <a:solidFill>
+                <a:schemeClr val="bg1"/>
+              </a:solidFill>
+              <a:effectLst/>
+              <a:uFillTx/>
+              <a:latin typeface="Avenir Next LT Pro" panose="020B0504020202020204" pitchFamily="34" charset="0"/>
+              <a:cs typeface="Calibri Light" panose="020F0302020204030204" pitchFamily="34" charset="0"/>
+            </a:endParaRPr>
+          </a:p>
+        </p:txBody>
+      </p:sp>
+    </p:spTree>
+    <p:extLst>
+      <p:ext uri="{BB962C8B-B14F-4D97-AF65-F5344CB8AC3E}">
+        <p14:creationId xmlns:p14="http://schemas.microsoft.com/office/powerpoint/2010/main" val="3248096144"/>
+      </p:ext>
+    </p:extLst>
+  </p:cSld>
+  <p:clrMapOvr>
+    <a:masterClrMapping/>
+  </p:clrMapOvr>
+  <mc:AlternateContent xmlns:mc="http://schemas.openxmlformats.org/markup-compatibility/2006">
+    <mc:Choice xmlns:p14="http://schemas.microsoft.com/office/powerpoint/2010/main" Requires="p14">
+      <p:transition p14:dur="10"/>
+    </mc:Choice>
+    <mc:Fallback>
+      <p:transition/>
+    </mc:Fallback>
+  </mc:AlternateContent>
+</p:sld>
+</file>
+
+<file path=ppt/slides/slide4.xml><?xml version="1.0" encoding="utf-8"?>
+<p:sld xmlns:a="http://schemas.openxmlformats.org/drawingml/2006/main" xmlns:r="http://schemas.openxmlformats.org/officeDocument/2006/relationships" xmlns:p="http://schemas.openxmlformats.org/presentationml/2006/main">
+  <p:cSld>
+    <p:spTree>
+      <p:nvGrpSpPr>
+        <p:cNvPr id="1" name="">
+          <a:extLst>
+            <a:ext uri="{FF2B5EF4-FFF2-40B4-BE49-F238E27FC236}">
+              <a16:creationId xmlns:a16="http://schemas.microsoft.com/office/drawing/2014/main" id="{CF739670-0A1E-37F2-24F6-8129A9B63FFF}"/>
+            </a:ext>
+          </a:extLst>
+        </p:cNvPr>
+        <p:cNvGrpSpPr/>
+        <p:nvPr/>
+      </p:nvGrpSpPr>
+      <p:grpSpPr>
+        <a:xfrm>
+          <a:off x="0" y="0"/>
+          <a:ext cx="0" cy="0"/>
+          <a:chOff x="0" y="0"/>
+          <a:chExt cx="0" cy="0"/>
+        </a:xfrm>
+      </p:grpSpPr>
+      <p:graphicFrame>
+        <p:nvGraphicFramePr>
+          <p:cNvPr id="2" name="Oggetto 1" hidden="1">
+            <a:extLst>
+              <a:ext uri="{FF2B5EF4-FFF2-40B4-BE49-F238E27FC236}">
+                <a16:creationId xmlns:a16="http://schemas.microsoft.com/office/drawing/2014/main" id="{C54BBC7C-7FDC-5A64-4B1D-C57B9CEB2436}"/>
+              </a:ext>
+            </a:extLst>
+          </p:cNvPr>
+          <p:cNvGraphicFramePr>
+            <a:graphicFrameLocks noChangeAspect="1"/>
+          </p:cNvGraphicFramePr>
+          <p:nvPr>
+            <p:custDataLst>
+              <p:tags r:id="rId1"/>
+            </p:custDataLst>
+          </p:nvPr>
+        </p:nvGraphicFramePr>
+        <p:xfrm>
+          <a:off x="1588" y="1588"/>
+          <a:ext cx="1588" cy="1588"/>
+        </p:xfrm>
+        <a:graphic>
+          <a:graphicData uri="http://schemas.openxmlformats.org/presentationml/2006/ole">
+            <mc:AlternateContent xmlns:mc="http://schemas.openxmlformats.org/markup-compatibility/2006">
+              <mc:Choice xmlns:v="urn:schemas-microsoft-com:vml" Requires="v">
+                <p:oleObj name="Diapositiva think-cell" r:id="rId4" imgW="395" imgH="394" progId="TCLayout.ActiveDocument.1">
+                  <p:embed/>
+                </p:oleObj>
+              </mc:Choice>
+              <mc:Fallback>
+                <p:oleObj name="Diapositiva think-cell" r:id="rId4" imgW="395" imgH="394" progId="TCLayout.ActiveDocument.1">
+                  <p:embed/>
+                  <p:pic>
+                    <p:nvPicPr>
+                      <p:cNvPr id="2" name="Oggetto 1" hidden="1">
+                        <a:extLst>
+                          <a:ext uri="{FF2B5EF4-FFF2-40B4-BE49-F238E27FC236}">
+                            <a16:creationId xmlns:a16="http://schemas.microsoft.com/office/drawing/2014/main" id="{B1A5811A-2F00-D975-D072-806601324AC2}"/>
+                          </a:ext>
+                        </a:extLst>
+                      </p:cNvPr>
+                      <p:cNvPicPr/>
+                      <p:nvPr/>
+                    </p:nvPicPr>
+                    <p:blipFill>
+                      <a:blip r:embed="rId5"/>
+                      <a:stretch>
+                        <a:fillRect/>
+                      </a:stretch>
+                    </p:blipFill>
+                    <p:spPr>
+                      <a:xfrm>
+                        <a:off x="1588" y="1588"/>
+                        <a:ext cx="1588" cy="1588"/>
+                      </a:xfrm>
+                      <a:prstGeom prst="rect">
+                        <a:avLst/>
+                      </a:prstGeom>
+                    </p:spPr>
+                  </p:pic>
+                </p:oleObj>
+              </mc:Fallback>
+            </mc:AlternateContent>
+          </a:graphicData>
+        </a:graphic>
+      </p:graphicFrame>
+      <p:sp>
+        <p:nvSpPr>
+          <p:cNvPr id="51" name="Casella di testo 36">
+            <a:extLst>
+              <a:ext uri="{FF2B5EF4-FFF2-40B4-BE49-F238E27FC236}">
+                <a16:creationId xmlns:a16="http://schemas.microsoft.com/office/drawing/2014/main" id="{97FE5ED0-514B-3E7A-861C-48FD7AEBBA14}"/>
+              </a:ext>
+            </a:extLst>
+          </p:cNvPr>
+          <p:cNvSpPr txBox="1">
+            <a:spLocks noChangeArrowheads="1"/>
+          </p:cNvSpPr>
+          <p:nvPr/>
+        </p:nvSpPr>
+        <p:spPr bwMode="auto">
+          <a:xfrm>
+            <a:off x="1365790" y="1603849"/>
+            <a:ext cx="4828095" cy="367119"/>
+          </a:xfrm>
+          <a:prstGeom prst="rect">
+            <a:avLst/>
+          </a:prstGeom>
+          <a:noFill/>
+          <a:ln>
+            <a:noFill/>
+          </a:ln>
+          <a:effectLst/>
+        </p:spPr>
+        <p:txBody>
+          <a:bodyPr rot="0" vert="horz" wrap="square" lIns="36576" tIns="36576" rIns="36576" bIns="36576" anchor="ctr" anchorCtr="0" upright="1">
+            <a:noAutofit/>
+          </a:bodyPr>
+          <a:lstStyle/>
+          <a:p>
+            <a:pPr>
+              <a:lnSpc>
+                <a:spcPct val="107000"/>
+              </a:lnSpc>
+              <a:spcAft>
+                <a:spcPts val="800"/>
+              </a:spcAft>
+            </a:pPr>
+            <a:r>
+              <a:rPr lang="it-IT" sz="1600">
+                <a:solidFill>
+                  <a:schemeClr val="bg1"/>
+                </a:solidFill>
+                <a:effectLst/>
+                <a:latin typeface="Trebuchet MS" panose="020B0603020202020204" pitchFamily="34" charset="0"/>
+                <a:ea typeface="Calibri" panose="020F0502020204030204" pitchFamily="34" charset="0"/>
+                <a:cs typeface="Traditional Arabic" panose="020B0604020202020204" pitchFamily="18" charset="-78"/>
+              </a:rPr>
+              <a:t>SOMMARIO</a:t>
+            </a:r>
+          </a:p>
+        </p:txBody>
+      </p:sp>
+      <p:sp>
+        <p:nvSpPr>
+          <p:cNvPr id="19" name="Rettangolo 18">
+            <a:extLst>
+              <a:ext uri="{FF2B5EF4-FFF2-40B4-BE49-F238E27FC236}">
+                <a16:creationId xmlns:a16="http://schemas.microsoft.com/office/drawing/2014/main" id="{74976865-F289-DFCF-28A4-2692049DF520}"/>
+              </a:ext>
+            </a:extLst>
+          </p:cNvPr>
+          <p:cNvSpPr>
+            <a:spLocks noChangeArrowheads="1"/>
+          </p:cNvSpPr>
+          <p:nvPr/>
+        </p:nvSpPr>
+        <p:spPr bwMode="auto">
+          <a:xfrm rot="16200000">
+            <a:off x="3635841" y="-1992428"/>
+            <a:ext cx="288000" cy="7559672"/>
+          </a:xfrm>
+          <a:prstGeom prst="rect">
+            <a:avLst/>
+          </a:prstGeom>
+          <a:solidFill>
+            <a:srgbClr val="333F50"/>
+          </a:solidFill>
+          <a:ln>
+            <a:noFill/>
+          </a:ln>
+          <a:effectLst/>
+          <a:extLst>
+            <a:ext uri="{91240B29-F687-4F45-9708-019B960494DF}">
+              <a14:hiddenLine xmlns:a14="http://schemas.microsoft.com/office/drawing/2010/main" w="9525" algn="in">
+                <a:solidFill>
+                  <a:srgbClr val="212120"/>
+                </a:solidFill>
+                <a:miter lim="800000"/>
+                <a:headEnd/>
+                <a:tailEnd/>
+              </a14:hiddenLine>
+            </a:ext>
+            <a:ext uri="{AF507438-7753-43E0-B8FC-AC1667EBCBE1}">
+              <a14:hiddenEffects xmlns:a14="http://schemas.microsoft.com/office/drawing/2010/main">
+                <a:effectLst>
+                  <a:outerShdw dist="35921" dir="2700000" algn="ctr" rotWithShape="0">
+                    <a:srgbClr val="DCD6D4"/>
+                  </a:outerShdw>
+                </a:effectLst>
+              </a14:hiddenEffects>
+            </a:ext>
+          </a:extLst>
+        </p:spPr>
+        <p:txBody>
+          <a:bodyPr rot="0" vert="horz" wrap="square" lIns="36576" tIns="36576" rIns="36576" bIns="36576" anchor="t" anchorCtr="0" upright="1">
+            <a:noAutofit/>
+          </a:bodyPr>
+          <a:lstStyle/>
+          <a:p>
+            <a:endParaRPr lang="it-IT"/>
+          </a:p>
+        </p:txBody>
+      </p:sp>
+      <p:sp>
+        <p:nvSpPr>
+          <p:cNvPr id="20" name="Casella di testo 36">
+            <a:extLst>
+              <a:ext uri="{FF2B5EF4-FFF2-40B4-BE49-F238E27FC236}">
+                <a16:creationId xmlns:a16="http://schemas.microsoft.com/office/drawing/2014/main" id="{729E5FDA-3CFB-A38C-0E19-FA602B3D8939}"/>
+              </a:ext>
+            </a:extLst>
+          </p:cNvPr>
+          <p:cNvSpPr txBox="1">
+            <a:spLocks noChangeArrowheads="1"/>
+          </p:cNvSpPr>
+          <p:nvPr/>
+        </p:nvSpPr>
+        <p:spPr bwMode="auto">
+          <a:xfrm>
+            <a:off x="1201372" y="1598434"/>
+            <a:ext cx="5156930" cy="367119"/>
+          </a:xfrm>
+          <a:prstGeom prst="rect">
+            <a:avLst/>
+          </a:prstGeom>
+          <a:noFill/>
+          <a:ln>
+            <a:noFill/>
+          </a:ln>
+          <a:effectLst/>
+        </p:spPr>
+        <p:txBody>
+          <a:bodyPr rot="0" vert="horz" wrap="square" lIns="36576" tIns="36576" rIns="36576" bIns="36576" anchor="ctr" anchorCtr="0" upright="1">
+            <a:noAutofit/>
+          </a:bodyPr>
+          <a:lstStyle/>
+          <a:p>
+            <a:pPr>
+              <a:lnSpc>
+                <a:spcPct val="107000"/>
+              </a:lnSpc>
+              <a:spcAft>
+                <a:spcPts val="800"/>
+              </a:spcAft>
+            </a:pPr>
+            <a:r>
+              <a:rPr lang="it-IT" sz="1500">
+                <a:solidFill>
+                  <a:schemeClr val="bg1"/>
+                </a:solidFill>
+                <a:effectLst/>
+                <a:latin typeface="Avenir Next LT Pro" panose="020B0504020202020204" pitchFamily="34" charset="0"/>
+                <a:ea typeface="Calibri" panose="020F0502020204030204" pitchFamily="34" charset="0"/>
+                <a:cs typeface="Times New Roman" panose="02020603050405020304" pitchFamily="18" charset="0"/>
+              </a:rPr>
+              <a:t>Principali aggiornamenti normativi</a:t>
+            </a:r>
+          </a:p>
+        </p:txBody>
+      </p:sp>
+      <p:pic>
+        <p:nvPicPr>
+          <p:cNvPr id="25" name="Immagine 24" descr="Immagine che contiene interni, metallo, sedendo, edificio&#10;&#10;Descrizione generata automaticamente">
+            <a:extLst>
+              <a:ext uri="{FF2B5EF4-FFF2-40B4-BE49-F238E27FC236}">
+                <a16:creationId xmlns:a16="http://schemas.microsoft.com/office/drawing/2014/main" id="{DB2DF6D2-BF9C-7C4B-DC27-5BEB2924CA88}"/>
+              </a:ext>
+            </a:extLst>
+          </p:cNvPr>
+          <p:cNvPicPr/>
+          <p:nvPr/>
+        </p:nvPicPr>
+        <p:blipFill rotWithShape="1">
+          <a:blip r:embed="rId6" cstate="print">
+            <a:extLst>
+              <a:ext uri="{28A0092B-C50C-407E-A947-70E740481C1C}">
+                <a14:useLocalDpi xmlns:a14="http://schemas.microsoft.com/office/drawing/2010/main" val="0"/>
+              </a:ext>
+            </a:extLst>
+          </a:blip>
+          <a:srcRect t="17038" b="38097"/>
+          <a:stretch/>
+        </p:blipFill>
+        <p:spPr bwMode="auto">
+          <a:xfrm>
+            <a:off x="3176" y="0"/>
+            <a:ext cx="7556499" cy="1662545"/>
+          </a:xfrm>
+          <a:prstGeom prst="rect">
+            <a:avLst/>
+          </a:prstGeom>
+          <a:ln>
+            <a:noFill/>
+          </a:ln>
+          <a:extLst>
+            <a:ext uri="{53640926-AAD7-44D8-BBD7-CCE9431645EC}">
+              <a14:shadowObscured xmlns:a14="http://schemas.microsoft.com/office/drawing/2010/main"/>
+            </a:ext>
+          </a:extLst>
+        </p:spPr>
+      </p:pic>
+      <p:sp>
+        <p:nvSpPr>
+          <p:cNvPr id="34" name="Rettangolo 33">
+            <a:extLst>
+              <a:ext uri="{FF2B5EF4-FFF2-40B4-BE49-F238E27FC236}">
+                <a16:creationId xmlns:a16="http://schemas.microsoft.com/office/drawing/2014/main" id="{9D496D05-FE87-2AA1-1064-51AC18397CBC}"/>
+              </a:ext>
+            </a:extLst>
+          </p:cNvPr>
+          <p:cNvSpPr/>
+          <p:nvPr/>
+        </p:nvSpPr>
+        <p:spPr>
+          <a:xfrm>
+            <a:off x="0" y="0"/>
+            <a:ext cx="7559675" cy="1662545"/>
+          </a:xfrm>
+          <a:prstGeom prst="rect">
+            <a:avLst/>
+          </a:prstGeom>
+          <a:solidFill>
+            <a:srgbClr val="100F16">
+              <a:alpha val="48000"/>
+            </a:srgbClr>
+          </a:solidFill>
+          <a:ln w="12700">
+            <a:miter lim="400000"/>
+          </a:ln>
+          <a:effectLst/>
+        </p:spPr>
+        <p:txBody>
+          <a:bodyPr lIns="50800" tIns="50800" rIns="50800" bIns="50800" anchor="ctr"/>
+          <a:lstStyle/>
+          <a:p>
+            <a:pPr algn="ctr" defTabSz="1828754" hangingPunct="1">
+              <a:lnSpc>
+                <a:spcPct val="100000"/>
+              </a:lnSpc>
+            </a:pPr>
+            <a:endParaRPr lang="it-IT" sz="3200" kern="1200" cap="none" spc="0">
+              <a:solidFill>
+                <a:srgbClr val="FFFFFF"/>
+              </a:solidFill>
+              <a:latin typeface="Helvetica Light"/>
+              <a:sym typeface="Helvetica Light"/>
+            </a:endParaRPr>
+          </a:p>
+        </p:txBody>
+      </p:sp>
+      <p:sp>
+        <p:nvSpPr>
+          <p:cNvPr id="39" name="Titolo della presentazione…">
+            <a:extLst>
+              <a:ext uri="{FF2B5EF4-FFF2-40B4-BE49-F238E27FC236}">
+                <a16:creationId xmlns:a16="http://schemas.microsoft.com/office/drawing/2014/main" id="{6A1C8189-EA09-520D-0E08-53712C229F1D}"/>
+              </a:ext>
+            </a:extLst>
+          </p:cNvPr>
+          <p:cNvSpPr txBox="1"/>
+          <p:nvPr/>
+        </p:nvSpPr>
+        <p:spPr>
+          <a:xfrm>
+            <a:off x="1348384" y="559834"/>
+            <a:ext cx="4862907" cy="547493"/>
+          </a:xfrm>
+          <a:prstGeom prst="rect">
+            <a:avLst/>
+          </a:prstGeom>
+          <a:ln w="12700">
+            <a:miter lim="400000"/>
+          </a:ln>
+          <a:extLst>
+            <a:ext uri="{C572A759-6A51-4108-AA02-DFA0A04FC94B}">
+              <ma14:wrappingTextBoxFlag xmlns="" xmlns:ma14="http://schemas.microsoft.com/office/mac/drawingml/2011/main" val="1"/>
+            </a:ext>
+          </a:extLst>
+        </p:spPr>
+        <p:txBody>
+          <a:bodyPr wrap="square" lIns="27259" tIns="27259" rIns="27259" bIns="27259">
+            <a:spAutoFit/>
+          </a:bodyPr>
+          <a:lstStyle/>
+          <a:p>
+            <a:pPr>
+              <a:defRPr sz="3200">
+                <a:solidFill>
+                  <a:srgbClr val="1F4B80"/>
+                </a:solidFill>
+                <a:latin typeface="Lucida Sans"/>
+                <a:ea typeface="Lucida Sans"/>
+                <a:cs typeface="Lucida Sans"/>
+                <a:sym typeface="Lucida Sans"/>
+              </a:defRPr>
+            </a:pPr>
+            <a:r>
+              <a:rPr lang="it-IT" sz="3200" i="1" dirty="0">
+                <a:solidFill>
+                  <a:schemeClr val="bg1"/>
+                </a:solidFill>
+                <a:latin typeface="Avenir Next LT Pro" panose="020B0504020202020204" pitchFamily="34" charset="0"/>
+              </a:rPr>
+              <a:t>Alert Normativo</a:t>
+            </a:r>
+          </a:p>
+        </p:txBody>
+      </p:sp>
+      <p:pic>
+        <p:nvPicPr>
+          <p:cNvPr id="40" name="Immagine 39">
+            <a:extLst>
+              <a:ext uri="{FF2B5EF4-FFF2-40B4-BE49-F238E27FC236}">
+                <a16:creationId xmlns:a16="http://schemas.microsoft.com/office/drawing/2014/main" id="{AF84F86F-EE9E-79AA-36BD-02079EF98ADB}"/>
+              </a:ext>
+            </a:extLst>
+          </p:cNvPr>
+          <p:cNvPicPr>
+            <a:picLocks noChangeAspect="1"/>
+          </p:cNvPicPr>
+          <p:nvPr/>
+        </p:nvPicPr>
+        <p:blipFill>
+          <a:blip r:embed="rId7"/>
+          <a:stretch>
+            <a:fillRect/>
+          </a:stretch>
+        </p:blipFill>
+        <p:spPr>
+          <a:xfrm>
+            <a:off x="71438" y="305346"/>
+            <a:ext cx="1775227" cy="1186673"/>
+          </a:xfrm>
+          <a:prstGeom prst="rect">
+            <a:avLst/>
+          </a:prstGeom>
+        </p:spPr>
+      </p:pic>
+      <p:pic>
+        <p:nvPicPr>
+          <p:cNvPr id="41" name="Immagine 40">
+            <a:extLst>
+              <a:ext uri="{FF2B5EF4-FFF2-40B4-BE49-F238E27FC236}">
+                <a16:creationId xmlns:a16="http://schemas.microsoft.com/office/drawing/2014/main" id="{0AEB7981-59F7-E43E-6D30-DABE0991C9AB}"/>
+              </a:ext>
+            </a:extLst>
+          </p:cNvPr>
+          <p:cNvPicPr>
+            <a:picLocks noChangeAspect="1"/>
+          </p:cNvPicPr>
+          <p:nvPr/>
+        </p:nvPicPr>
+        <p:blipFill>
+          <a:blip r:embed="rId8" cstate="print">
+            <a:extLst>
+              <a:ext uri="{28A0092B-C50C-407E-A947-70E740481C1C}">
+                <a14:useLocalDpi xmlns:a14="http://schemas.microsoft.com/office/drawing/2010/main" val="0"/>
+              </a:ext>
+            </a:extLst>
+          </a:blip>
+          <a:srcRect/>
+          <a:stretch/>
+        </p:blipFill>
+        <p:spPr>
+          <a:xfrm>
+            <a:off x="7010998" y="10363699"/>
+            <a:ext cx="467110" cy="264444"/>
+          </a:xfrm>
+          <a:prstGeom prst="rect">
+            <a:avLst/>
+          </a:prstGeom>
+        </p:spPr>
+      </p:pic>
+      <p:sp>
+        <p:nvSpPr>
+          <p:cNvPr id="3" name="Rettangolo 2">
+            <a:extLst>
+              <a:ext uri="{FF2B5EF4-FFF2-40B4-BE49-F238E27FC236}">
+                <a16:creationId xmlns:a16="http://schemas.microsoft.com/office/drawing/2014/main" id="{67F4BBA2-3BC1-7F8B-2533-2CBD4139CCBE}"/>
+              </a:ext>
+            </a:extLst>
+          </p:cNvPr>
+          <p:cNvSpPr>
+            <a:spLocks noChangeArrowheads="1"/>
+          </p:cNvSpPr>
+          <p:nvPr/>
+        </p:nvSpPr>
+        <p:spPr bwMode="auto">
+          <a:xfrm rot="16200000">
+            <a:off x="3316380" y="6446398"/>
+            <a:ext cx="923396" cy="7563199"/>
+          </a:xfrm>
+          <a:prstGeom prst="rect">
+            <a:avLst/>
+          </a:prstGeom>
+          <a:solidFill>
+            <a:srgbClr val="333F50"/>
+          </a:solidFill>
+          <a:ln>
+            <a:noFill/>
+          </a:ln>
+          <a:effectLst/>
+          <a:extLst>
+            <a:ext uri="{91240B29-F687-4F45-9708-019B960494DF}">
+              <a14:hiddenLine xmlns:a14="http://schemas.microsoft.com/office/drawing/2010/main" w="9525" algn="in">
+                <a:solidFill>
+                  <a:srgbClr val="212120"/>
+                </a:solidFill>
+                <a:miter lim="800000"/>
+                <a:headEnd/>
+                <a:tailEnd/>
+              </a14:hiddenLine>
+            </a:ext>
+            <a:ext uri="{AF507438-7753-43E0-B8FC-AC1667EBCBE1}">
+              <a14:hiddenEffects xmlns:a14="http://schemas.microsoft.com/office/drawing/2010/main">
+                <a:effectLst>
+                  <a:outerShdw dist="35921" dir="2700000" algn="ctr" rotWithShape="0">
+                    <a:srgbClr val="DCD6D4"/>
+                  </a:outerShdw>
+                </a:effectLst>
+              </a14:hiddenEffects>
+            </a:ext>
+          </a:extLst>
+        </p:spPr>
+        <p:txBody>
+          <a:bodyPr rot="0" vert="horz" wrap="square" lIns="36576" tIns="36576" rIns="36576" bIns="36576" anchor="t" anchorCtr="0" upright="1">
+            <a:noAutofit/>
+          </a:bodyPr>
+          <a:lstStyle/>
+          <a:p>
+            <a:pPr marL="0" marR="0" lvl="0" indent="0" algn="ctr" defTabSz="430322" rtl="0" eaLnBrk="1" fontAlgn="auto" latinLnBrk="0" hangingPunct="0">
+              <a:lnSpc>
+                <a:spcPct val="100000"/>
+              </a:lnSpc>
+              <a:spcBef>
+                <a:spcPts val="0"/>
+              </a:spcBef>
+              <a:spcAft>
+                <a:spcPts val="0"/>
+              </a:spcAft>
+              <a:buClrTx/>
+              <a:buSzTx/>
+              <a:buFontTx/>
+              <a:buNone/>
+              <a:tabLst/>
+              <a:defRPr/>
+            </a:pPr>
+            <a:endParaRPr kumimoji="0" lang="it-IT" sz="1768" b="1" i="0" u="none" strike="noStrike" kern="0" cap="none" spc="0" normalizeH="0" baseline="0" noProof="0">
+              <a:ln>
+                <a:noFill/>
+              </a:ln>
+              <a:solidFill>
+                <a:srgbClr val="000000"/>
+              </a:solidFill>
+              <a:effectLst/>
+              <a:uLnTx/>
+              <a:uFillTx/>
+              <a:latin typeface="Helvetica Neue"/>
+              <a:sym typeface="Helvetica Neue"/>
+            </a:endParaRPr>
+          </a:p>
+        </p:txBody>
+      </p:sp>
+      <p:sp>
+        <p:nvSpPr>
+          <p:cNvPr id="5" name="CasellaDiTesto 4">
+            <a:extLst>
+              <a:ext uri="{FF2B5EF4-FFF2-40B4-BE49-F238E27FC236}">
+                <a16:creationId xmlns:a16="http://schemas.microsoft.com/office/drawing/2014/main" id="{6C8A7AF6-6F83-C09A-7398-3B864A94B492}"/>
+              </a:ext>
+            </a:extLst>
+          </p:cNvPr>
+          <p:cNvSpPr txBox="1"/>
+          <p:nvPr/>
+        </p:nvSpPr>
+        <p:spPr>
+          <a:xfrm>
+            <a:off x="101586" y="9873419"/>
+            <a:ext cx="6667513" cy="441146"/>
+          </a:xfrm>
+          <a:prstGeom prst="rect">
+            <a:avLst/>
+          </a:prstGeom>
+          <a:noFill/>
+          <a:ln w="12700" cap="flat">
+            <a:noFill/>
+            <a:miter lim="400000"/>
+          </a:ln>
+          <a:effectLst/>
+          <a:sp3d/>
+        </p:spPr>
+        <p:style>
+          <a:lnRef idx="0">
+            <a:scrgbClr r="0" g="0" b="0"/>
+          </a:lnRef>
+          <a:fillRef idx="0">
+            <a:scrgbClr r="0" g="0" b="0"/>
+          </a:fillRef>
+          <a:effectRef idx="0">
+            <a:scrgbClr r="0" g="0" b="0"/>
+          </a:effectRef>
+          <a:fontRef idx="none"/>
+        </p:style>
+        <p:txBody>
+          <a:bodyPr rot="0" spcFirstLastPara="1" vertOverflow="overflow" horzOverflow="overflow" vert="horz" wrap="square" lIns="50800" tIns="50800" rIns="50800" bIns="50800" numCol="1" spcCol="38100" rtlCol="0" anchor="ctr">
+            <a:spAutoFit/>
+          </a:bodyPr>
+          <a:lstStyle/>
+          <a:p>
+            <a:pPr marL="0" marR="0" lvl="0" indent="0" algn="l" defTabSz="584200" rtl="0" eaLnBrk="1" fontAlgn="auto" latinLnBrk="0" hangingPunct="0">
+              <a:lnSpc>
+                <a:spcPct val="100000"/>
+              </a:lnSpc>
+              <a:spcBef>
+                <a:spcPts val="0"/>
+              </a:spcBef>
+              <a:spcAft>
+                <a:spcPts val="0"/>
+              </a:spcAft>
+              <a:buClrTx/>
+              <a:buSzTx/>
+              <a:buFontTx/>
+              <a:buNone/>
+              <a:tabLst/>
+              <a:defRPr/>
+            </a:pPr>
+            <a:r>
+              <a:rPr kumimoji="0" lang="it-IT" sz="1050" b="1" i="0" u="none" strike="noStrike" kern="0" cap="none" spc="0" normalizeH="0" baseline="0" noProof="0">
+                <a:ln>
+                  <a:noFill/>
+                </a:ln>
+                <a:solidFill>
+                  <a:srgbClr val="FFFFFF"/>
+                </a:solidFill>
+                <a:effectLst/>
+                <a:uLnTx/>
+                <a:uFillTx/>
+                <a:latin typeface="Avenir Next LT Pro" panose="020B0504020202020204" pitchFamily="34" charset="0"/>
+                <a:sym typeface="Helvetica Neue"/>
+              </a:rPr>
+              <a:t>Per informazioni e approfondimenti rivolgersi al Presidio Normativo Finance di SCS al seguente indirizzo e-mail: alert@scsconsulting.it</a:t>
+            </a:r>
+          </a:p>
+        </p:txBody>
+      </p:sp>
+      <p:sp>
+        <p:nvSpPr>
+          <p:cNvPr id="6" name="Rectangle 23">
+            <a:extLst>
+              <a:ext uri="{FF2B5EF4-FFF2-40B4-BE49-F238E27FC236}">
+                <a16:creationId xmlns:a16="http://schemas.microsoft.com/office/drawing/2014/main" id="{76CA2CF3-CA30-EFD5-F0A1-0ACBBD36FE91}"/>
+              </a:ext>
+            </a:extLst>
+          </p:cNvPr>
+          <p:cNvSpPr>
+            <a:spLocks noChangeArrowheads="1"/>
+          </p:cNvSpPr>
+          <p:nvPr/>
+        </p:nvSpPr>
+        <p:spPr bwMode="auto">
+          <a:xfrm>
+            <a:off x="85726" y="10372647"/>
+            <a:ext cx="6588000" cy="200055"/>
+          </a:xfrm>
+          <a:prstGeom prst="rect">
+            <a:avLst/>
+          </a:prstGeom>
+          <a:noFill/>
+          <a:ln>
+            <a:noFill/>
+          </a:ln>
+          <a:effectLst/>
+          <a:extLst>
+            <a:ext uri="{909E8E84-426E-40DD-AFC4-6F175D3DCCD1}">
+              <a14:hiddenFill xmlns:a14="http://schemas.microsoft.com/office/drawing/2010/main">
+                <a:solidFill>
+                  <a:schemeClr val="accent1"/>
+                </a:solidFill>
+              </a14:hiddenFill>
+            </a:ext>
+            <a:ext uri="{91240B29-F687-4F45-9708-019B960494DF}">
+              <a14:hiddenLine xmlns:a14="http://schemas.microsoft.com/office/drawing/2010/main" w="9525">
+                <a:solidFill>
+                  <a:schemeClr val="tx1"/>
+                </a:solidFill>
+                <a:miter lim="800000"/>
+                <a:headEnd/>
+                <a:tailEnd/>
+              </a14:hiddenLine>
+            </a:ext>
+            <a:ext uri="{AF507438-7753-43E0-B8FC-AC1667EBCBE1}">
+              <a14:hiddenEffects xmlns:a14="http://schemas.microsoft.com/office/drawing/2010/main">
+                <a:effectLst>
+                  <a:outerShdw dist="35921" dir="2700000" algn="ctr" rotWithShape="0">
+                    <a:schemeClr val="bg2"/>
+                  </a:outerShdw>
+                </a:effectLst>
+              </a14:hiddenEffects>
+            </a:ext>
+          </a:extLst>
+        </p:spPr>
+        <p:txBody>
+          <a:bodyPr vert="horz" wrap="square" lIns="91440" tIns="45720" rIns="91440" bIns="45720" numCol="1" anchor="ctr" anchorCtr="0" compatLnSpc="1">
+            <a:prstTxWarp prst="textNoShape">
+              <a:avLst/>
+            </a:prstTxWarp>
+            <a:spAutoFit/>
+          </a:bodyPr>
+          <a:lstStyle/>
+          <a:p>
+            <a:pPr marL="0" marR="0" lvl="0" indent="0" algn="l" defTabSz="914400" rtl="0" eaLnBrk="0" fontAlgn="base" latinLnBrk="0" hangingPunct="0">
+              <a:lnSpc>
+                <a:spcPct val="100000"/>
+              </a:lnSpc>
+              <a:spcBef>
+                <a:spcPct val="0"/>
+              </a:spcBef>
+              <a:spcAft>
+                <a:spcPct val="0"/>
+              </a:spcAft>
+              <a:buClrTx/>
+              <a:buSzTx/>
+              <a:buFontTx/>
+              <a:buNone/>
+              <a:tabLst/>
+              <a:defRPr/>
+            </a:pPr>
+            <a:r>
+              <a:rPr kumimoji="0" lang="it-IT" altLang="it-IT" sz="700" b="0" i="1" u="none" strike="noStrike" kern="0" cap="none" spc="0" normalizeH="0" baseline="0" noProof="0">
+                <a:ln>
+                  <a:noFill/>
+                </a:ln>
+                <a:solidFill>
+                  <a:srgbClr val="FFFFFF"/>
+                </a:solidFill>
+                <a:effectLst/>
+                <a:uLnTx/>
+                <a:uFillTx/>
+                <a:latin typeface="Avenir Next LT Pro" panose="020B0504020202020204" pitchFamily="34" charset="0"/>
+                <a:ea typeface="Calibri" panose="020F0502020204030204" pitchFamily="34" charset="0"/>
+                <a:cs typeface="Calibri" panose="020F0502020204030204" pitchFamily="34" charset="0"/>
+                <a:sym typeface="Helvetica Neue"/>
+              </a:rPr>
+              <a:t>Il presente documento comprende le news identificate come coerenti con il focus aziendale dell’Area Finance ed in linea con gli eventuali interessi correlati</a:t>
+            </a:r>
+            <a:endParaRPr kumimoji="0" lang="it-IT" altLang="it-IT" sz="700" b="0" i="0" u="none" strike="noStrike" kern="0" cap="none" spc="0" normalizeH="0" baseline="0" noProof="0">
+              <a:ln>
+                <a:noFill/>
+              </a:ln>
+              <a:solidFill>
+                <a:srgbClr val="FFFFFF"/>
+              </a:solidFill>
+              <a:effectLst/>
+              <a:uLnTx/>
+              <a:uFillTx/>
+              <a:latin typeface="Avenir Next LT Pro" panose="020B0504020202020204" pitchFamily="34" charset="0"/>
+              <a:cs typeface="Calibri" panose="020F0502020204030204" pitchFamily="34" charset="0"/>
+              <a:sym typeface="Helvetica Neue"/>
+            </a:endParaRPr>
+          </a:p>
+        </p:txBody>
+      </p:sp>
+      <p:pic>
+        <p:nvPicPr>
+          <p:cNvPr id="8" name="Immagine 7" descr="Immagine che contiene testo, clipart&#10;&#10;Descrizione generata automaticamente">
+            <a:extLst>
+              <a:ext uri="{FF2B5EF4-FFF2-40B4-BE49-F238E27FC236}">
+                <a16:creationId xmlns:a16="http://schemas.microsoft.com/office/drawing/2014/main" id="{9CD55CF2-A220-7050-18AE-76B6B7BCDCD7}"/>
+              </a:ext>
+            </a:extLst>
+          </p:cNvPr>
+          <p:cNvPicPr>
+            <a:picLocks noChangeAspect="1"/>
+          </p:cNvPicPr>
+          <p:nvPr/>
+        </p:nvPicPr>
+        <p:blipFill>
+          <a:blip r:embed="rId7"/>
+          <a:stretch>
+            <a:fillRect/>
+          </a:stretch>
+        </p:blipFill>
+        <p:spPr>
+          <a:xfrm>
+            <a:off x="6769100" y="10092340"/>
+            <a:ext cx="654557" cy="437547"/>
+          </a:xfrm>
+          <a:prstGeom prst="rect">
+            <a:avLst/>
+          </a:prstGeom>
+        </p:spPr>
+      </p:pic>
+      <p:sp>
+        <p:nvSpPr>
+          <p:cNvPr id="24" name="CasellaDiTesto 23">
+            <a:extLst>
+              <a:ext uri="{FF2B5EF4-FFF2-40B4-BE49-F238E27FC236}">
+                <a16:creationId xmlns:a16="http://schemas.microsoft.com/office/drawing/2014/main" id="{FD29FF2D-4D09-B8A0-1F63-075DC01FDD08}"/>
+              </a:ext>
+            </a:extLst>
+          </p:cNvPr>
+          <p:cNvSpPr txBox="1"/>
+          <p:nvPr/>
+        </p:nvSpPr>
+        <p:spPr>
+          <a:xfrm>
+            <a:off x="4825994" y="89322"/>
+            <a:ext cx="2433740" cy="595035"/>
+          </a:xfrm>
+          <a:prstGeom prst="rect">
+            <a:avLst/>
+          </a:prstGeom>
+          <a:noFill/>
+          <a:ln w="12700" cap="flat">
+            <a:noFill/>
+            <a:miter lim="400000"/>
+          </a:ln>
+          <a:effectLst/>
+          <a:sp3d/>
+        </p:spPr>
+        <p:style>
+          <a:lnRef idx="0">
+            <a:scrgbClr r="0" g="0" b="0"/>
+          </a:lnRef>
+          <a:fillRef idx="0">
+            <a:scrgbClr r="0" g="0" b="0"/>
+          </a:fillRef>
+          <a:effectRef idx="0">
+            <a:scrgbClr r="0" g="0" b="0"/>
+          </a:effectRef>
+          <a:fontRef idx="none"/>
+        </p:style>
+        <p:txBody>
+          <a:bodyPr rot="0" spcFirstLastPara="1" vertOverflow="overflow" horzOverflow="overflow" vert="horz" wrap="square" lIns="50800" tIns="50800" rIns="50800" bIns="50800" numCol="1" spcCol="38100" rtlCol="0" anchor="ctr">
+            <a:spAutoFit/>
+          </a:bodyPr>
+          <a:lstStyle/>
+          <a:p>
+            <a:pPr marL="0" marR="0" indent="0" algn="r" defTabSz="584200" rtl="0" fontAlgn="auto" latinLnBrk="0" hangingPunct="0">
+              <a:lnSpc>
+                <a:spcPct val="100000"/>
+              </a:lnSpc>
+              <a:spcBef>
+                <a:spcPts val="0"/>
+              </a:spcBef>
+              <a:spcAft>
+                <a:spcPts val="0"/>
+              </a:spcAft>
+              <a:buClrTx/>
+              <a:buSzTx/>
+              <a:buFontTx/>
+              <a:buNone/>
+              <a:tabLst/>
+            </a:pPr>
+            <a:r>
+              <a:rPr kumimoji="0" lang="it-IT" sz="1600" b="1" i="1" u="none" strike="noStrike" cap="none" spc="0" normalizeH="0" baseline="0" dirty="0">
+                <a:ln>
+                  <a:noFill/>
+                </a:ln>
+                <a:solidFill>
+                  <a:schemeClr val="bg1"/>
+                </a:solidFill>
+                <a:effectLst/>
+                <a:uFillTx/>
+                <a:latin typeface="Avenir Next LT Pro" panose="020B0504020202020204" pitchFamily="34" charset="0"/>
+                <a:cs typeface="Calibri Light"/>
+                <a:sym typeface="Helvetica Neue"/>
+              </a:rPr>
+              <a:t>N. 2</a:t>
+            </a:r>
+            <a:endParaRPr kumimoji="0" lang="it-IT" sz="1600" b="1" i="1" u="none" strike="noStrike" cap="none" spc="0" normalizeH="0" baseline="0" dirty="0">
+              <a:ln>
+                <a:noFill/>
+              </a:ln>
+              <a:solidFill>
+                <a:schemeClr val="bg1"/>
+              </a:solidFill>
+              <a:effectLst/>
+              <a:uFillTx/>
+              <a:latin typeface="Avenir Next LT Pro" panose="020B0504020202020204" pitchFamily="34" charset="0"/>
+              <a:cs typeface="Calibri Light" panose="020F0302020204030204" pitchFamily="34" charset="0"/>
+              <a:sym typeface="Helvetica Neue"/>
+            </a:endParaRPr>
+          </a:p>
+          <a:p>
+            <a:pPr algn="r" defTabSz="584200"/>
+            <a:r>
+              <a:rPr lang="it-IT" sz="1600" i="1" dirty="0">
+                <a:solidFill>
+                  <a:schemeClr val="bg1"/>
+                </a:solidFill>
+                <a:latin typeface="Avenir Next LT Pro" panose="020B0504020202020204" pitchFamily="34" charset="0"/>
+                <a:cs typeface="Calibri Light"/>
+              </a:rPr>
+              <a:t>Maggio 2026</a:t>
+            </a:r>
+            <a:endParaRPr lang="it-IT" sz="1600" b="1" i="1" u="none" strike="noStrike" cap="none" spc="0" normalizeH="0" baseline="0" dirty="0">
+              <a:ln>
+                <a:noFill/>
+              </a:ln>
+              <a:solidFill>
+                <a:schemeClr val="bg1"/>
+              </a:solidFill>
+              <a:effectLst/>
+              <a:uFillTx/>
+              <a:latin typeface="Avenir Next LT Pro" panose="020B0504020202020204" pitchFamily="34" charset="0"/>
+              <a:cs typeface="Calibri Light" panose="020F0302020204030204" pitchFamily="34" charset="0"/>
+            </a:endParaRPr>
+          </a:p>
+        </p:txBody>
+      </p:sp>
+    </p:spTree>
+    <p:extLst>
+      <p:ext uri="{BB962C8B-B14F-4D97-AF65-F5344CB8AC3E}">
+        <p14:creationId xmlns:p14="http://schemas.microsoft.com/office/powerpoint/2010/main" val="1428702525"/>
+      </p:ext>
+    </p:extLst>
+  </p:cSld>
+  <p:clrMapOvr>
+    <a:masterClrMapping/>
+  </p:clrMapOvr>
+  <mc:AlternateContent xmlns:mc="http://schemas.openxmlformats.org/markup-compatibility/2006">
+    <mc:Choice xmlns:p14="http://schemas.microsoft.com/office/powerpoint/2010/main" Requires="p14">
+      <p:transition p14:dur="10"/>
+    </mc:Choice>
+    <mc:Fallback>
+      <p:transition/>
+    </mc:Fallback>
+  </mc:AlternateContent>
+</p:sld>
+</file>
+
+<file path=ppt/slides/slide5.xml><?xml version="1.0" encoding="utf-8"?>
+<p:sld xmlns:a="http://schemas.openxmlformats.org/drawingml/2006/main" xmlns:r="http://schemas.openxmlformats.org/officeDocument/2006/relationships" xmlns:p="http://schemas.openxmlformats.org/presentationml/2006/main">
+  <p:cSld>
+    <p:spTree>
+      <p:nvGrpSpPr>
+        <p:cNvPr id="1" name="">
+          <a:extLst>
+            <a:ext uri="{FF2B5EF4-FFF2-40B4-BE49-F238E27FC236}">
+              <a16:creationId xmlns:a16="http://schemas.microsoft.com/office/drawing/2014/main" id="{A4DB8F64-6202-F533-B07D-49144CB80230}"/>
+            </a:ext>
+          </a:extLst>
+        </p:cNvPr>
+        <p:cNvGrpSpPr/>
+        <p:nvPr/>
+      </p:nvGrpSpPr>
+      <p:grpSpPr>
+        <a:xfrm>
+          <a:off x="0" y="0"/>
+          <a:ext cx="0" cy="0"/>
+          <a:chOff x="0" y="0"/>
+          <a:chExt cx="0" cy="0"/>
+        </a:xfrm>
+      </p:grpSpPr>
+      <p:graphicFrame>
+        <p:nvGraphicFramePr>
+          <p:cNvPr id="2" name="Oggetto 1" hidden="1">
+            <a:extLst>
+              <a:ext uri="{FF2B5EF4-FFF2-40B4-BE49-F238E27FC236}">
+                <a16:creationId xmlns:a16="http://schemas.microsoft.com/office/drawing/2014/main" id="{9557F285-97AC-1D0A-F810-62AD75F61098}"/>
+              </a:ext>
+            </a:extLst>
+          </p:cNvPr>
+          <p:cNvGraphicFramePr>
+            <a:graphicFrameLocks noChangeAspect="1"/>
+          </p:cNvGraphicFramePr>
+          <p:nvPr>
+            <p:custDataLst>
+              <p:tags r:id="rId1"/>
+            </p:custDataLst>
+          </p:nvPr>
+        </p:nvGraphicFramePr>
+        <p:xfrm>
+          <a:off x="1588" y="1588"/>
+          <a:ext cx="1588" cy="1588"/>
+        </p:xfrm>
+        <a:graphic>
+          <a:graphicData uri="http://schemas.openxmlformats.org/presentationml/2006/ole">
+            <mc:AlternateContent xmlns:mc="http://schemas.openxmlformats.org/markup-compatibility/2006">
+              <mc:Choice xmlns:v="urn:schemas-microsoft-com:vml" Requires="v">
+                <p:oleObj name="Diapositiva think-cell" r:id="rId4" imgW="395" imgH="394" progId="TCLayout.ActiveDocument.1">
+                  <p:embed/>
+                </p:oleObj>
+              </mc:Choice>
+              <mc:Fallback>
+                <p:oleObj name="Diapositiva think-cell" r:id="rId4" imgW="395" imgH="394" progId="TCLayout.ActiveDocument.1">
+                  <p:embed/>
+                  <p:pic>
+                    <p:nvPicPr>
+                      <p:cNvPr id="2" name="Oggetto 1" hidden="1">
+                        <a:extLst>
+                          <a:ext uri="{FF2B5EF4-FFF2-40B4-BE49-F238E27FC236}">
+                            <a16:creationId xmlns:a16="http://schemas.microsoft.com/office/drawing/2014/main" id="{C54BBC7C-7FDC-5A64-4B1D-C57B9CEB2436}"/>
+                          </a:ext>
+                        </a:extLst>
+                      </p:cNvPr>
+                      <p:cNvPicPr/>
+                      <p:nvPr/>
+                    </p:nvPicPr>
+                    <p:blipFill>
+                      <a:blip r:embed="rId5"/>
+                      <a:stretch>
+                        <a:fillRect/>
+                      </a:stretch>
+                    </p:blipFill>
+                    <p:spPr>
+                      <a:xfrm>
+                        <a:off x="1588" y="1588"/>
+                        <a:ext cx="1588" cy="1588"/>
+                      </a:xfrm>
+                      <a:prstGeom prst="rect">
+                        <a:avLst/>
+                      </a:prstGeom>
+                    </p:spPr>
+                  </p:pic>
+                </p:oleObj>
+              </mc:Fallback>
+            </mc:AlternateContent>
+          </a:graphicData>
+        </a:graphic>
+      </p:graphicFrame>
+      <p:sp>
+        <p:nvSpPr>
+          <p:cNvPr id="51" name="Casella di testo 36">
+            <a:extLst>
+              <a:ext uri="{FF2B5EF4-FFF2-40B4-BE49-F238E27FC236}">
+                <a16:creationId xmlns:a16="http://schemas.microsoft.com/office/drawing/2014/main" id="{6610BF3D-19BF-AFA8-4D71-5B351240FBBD}"/>
+              </a:ext>
+            </a:extLst>
+          </p:cNvPr>
+          <p:cNvSpPr txBox="1">
+            <a:spLocks noChangeArrowheads="1"/>
+          </p:cNvSpPr>
+          <p:nvPr/>
+        </p:nvSpPr>
+        <p:spPr bwMode="auto">
+          <a:xfrm>
+            <a:off x="1365790" y="1603849"/>
+            <a:ext cx="4828095" cy="367119"/>
+          </a:xfrm>
+          <a:prstGeom prst="rect">
+            <a:avLst/>
+          </a:prstGeom>
+          <a:noFill/>
+          <a:ln>
+            <a:noFill/>
+          </a:ln>
+          <a:effectLst/>
+        </p:spPr>
+        <p:txBody>
+          <a:bodyPr rot="0" vert="horz" wrap="square" lIns="36576" tIns="36576" rIns="36576" bIns="36576" anchor="ctr" anchorCtr="0" upright="1">
+            <a:noAutofit/>
+          </a:bodyPr>
+          <a:lstStyle/>
+          <a:p>
+            <a:pPr>
+              <a:lnSpc>
+                <a:spcPct val="107000"/>
+              </a:lnSpc>
+              <a:spcAft>
+                <a:spcPts val="800"/>
+              </a:spcAft>
+            </a:pPr>
+            <a:r>
+              <a:rPr lang="it-IT" sz="1600">
+                <a:solidFill>
+                  <a:schemeClr val="bg1"/>
+                </a:solidFill>
+                <a:effectLst/>
+                <a:latin typeface="Trebuchet MS" panose="020B0603020202020204" pitchFamily="34" charset="0"/>
+                <a:ea typeface="Calibri" panose="020F0502020204030204" pitchFamily="34" charset="0"/>
+                <a:cs typeface="Traditional Arabic" panose="020B0604020202020204" pitchFamily="18" charset="-78"/>
+              </a:rPr>
+              <a:t>SOMMARIO</a:t>
+            </a:r>
+          </a:p>
+        </p:txBody>
+      </p:sp>
+      <p:sp>
+        <p:nvSpPr>
+          <p:cNvPr id="19" name="Rettangolo 18">
+            <a:extLst>
+              <a:ext uri="{FF2B5EF4-FFF2-40B4-BE49-F238E27FC236}">
+                <a16:creationId xmlns:a16="http://schemas.microsoft.com/office/drawing/2014/main" id="{EE1FE033-31A4-1914-56C5-CF2B14109001}"/>
+              </a:ext>
+            </a:extLst>
+          </p:cNvPr>
+          <p:cNvSpPr>
+            <a:spLocks noChangeArrowheads="1"/>
+          </p:cNvSpPr>
+          <p:nvPr/>
+        </p:nvSpPr>
+        <p:spPr bwMode="auto">
+          <a:xfrm rot="16200000">
+            <a:off x="3635841" y="-1992428"/>
+            <a:ext cx="288000" cy="7559672"/>
+          </a:xfrm>
+          <a:prstGeom prst="rect">
+            <a:avLst/>
+          </a:prstGeom>
+          <a:solidFill>
+            <a:srgbClr val="333F50"/>
+          </a:solidFill>
+          <a:ln>
+            <a:noFill/>
+          </a:ln>
+          <a:effectLst/>
+          <a:extLst>
+            <a:ext uri="{91240B29-F687-4F45-9708-019B960494DF}">
+              <a14:hiddenLine xmlns:a14="http://schemas.microsoft.com/office/drawing/2010/main" w="9525" algn="in">
+                <a:solidFill>
+                  <a:srgbClr val="212120"/>
+                </a:solidFill>
+                <a:miter lim="800000"/>
+                <a:headEnd/>
+                <a:tailEnd/>
+              </a14:hiddenLine>
+            </a:ext>
+            <a:ext uri="{AF507438-7753-43E0-B8FC-AC1667EBCBE1}">
+              <a14:hiddenEffects xmlns:a14="http://schemas.microsoft.com/office/drawing/2010/main">
+                <a:effectLst>
+                  <a:outerShdw dist="35921" dir="2700000" algn="ctr" rotWithShape="0">
+                    <a:srgbClr val="DCD6D4"/>
+                  </a:outerShdw>
+                </a:effectLst>
+              </a14:hiddenEffects>
+            </a:ext>
+          </a:extLst>
+        </p:spPr>
+        <p:txBody>
+          <a:bodyPr rot="0" vert="horz" wrap="square" lIns="36576" tIns="36576" rIns="36576" bIns="36576" anchor="t" anchorCtr="0" upright="1">
+            <a:noAutofit/>
+          </a:bodyPr>
+          <a:lstStyle/>
+          <a:p>
+            <a:endParaRPr lang="it-IT"/>
+          </a:p>
+        </p:txBody>
+      </p:sp>
+      <p:sp>
+        <p:nvSpPr>
+          <p:cNvPr id="20" name="Casella di testo 36">
+            <a:extLst>
+              <a:ext uri="{FF2B5EF4-FFF2-40B4-BE49-F238E27FC236}">
+                <a16:creationId xmlns:a16="http://schemas.microsoft.com/office/drawing/2014/main" id="{1F1918CA-12EC-3487-DA04-2092489D8FB0}"/>
+              </a:ext>
+            </a:extLst>
+          </p:cNvPr>
+          <p:cNvSpPr txBox="1">
+            <a:spLocks noChangeArrowheads="1"/>
+          </p:cNvSpPr>
+          <p:nvPr/>
+        </p:nvSpPr>
+        <p:spPr bwMode="auto">
+          <a:xfrm>
+            <a:off x="1201372" y="1598434"/>
+            <a:ext cx="5156930" cy="367119"/>
+          </a:xfrm>
+          <a:prstGeom prst="rect">
+            <a:avLst/>
+          </a:prstGeom>
+          <a:noFill/>
+          <a:ln>
+            <a:noFill/>
+          </a:ln>
+          <a:effectLst/>
+        </p:spPr>
+        <p:txBody>
+          <a:bodyPr rot="0" vert="horz" wrap="square" lIns="36576" tIns="36576" rIns="36576" bIns="36576" anchor="ctr" anchorCtr="0" upright="1">
+            <a:noAutofit/>
+          </a:bodyPr>
+          <a:lstStyle/>
+          <a:p>
+            <a:pPr>
+              <a:lnSpc>
+                <a:spcPct val="107000"/>
+              </a:lnSpc>
+              <a:spcAft>
+                <a:spcPts val="800"/>
+              </a:spcAft>
+            </a:pPr>
+            <a:r>
+              <a:rPr lang="it-IT" sz="1500">
+                <a:solidFill>
+                  <a:schemeClr val="bg1"/>
+                </a:solidFill>
+                <a:effectLst/>
+                <a:latin typeface="Avenir Next LT Pro" panose="020B0504020202020204" pitchFamily="34" charset="0"/>
+                <a:ea typeface="Calibri" panose="020F0502020204030204" pitchFamily="34" charset="0"/>
+                <a:cs typeface="Times New Roman" panose="02020603050405020304" pitchFamily="18" charset="0"/>
+              </a:rPr>
+              <a:t>Principali aggiornamenti normativi</a:t>
+            </a:r>
+          </a:p>
+        </p:txBody>
+      </p:sp>
+      <p:pic>
+        <p:nvPicPr>
+          <p:cNvPr id="25" name="Immagine 24" descr="Immagine che contiene interni, metallo, sedendo, edificio&#10;&#10;Descrizione generata automaticamente">
+            <a:extLst>
+              <a:ext uri="{FF2B5EF4-FFF2-40B4-BE49-F238E27FC236}">
+                <a16:creationId xmlns:a16="http://schemas.microsoft.com/office/drawing/2014/main" id="{A22E7C46-E71A-FDAF-0908-CFB771BC342F}"/>
+              </a:ext>
+            </a:extLst>
+          </p:cNvPr>
+          <p:cNvPicPr/>
+          <p:nvPr/>
+        </p:nvPicPr>
+        <p:blipFill rotWithShape="1">
+          <a:blip r:embed="rId6" cstate="print">
+            <a:extLst>
+              <a:ext uri="{28A0092B-C50C-407E-A947-70E740481C1C}">
+                <a14:useLocalDpi xmlns:a14="http://schemas.microsoft.com/office/drawing/2010/main" val="0"/>
+              </a:ext>
+            </a:extLst>
+          </a:blip>
+          <a:srcRect t="17038" b="38097"/>
+          <a:stretch/>
+        </p:blipFill>
+        <p:spPr bwMode="auto">
+          <a:xfrm>
+            <a:off x="3176" y="0"/>
+            <a:ext cx="7556499" cy="1662545"/>
+          </a:xfrm>
+          <a:prstGeom prst="rect">
+            <a:avLst/>
+          </a:prstGeom>
+          <a:ln>
+            <a:noFill/>
+          </a:ln>
+          <a:extLst>
+            <a:ext uri="{53640926-AAD7-44D8-BBD7-CCE9431645EC}">
+              <a14:shadowObscured xmlns:a14="http://schemas.microsoft.com/office/drawing/2010/main"/>
+            </a:ext>
+          </a:extLst>
+        </p:spPr>
+      </p:pic>
+      <p:sp>
+        <p:nvSpPr>
+          <p:cNvPr id="34" name="Rettangolo 33">
+            <a:extLst>
+              <a:ext uri="{FF2B5EF4-FFF2-40B4-BE49-F238E27FC236}">
+                <a16:creationId xmlns:a16="http://schemas.microsoft.com/office/drawing/2014/main" id="{FEB267B9-A71F-33C7-5400-C2C02DCDFB3C}"/>
+              </a:ext>
+            </a:extLst>
+          </p:cNvPr>
+          <p:cNvSpPr/>
+          <p:nvPr/>
+        </p:nvSpPr>
+        <p:spPr>
+          <a:xfrm>
+            <a:off x="0" y="0"/>
+            <a:ext cx="7559675" cy="1662545"/>
+          </a:xfrm>
+          <a:prstGeom prst="rect">
+            <a:avLst/>
+          </a:prstGeom>
+          <a:solidFill>
+            <a:srgbClr val="100F16">
+              <a:alpha val="48000"/>
+            </a:srgbClr>
+          </a:solidFill>
+          <a:ln w="12700">
+            <a:miter lim="400000"/>
+          </a:ln>
+          <a:effectLst/>
+        </p:spPr>
+        <p:txBody>
+          <a:bodyPr lIns="50800" tIns="50800" rIns="50800" bIns="50800" anchor="ctr"/>
+          <a:lstStyle/>
+          <a:p>
+            <a:pPr algn="ctr" defTabSz="1828754" hangingPunct="1">
+              <a:lnSpc>
+                <a:spcPct val="100000"/>
+              </a:lnSpc>
+            </a:pPr>
+            <a:endParaRPr lang="it-IT" sz="3200" kern="1200" cap="none" spc="0">
+              <a:solidFill>
+                <a:srgbClr val="FFFFFF"/>
+              </a:solidFill>
+              <a:latin typeface="Helvetica Light"/>
+              <a:sym typeface="Helvetica Light"/>
+            </a:endParaRPr>
+          </a:p>
+        </p:txBody>
+      </p:sp>
+      <p:sp>
+        <p:nvSpPr>
+          <p:cNvPr id="39" name="Titolo della presentazione…">
+            <a:extLst>
+              <a:ext uri="{FF2B5EF4-FFF2-40B4-BE49-F238E27FC236}">
+                <a16:creationId xmlns:a16="http://schemas.microsoft.com/office/drawing/2014/main" id="{A1934282-A341-B02E-3AAD-DADCD5235C3B}"/>
+              </a:ext>
+            </a:extLst>
+          </p:cNvPr>
+          <p:cNvSpPr txBox="1"/>
+          <p:nvPr/>
+        </p:nvSpPr>
+        <p:spPr>
+          <a:xfrm>
+            <a:off x="1348384" y="559834"/>
+            <a:ext cx="4862907" cy="547493"/>
+          </a:xfrm>
+          <a:prstGeom prst="rect">
+            <a:avLst/>
+          </a:prstGeom>
+          <a:ln w="12700">
+            <a:miter lim="400000"/>
+          </a:ln>
+          <a:extLst>
+            <a:ext uri="{C572A759-6A51-4108-AA02-DFA0A04FC94B}">
+              <ma14:wrappingTextBoxFlag xmlns:ma14="http://schemas.microsoft.com/office/mac/drawingml/2011/main" xmlns="" val="1"/>
+            </a:ext>
+          </a:extLst>
+        </p:spPr>
+        <p:txBody>
+          <a:bodyPr wrap="square" lIns="27259" tIns="27259" rIns="27259" bIns="27259">
+            <a:spAutoFit/>
+          </a:bodyPr>
+          <a:lstStyle/>
+          <a:p>
+            <a:pPr>
+              <a:defRPr sz="3200">
+                <a:solidFill>
+                  <a:srgbClr val="1F4B80"/>
+                </a:solidFill>
+                <a:latin typeface="Lucida Sans"/>
+                <a:ea typeface="Lucida Sans"/>
+                <a:cs typeface="Lucida Sans"/>
+                <a:sym typeface="Lucida Sans"/>
+              </a:defRPr>
+            </a:pPr>
+            <a:r>
+              <a:rPr lang="it-IT" sz="3200" i="1" dirty="0">
+                <a:solidFill>
+                  <a:schemeClr val="bg1"/>
+                </a:solidFill>
+                <a:latin typeface="Avenir Next LT Pro" panose="020B0504020202020204" pitchFamily="34" charset="0"/>
+              </a:rPr>
+              <a:t>Alert Normativo</a:t>
+            </a:r>
+          </a:p>
+        </p:txBody>
+      </p:sp>
+      <p:pic>
+        <p:nvPicPr>
+          <p:cNvPr id="40" name="Immagine 39">
+            <a:extLst>
+              <a:ext uri="{FF2B5EF4-FFF2-40B4-BE49-F238E27FC236}">
+                <a16:creationId xmlns:a16="http://schemas.microsoft.com/office/drawing/2014/main" id="{01FEF8EA-3125-D2C4-CE7D-9AF4F32C4F50}"/>
+              </a:ext>
+            </a:extLst>
+          </p:cNvPr>
+          <p:cNvPicPr>
+            <a:picLocks noChangeAspect="1"/>
+          </p:cNvPicPr>
+          <p:nvPr/>
+        </p:nvPicPr>
+        <p:blipFill>
+          <a:blip r:embed="rId7"/>
+          <a:stretch>
+            <a:fillRect/>
+          </a:stretch>
+        </p:blipFill>
+        <p:spPr>
+          <a:xfrm>
+            <a:off x="71438" y="305346"/>
+            <a:ext cx="1775227" cy="1186673"/>
+          </a:xfrm>
+          <a:prstGeom prst="rect">
+            <a:avLst/>
+          </a:prstGeom>
+        </p:spPr>
+      </p:pic>
+      <p:pic>
+        <p:nvPicPr>
+          <p:cNvPr id="41" name="Immagine 40">
+            <a:extLst>
+              <a:ext uri="{FF2B5EF4-FFF2-40B4-BE49-F238E27FC236}">
+                <a16:creationId xmlns:a16="http://schemas.microsoft.com/office/drawing/2014/main" id="{595D9703-DDEC-19EF-AB59-70DBDEFB756A}"/>
+              </a:ext>
+            </a:extLst>
+          </p:cNvPr>
+          <p:cNvPicPr>
+            <a:picLocks noChangeAspect="1"/>
+          </p:cNvPicPr>
+          <p:nvPr/>
+        </p:nvPicPr>
+        <p:blipFill>
+          <a:blip r:embed="rId8" cstate="print">
+            <a:extLst>
+              <a:ext uri="{28A0092B-C50C-407E-A947-70E740481C1C}">
+                <a14:useLocalDpi xmlns:a14="http://schemas.microsoft.com/office/drawing/2010/main" val="0"/>
+              </a:ext>
+            </a:extLst>
+          </a:blip>
+          <a:srcRect/>
+          <a:stretch/>
+        </p:blipFill>
+        <p:spPr>
+          <a:xfrm>
+            <a:off x="7010998" y="10363699"/>
+            <a:ext cx="467110" cy="264444"/>
+          </a:xfrm>
+          <a:prstGeom prst="rect">
+            <a:avLst/>
+          </a:prstGeom>
+        </p:spPr>
+      </p:pic>
+      <p:sp>
+        <p:nvSpPr>
+          <p:cNvPr id="3" name="Rettangolo 2">
+            <a:extLst>
+              <a:ext uri="{FF2B5EF4-FFF2-40B4-BE49-F238E27FC236}">
+                <a16:creationId xmlns:a16="http://schemas.microsoft.com/office/drawing/2014/main" id="{6DA909B0-B5DB-3790-0934-3365A0C46B72}"/>
+              </a:ext>
+            </a:extLst>
+          </p:cNvPr>
+          <p:cNvSpPr>
+            <a:spLocks noChangeArrowheads="1"/>
+          </p:cNvSpPr>
+          <p:nvPr/>
+        </p:nvSpPr>
+        <p:spPr bwMode="auto">
+          <a:xfrm rot="16200000">
+            <a:off x="3316380" y="6446398"/>
+            <a:ext cx="923396" cy="7563199"/>
+          </a:xfrm>
+          <a:prstGeom prst="rect">
+            <a:avLst/>
+          </a:prstGeom>
+          <a:solidFill>
+            <a:srgbClr val="333F50"/>
+          </a:solidFill>
+          <a:ln>
+            <a:noFill/>
+          </a:ln>
+          <a:effectLst/>
+          <a:extLst>
+            <a:ext uri="{91240B29-F687-4F45-9708-019B960494DF}">
+              <a14:hiddenLine xmlns:a14="http://schemas.microsoft.com/office/drawing/2010/main" w="9525" algn="in">
+                <a:solidFill>
+                  <a:srgbClr val="212120"/>
+                </a:solidFill>
+                <a:miter lim="800000"/>
+                <a:headEnd/>
+                <a:tailEnd/>
+              </a14:hiddenLine>
+            </a:ext>
+            <a:ext uri="{AF507438-7753-43E0-B8FC-AC1667EBCBE1}">
+              <a14:hiddenEffects xmlns:a14="http://schemas.microsoft.com/office/drawing/2010/main">
+                <a:effectLst>
+                  <a:outerShdw dist="35921" dir="2700000" algn="ctr" rotWithShape="0">
+                    <a:srgbClr val="DCD6D4"/>
+                  </a:outerShdw>
+                </a:effectLst>
+              </a14:hiddenEffects>
+            </a:ext>
+          </a:extLst>
+        </p:spPr>
+        <p:txBody>
+          <a:bodyPr rot="0" vert="horz" wrap="square" lIns="36576" tIns="36576" rIns="36576" bIns="36576" anchor="t" anchorCtr="0" upright="1">
+            <a:noAutofit/>
+          </a:bodyPr>
+          <a:lstStyle/>
+          <a:p>
+            <a:pPr marL="0" marR="0" lvl="0" indent="0" algn="ctr" defTabSz="430322" rtl="0" eaLnBrk="1" fontAlgn="auto" latinLnBrk="0" hangingPunct="0">
+              <a:lnSpc>
+                <a:spcPct val="100000"/>
+              </a:lnSpc>
+              <a:spcBef>
+                <a:spcPts val="0"/>
+              </a:spcBef>
+              <a:spcAft>
+                <a:spcPts val="0"/>
+              </a:spcAft>
+              <a:buClrTx/>
+              <a:buSzTx/>
+              <a:buFontTx/>
+              <a:buNone/>
+              <a:tabLst/>
+              <a:defRPr/>
+            </a:pPr>
+            <a:endParaRPr kumimoji="0" lang="it-IT" sz="1768" b="1" i="0" u="none" strike="noStrike" kern="0" cap="none" spc="0" normalizeH="0" baseline="0" noProof="0">
+              <a:ln>
+                <a:noFill/>
+              </a:ln>
+              <a:solidFill>
+                <a:srgbClr val="000000"/>
+              </a:solidFill>
+              <a:effectLst/>
+              <a:uLnTx/>
+              <a:uFillTx/>
+              <a:latin typeface="Helvetica Neue"/>
+              <a:sym typeface="Helvetica Neue"/>
+            </a:endParaRPr>
+          </a:p>
+        </p:txBody>
+      </p:sp>
+      <p:sp>
+        <p:nvSpPr>
+          <p:cNvPr id="5" name="CasellaDiTesto 4">
+            <a:extLst>
+              <a:ext uri="{FF2B5EF4-FFF2-40B4-BE49-F238E27FC236}">
+                <a16:creationId xmlns:a16="http://schemas.microsoft.com/office/drawing/2014/main" id="{E4D6E32B-1198-3BDF-4EBE-907237519AB6}"/>
+              </a:ext>
+            </a:extLst>
+          </p:cNvPr>
+          <p:cNvSpPr txBox="1"/>
+          <p:nvPr/>
+        </p:nvSpPr>
+        <p:spPr>
+          <a:xfrm>
+            <a:off x="101586" y="9873419"/>
+            <a:ext cx="6667513" cy="441146"/>
+          </a:xfrm>
+          <a:prstGeom prst="rect">
+            <a:avLst/>
+          </a:prstGeom>
+          <a:noFill/>
+          <a:ln w="12700" cap="flat">
+            <a:noFill/>
+            <a:miter lim="400000"/>
+          </a:ln>
+          <a:effectLst/>
+          <a:sp3d/>
+        </p:spPr>
+        <p:style>
+          <a:lnRef idx="0">
+            <a:scrgbClr r="0" g="0" b="0"/>
+          </a:lnRef>
+          <a:fillRef idx="0">
+            <a:scrgbClr r="0" g="0" b="0"/>
+          </a:fillRef>
+          <a:effectRef idx="0">
+            <a:scrgbClr r="0" g="0" b="0"/>
+          </a:effectRef>
+          <a:fontRef idx="none"/>
+        </p:style>
+        <p:txBody>
+          <a:bodyPr rot="0" spcFirstLastPara="1" vertOverflow="overflow" horzOverflow="overflow" vert="horz" wrap="square" lIns="50800" tIns="50800" rIns="50800" bIns="50800" numCol="1" spcCol="38100" rtlCol="0" anchor="ctr">
+            <a:spAutoFit/>
+          </a:bodyPr>
+          <a:lstStyle/>
+          <a:p>
+            <a:pPr marL="0" marR="0" lvl="0" indent="0" algn="l" defTabSz="584200" rtl="0" eaLnBrk="1" fontAlgn="auto" latinLnBrk="0" hangingPunct="0">
+              <a:lnSpc>
+                <a:spcPct val="100000"/>
+              </a:lnSpc>
+              <a:spcBef>
+                <a:spcPts val="0"/>
+              </a:spcBef>
+              <a:spcAft>
+                <a:spcPts val="0"/>
+              </a:spcAft>
+              <a:buClrTx/>
+              <a:buSzTx/>
+              <a:buFontTx/>
+              <a:buNone/>
+              <a:tabLst/>
+              <a:defRPr/>
+            </a:pPr>
+            <a:r>
+              <a:rPr kumimoji="0" lang="it-IT" sz="1050" b="1" i="0" u="none" strike="noStrike" kern="0" cap="none" spc="0" normalizeH="0" baseline="0" noProof="0">
+                <a:ln>
+                  <a:noFill/>
+                </a:ln>
+                <a:solidFill>
+                  <a:srgbClr val="FFFFFF"/>
+                </a:solidFill>
+                <a:effectLst/>
+                <a:uLnTx/>
+                <a:uFillTx/>
+                <a:latin typeface="Avenir Next LT Pro" panose="020B0504020202020204" pitchFamily="34" charset="0"/>
+                <a:sym typeface="Helvetica Neue"/>
+              </a:rPr>
+              <a:t>Per informazioni e approfondimenti rivolgersi al Presidio Normativo Finance di SCS al seguente indirizzo e-mail: alert@scsconsulting.it</a:t>
+            </a:r>
+          </a:p>
+        </p:txBody>
+      </p:sp>
+      <p:sp>
+        <p:nvSpPr>
+          <p:cNvPr id="6" name="Rectangle 23">
+            <a:extLst>
+              <a:ext uri="{FF2B5EF4-FFF2-40B4-BE49-F238E27FC236}">
+                <a16:creationId xmlns:a16="http://schemas.microsoft.com/office/drawing/2014/main" id="{92EF72AF-AF30-4737-903E-FDD8752D0EE2}"/>
+              </a:ext>
+            </a:extLst>
+          </p:cNvPr>
+          <p:cNvSpPr>
+            <a:spLocks noChangeArrowheads="1"/>
+          </p:cNvSpPr>
+          <p:nvPr/>
+        </p:nvSpPr>
+        <p:spPr bwMode="auto">
+          <a:xfrm>
+            <a:off x="85726" y="10372647"/>
+            <a:ext cx="6588000" cy="200055"/>
+          </a:xfrm>
+          <a:prstGeom prst="rect">
+            <a:avLst/>
+          </a:prstGeom>
+          <a:noFill/>
+          <a:ln>
+            <a:noFill/>
+          </a:ln>
+          <a:effectLst/>
+          <a:extLst>
+            <a:ext uri="{909E8E84-426E-40DD-AFC4-6F175D3DCCD1}">
+              <a14:hiddenFill xmlns:a14="http://schemas.microsoft.com/office/drawing/2010/main">
+                <a:solidFill>
+                  <a:schemeClr val="accent1"/>
+                </a:solidFill>
+              </a14:hiddenFill>
+            </a:ext>
+            <a:ext uri="{91240B29-F687-4F45-9708-019B960494DF}">
+              <a14:hiddenLine xmlns:a14="http://schemas.microsoft.com/office/drawing/2010/main" w="9525">
+                <a:solidFill>
+                  <a:schemeClr val="tx1"/>
+                </a:solidFill>
+                <a:miter lim="800000"/>
+                <a:headEnd/>
+                <a:tailEnd/>
+              </a14:hiddenLine>
+            </a:ext>
+            <a:ext uri="{AF507438-7753-43E0-B8FC-AC1667EBCBE1}">
+              <a14:hiddenEffects xmlns:a14="http://schemas.microsoft.com/office/drawing/2010/main">
+                <a:effectLst>
+                  <a:outerShdw dist="35921" dir="2700000" algn="ctr" rotWithShape="0">
+                    <a:schemeClr val="bg2"/>
+                  </a:outerShdw>
+                </a:effectLst>
+              </a14:hiddenEffects>
+            </a:ext>
+          </a:extLst>
+        </p:spPr>
+        <p:txBody>
+          <a:bodyPr vert="horz" wrap="square" lIns="91440" tIns="45720" rIns="91440" bIns="45720" numCol="1" anchor="ctr" anchorCtr="0" compatLnSpc="1">
+            <a:prstTxWarp prst="textNoShape">
+              <a:avLst/>
+            </a:prstTxWarp>
+            <a:spAutoFit/>
+          </a:bodyPr>
+          <a:lstStyle/>
+          <a:p>
+            <a:pPr marL="0" marR="0" lvl="0" indent="0" algn="l" defTabSz="914400" rtl="0" eaLnBrk="0" fontAlgn="base" latinLnBrk="0" hangingPunct="0">
+              <a:lnSpc>
+                <a:spcPct val="100000"/>
+              </a:lnSpc>
+              <a:spcBef>
+                <a:spcPct val="0"/>
+              </a:spcBef>
+              <a:spcAft>
+                <a:spcPct val="0"/>
+              </a:spcAft>
+              <a:buClrTx/>
+              <a:buSzTx/>
+              <a:buFontTx/>
+              <a:buNone/>
+              <a:tabLst/>
+              <a:defRPr/>
+            </a:pPr>
+            <a:r>
+              <a:rPr kumimoji="0" lang="it-IT" altLang="it-IT" sz="700" b="0" i="1" u="none" strike="noStrike" kern="0" cap="none" spc="0" normalizeH="0" baseline="0" noProof="0">
+                <a:ln>
+                  <a:noFill/>
+                </a:ln>
+                <a:solidFill>
+                  <a:srgbClr val="FFFFFF"/>
+                </a:solidFill>
+                <a:effectLst/>
+                <a:uLnTx/>
+                <a:uFillTx/>
+                <a:latin typeface="Avenir Next LT Pro" panose="020B0504020202020204" pitchFamily="34" charset="0"/>
+                <a:ea typeface="Calibri" panose="020F0502020204030204" pitchFamily="34" charset="0"/>
+                <a:cs typeface="Calibri" panose="020F0502020204030204" pitchFamily="34" charset="0"/>
+                <a:sym typeface="Helvetica Neue"/>
+              </a:rPr>
+              <a:t>Il presente documento comprende le news identificate come coerenti con il focus aziendale dell’Area Finance ed in linea con gli eventuali interessi correlati</a:t>
+            </a:r>
+            <a:endParaRPr kumimoji="0" lang="it-IT" altLang="it-IT" sz="700" b="0" i="0" u="none" strike="noStrike" kern="0" cap="none" spc="0" normalizeH="0" baseline="0" noProof="0">
+              <a:ln>
+                <a:noFill/>
+              </a:ln>
+              <a:solidFill>
+                <a:srgbClr val="FFFFFF"/>
+              </a:solidFill>
+              <a:effectLst/>
+              <a:uLnTx/>
+              <a:uFillTx/>
+              <a:latin typeface="Avenir Next LT Pro" panose="020B0504020202020204" pitchFamily="34" charset="0"/>
+              <a:cs typeface="Calibri" panose="020F0502020204030204" pitchFamily="34" charset="0"/>
+              <a:sym typeface="Helvetica Neue"/>
+            </a:endParaRPr>
+          </a:p>
+        </p:txBody>
+      </p:sp>
+      <p:pic>
+        <p:nvPicPr>
+          <p:cNvPr id="8" name="Immagine 7" descr="Immagine che contiene testo, clipart&#10;&#10;Descrizione generata automaticamente">
+            <a:extLst>
+              <a:ext uri="{FF2B5EF4-FFF2-40B4-BE49-F238E27FC236}">
+                <a16:creationId xmlns:a16="http://schemas.microsoft.com/office/drawing/2014/main" id="{89E0751A-B63A-6E1D-7192-D1BE3DF1D7E6}"/>
+              </a:ext>
+            </a:extLst>
+          </p:cNvPr>
+          <p:cNvPicPr>
+            <a:picLocks noChangeAspect="1"/>
+          </p:cNvPicPr>
+          <p:nvPr/>
+        </p:nvPicPr>
+        <p:blipFill>
+          <a:blip r:embed="rId7"/>
+          <a:stretch>
+            <a:fillRect/>
+          </a:stretch>
+        </p:blipFill>
+        <p:spPr>
+          <a:xfrm>
+            <a:off x="6769100" y="10092340"/>
+            <a:ext cx="654557" cy="437547"/>
+          </a:xfrm>
+          <a:prstGeom prst="rect">
+            <a:avLst/>
+          </a:prstGeom>
+        </p:spPr>
+      </p:pic>
+      <p:sp>
+        <p:nvSpPr>
+          <p:cNvPr id="24" name="CasellaDiTesto 23">
+            <a:extLst>
+              <a:ext uri="{FF2B5EF4-FFF2-40B4-BE49-F238E27FC236}">
+                <a16:creationId xmlns:a16="http://schemas.microsoft.com/office/drawing/2014/main" id="{8DE3822E-A790-3530-8473-01571BAE80EF}"/>
+              </a:ext>
+            </a:extLst>
+          </p:cNvPr>
+          <p:cNvSpPr txBox="1"/>
+          <p:nvPr/>
+        </p:nvSpPr>
+        <p:spPr>
+          <a:xfrm>
+            <a:off x="4825994" y="89322"/>
+            <a:ext cx="2433740" cy="595035"/>
+          </a:xfrm>
+          <a:prstGeom prst="rect">
+            <a:avLst/>
+          </a:prstGeom>
+          <a:noFill/>
+          <a:ln w="12700" cap="flat">
+            <a:noFill/>
+            <a:miter lim="400000"/>
+          </a:ln>
+          <a:effectLst/>
+          <a:sp3d/>
+        </p:spPr>
+        <p:style>
+          <a:lnRef idx="0">
+            <a:scrgbClr r="0" g="0" b="0"/>
+          </a:lnRef>
+          <a:fillRef idx="0">
+            <a:scrgbClr r="0" g="0" b="0"/>
+          </a:fillRef>
+          <a:effectRef idx="0">
+            <a:scrgbClr r="0" g="0" b="0"/>
+          </a:effectRef>
+          <a:fontRef idx="none"/>
+        </p:style>
+        <p:txBody>
+          <a:bodyPr rot="0" spcFirstLastPara="1" vertOverflow="overflow" horzOverflow="overflow" vert="horz" wrap="square" lIns="50800" tIns="50800" rIns="50800" bIns="50800" numCol="1" spcCol="38100" rtlCol="0" anchor="ctr">
+            <a:spAutoFit/>
+          </a:bodyPr>
+          <a:lstStyle/>
+          <a:p>
+            <a:pPr marL="0" marR="0" indent="0" algn="r" defTabSz="584200" rtl="0" fontAlgn="auto" latinLnBrk="0" hangingPunct="0">
+              <a:lnSpc>
+                <a:spcPct val="100000"/>
+              </a:lnSpc>
+              <a:spcBef>
+                <a:spcPts val="0"/>
+              </a:spcBef>
+              <a:spcAft>
+                <a:spcPts val="0"/>
+              </a:spcAft>
+              <a:buClrTx/>
+              <a:buSzTx/>
+              <a:buFontTx/>
+              <a:buNone/>
+              <a:tabLst/>
+            </a:pPr>
+            <a:r>
+              <a:rPr kumimoji="0" lang="it-IT" sz="1600" b="1" i="1" u="none" strike="noStrike" cap="none" spc="0" normalizeH="0" baseline="0" dirty="0">
+                <a:ln>
+                  <a:noFill/>
+                </a:ln>
+                <a:solidFill>
+                  <a:schemeClr val="bg1"/>
+                </a:solidFill>
+                <a:effectLst/>
+                <a:uFillTx/>
+                <a:latin typeface="Avenir Next LT Pro" panose="020B0504020202020204" pitchFamily="34" charset="0"/>
+                <a:cs typeface="Calibri Light"/>
+                <a:sym typeface="Helvetica Neue"/>
+              </a:rPr>
+              <a:t>N. 2</a:t>
+            </a:r>
+            <a:endParaRPr kumimoji="0" lang="it-IT" sz="1600" b="1" i="1" u="none" strike="noStrike" cap="none" spc="0" normalizeH="0" baseline="0" dirty="0">
+              <a:ln>
+                <a:noFill/>
+              </a:ln>
+              <a:solidFill>
+                <a:schemeClr val="bg1"/>
+              </a:solidFill>
+              <a:effectLst/>
+              <a:uFillTx/>
+              <a:latin typeface="Avenir Next LT Pro" panose="020B0504020202020204" pitchFamily="34" charset="0"/>
+              <a:cs typeface="Calibri Light" panose="020F0302020204030204" pitchFamily="34" charset="0"/>
+              <a:sym typeface="Helvetica Neue"/>
+            </a:endParaRPr>
+          </a:p>
+          <a:p>
+            <a:pPr algn="r" defTabSz="584200"/>
+            <a:r>
+              <a:rPr lang="it-IT" sz="1600" i="1" dirty="0">
+                <a:solidFill>
+                  <a:schemeClr val="bg1"/>
+                </a:solidFill>
+                <a:latin typeface="Avenir Next LT Pro" panose="020B0504020202020204" pitchFamily="34" charset="0"/>
+                <a:cs typeface="Calibri Light"/>
+              </a:rPr>
+              <a:t>Maggio 2026</a:t>
+            </a:r>
+            <a:endParaRPr lang="it-IT" sz="1600" b="1" i="1" u="none" strike="noStrike" cap="none" spc="0" normalizeH="0" baseline="0" dirty="0">
+              <a:ln>
+                <a:noFill/>
+              </a:ln>
+              <a:solidFill>
+                <a:schemeClr val="bg1"/>
+              </a:solidFill>
+              <a:effectLst/>
+              <a:uFillTx/>
+              <a:latin typeface="Avenir Next LT Pro" panose="020B0504020202020204" pitchFamily="34" charset="0"/>
+              <a:cs typeface="Calibri Light" panose="020F0302020204030204" pitchFamily="34" charset="0"/>
+            </a:endParaRPr>
+          </a:p>
+        </p:txBody>
+      </p:sp>
+    </p:spTree>
+    <p:extLst>
+      <p:ext uri="{BB962C8B-B14F-4D97-AF65-F5344CB8AC3E}">
+        <p14:creationId xmlns:p14="http://schemas.microsoft.com/office/powerpoint/2010/main" val="413168718"/>
+      </p:ext>
+    </p:extLst>
+  </p:cSld>
+  <p:clrMapOvr>
+    <a:masterClrMapping/>
+  </p:clrMapOvr>
+  <mc:AlternateContent xmlns:mc="http://schemas.openxmlformats.org/markup-compatibility/2006">
+    <mc:Choice xmlns:p14="http://schemas.microsoft.com/office/powerpoint/2010/main" Requires="p14">
+      <p:transition p14:dur="10"/>
+    </mc:Choice>
+    <mc:Fallback>
+      <p:transition/>
+    </mc:Fallback>
+  </mc:AlternateContent>
+</p:sld>
+</file>
+
+<file path=ppt/slides/slide6.xml><?xml version="1.0" encoding="utf-8"?>
+<p:sld xmlns:a="http://schemas.openxmlformats.org/drawingml/2006/main" xmlns:r="http://schemas.openxmlformats.org/officeDocument/2006/relationships" xmlns:p="http://schemas.openxmlformats.org/presentationml/2006/main">
+  <p:cSld>
+    <p:spTree>
+      <p:nvGrpSpPr>
+        <p:cNvPr id="1" name="">
+          <a:extLst>
+            <a:ext uri="{FF2B5EF4-FFF2-40B4-BE49-F238E27FC236}">
+              <a16:creationId xmlns:a16="http://schemas.microsoft.com/office/drawing/2014/main" id="{DF9168A8-B65B-B53F-285E-28C85E0EFA7F}"/>
+            </a:ext>
+          </a:extLst>
+        </p:cNvPr>
+        <p:cNvGrpSpPr/>
+        <p:nvPr/>
+      </p:nvGrpSpPr>
+      <p:grpSpPr>
+        <a:xfrm>
+          <a:off x="0" y="0"/>
+          <a:ext cx="0" cy="0"/>
+          <a:chOff x="0" y="0"/>
+          <a:chExt cx="0" cy="0"/>
+        </a:xfrm>
+      </p:grpSpPr>
+      <p:graphicFrame>
+        <p:nvGraphicFramePr>
+          <p:cNvPr id="2" name="Oggetto 1" hidden="1">
+            <a:extLst>
+              <a:ext uri="{FF2B5EF4-FFF2-40B4-BE49-F238E27FC236}">
+                <a16:creationId xmlns:a16="http://schemas.microsoft.com/office/drawing/2014/main" id="{81C7E066-AB4B-F833-F2E3-9BC7962842C9}"/>
+              </a:ext>
+            </a:extLst>
+          </p:cNvPr>
+          <p:cNvGraphicFramePr>
+            <a:graphicFrameLocks noChangeAspect="1"/>
+          </p:cNvGraphicFramePr>
+          <p:nvPr>
+            <p:custDataLst>
+              <p:tags r:id="rId1"/>
+            </p:custDataLst>
+          </p:nvPr>
+        </p:nvGraphicFramePr>
+        <p:xfrm>
+          <a:off x="1588" y="1588"/>
+          <a:ext cx="1588" cy="1588"/>
+        </p:xfrm>
+        <a:graphic>
+          <a:graphicData uri="http://schemas.openxmlformats.org/presentationml/2006/ole">
+            <mc:AlternateContent xmlns:mc="http://schemas.openxmlformats.org/markup-compatibility/2006">
+              <mc:Choice xmlns:v="urn:schemas-microsoft-com:vml" Requires="v">
+                <p:oleObj name="Diapositiva think-cell" r:id="rId4" imgW="395" imgH="394" progId="TCLayout.ActiveDocument.1">
+                  <p:embed/>
+                </p:oleObj>
+              </mc:Choice>
+              <mc:Fallback>
+                <p:oleObj name="Diapositiva think-cell" r:id="rId4" imgW="395" imgH="394" progId="TCLayout.ActiveDocument.1">
+                  <p:embed/>
+                  <p:pic>
+                    <p:nvPicPr>
+                      <p:cNvPr id="2" name="Oggetto 1" hidden="1">
+                        <a:extLst>
+                          <a:ext uri="{FF2B5EF4-FFF2-40B4-BE49-F238E27FC236}">
+                            <a16:creationId xmlns:a16="http://schemas.microsoft.com/office/drawing/2014/main" id="{9557F285-97AC-1D0A-F810-62AD75F61098}"/>
+                          </a:ext>
+                        </a:extLst>
+                      </p:cNvPr>
+                      <p:cNvPicPr/>
+                      <p:nvPr/>
+                    </p:nvPicPr>
+                    <p:blipFill>
+                      <a:blip r:embed="rId5"/>
+                      <a:stretch>
+                        <a:fillRect/>
+                      </a:stretch>
+                    </p:blipFill>
+                    <p:spPr>
+                      <a:xfrm>
+                        <a:off x="1588" y="1588"/>
+                        <a:ext cx="1588" cy="1588"/>
+                      </a:xfrm>
+                      <a:prstGeom prst="rect">
+                        <a:avLst/>
+                      </a:prstGeom>
+                    </p:spPr>
+                  </p:pic>
+                </p:oleObj>
+              </mc:Fallback>
+            </mc:AlternateContent>
+          </a:graphicData>
+        </a:graphic>
+      </p:graphicFrame>
+      <p:sp>
+        <p:nvSpPr>
+          <p:cNvPr id="51" name="Casella di testo 36">
+            <a:extLst>
+              <a:ext uri="{FF2B5EF4-FFF2-40B4-BE49-F238E27FC236}">
+                <a16:creationId xmlns:a16="http://schemas.microsoft.com/office/drawing/2014/main" id="{3D07A3EF-5377-BE74-2A1E-AB93A32222D7}"/>
+              </a:ext>
+            </a:extLst>
+          </p:cNvPr>
+          <p:cNvSpPr txBox="1">
+            <a:spLocks noChangeArrowheads="1"/>
+          </p:cNvSpPr>
+          <p:nvPr/>
+        </p:nvSpPr>
+        <p:spPr bwMode="auto">
+          <a:xfrm>
+            <a:off x="1365790" y="1603849"/>
+            <a:ext cx="4828095" cy="367119"/>
+          </a:xfrm>
+          <a:prstGeom prst="rect">
+            <a:avLst/>
+          </a:prstGeom>
+          <a:noFill/>
+          <a:ln>
+            <a:noFill/>
+          </a:ln>
+          <a:effectLst/>
+        </p:spPr>
+        <p:txBody>
+          <a:bodyPr rot="0" vert="horz" wrap="square" lIns="36576" tIns="36576" rIns="36576" bIns="36576" anchor="ctr" anchorCtr="0" upright="1">
+            <a:noAutofit/>
+          </a:bodyPr>
+          <a:lstStyle/>
+          <a:p>
+            <a:pPr>
+              <a:lnSpc>
+                <a:spcPct val="107000"/>
+              </a:lnSpc>
+              <a:spcAft>
+                <a:spcPts val="800"/>
+              </a:spcAft>
+            </a:pPr>
+            <a:r>
+              <a:rPr lang="it-IT" sz="1600">
+                <a:solidFill>
+                  <a:schemeClr val="bg1"/>
+                </a:solidFill>
+                <a:effectLst/>
+                <a:latin typeface="Trebuchet MS" panose="020B0603020202020204" pitchFamily="34" charset="0"/>
+                <a:ea typeface="Calibri" panose="020F0502020204030204" pitchFamily="34" charset="0"/>
+                <a:cs typeface="Traditional Arabic" panose="020B0604020202020204" pitchFamily="18" charset="-78"/>
+              </a:rPr>
+              <a:t>SOMMARIO</a:t>
+            </a:r>
+          </a:p>
+        </p:txBody>
+      </p:sp>
+      <p:sp>
+        <p:nvSpPr>
+          <p:cNvPr id="19" name="Rettangolo 18">
+            <a:extLst>
+              <a:ext uri="{FF2B5EF4-FFF2-40B4-BE49-F238E27FC236}">
+                <a16:creationId xmlns:a16="http://schemas.microsoft.com/office/drawing/2014/main" id="{A51E9F68-9407-931A-6472-74B3CA9726FC}"/>
+              </a:ext>
+            </a:extLst>
+          </p:cNvPr>
+          <p:cNvSpPr>
+            <a:spLocks noChangeArrowheads="1"/>
+          </p:cNvSpPr>
+          <p:nvPr/>
+        </p:nvSpPr>
+        <p:spPr bwMode="auto">
+          <a:xfrm rot="16200000">
+            <a:off x="3635841" y="-1992428"/>
+            <a:ext cx="288000" cy="7559672"/>
+          </a:xfrm>
+          <a:prstGeom prst="rect">
+            <a:avLst/>
+          </a:prstGeom>
+          <a:solidFill>
+            <a:srgbClr val="333F50"/>
+          </a:solidFill>
+          <a:ln>
+            <a:noFill/>
+          </a:ln>
+          <a:effectLst/>
+          <a:extLst>
+            <a:ext uri="{91240B29-F687-4F45-9708-019B960494DF}">
+              <a14:hiddenLine xmlns:a14="http://schemas.microsoft.com/office/drawing/2010/main" w="9525" algn="in">
+                <a:solidFill>
+                  <a:srgbClr val="212120"/>
+                </a:solidFill>
+                <a:miter lim="800000"/>
+                <a:headEnd/>
+                <a:tailEnd/>
+              </a14:hiddenLine>
+            </a:ext>
+            <a:ext uri="{AF507438-7753-43E0-B8FC-AC1667EBCBE1}">
+              <a14:hiddenEffects xmlns:a14="http://schemas.microsoft.com/office/drawing/2010/main">
+                <a:effectLst>
+                  <a:outerShdw dist="35921" dir="2700000" algn="ctr" rotWithShape="0">
+                    <a:srgbClr val="DCD6D4"/>
+                  </a:outerShdw>
+                </a:effectLst>
+              </a14:hiddenEffects>
+            </a:ext>
+          </a:extLst>
+        </p:spPr>
+        <p:txBody>
+          <a:bodyPr rot="0" vert="horz" wrap="square" lIns="36576" tIns="36576" rIns="36576" bIns="36576" anchor="t" anchorCtr="0" upright="1">
+            <a:noAutofit/>
+          </a:bodyPr>
+          <a:lstStyle/>
+          <a:p>
+            <a:endParaRPr lang="it-IT"/>
+          </a:p>
+        </p:txBody>
+      </p:sp>
+      <p:sp>
+        <p:nvSpPr>
+          <p:cNvPr id="20" name="Casella di testo 36">
+            <a:extLst>
+              <a:ext uri="{FF2B5EF4-FFF2-40B4-BE49-F238E27FC236}">
+                <a16:creationId xmlns:a16="http://schemas.microsoft.com/office/drawing/2014/main" id="{1CC046F6-E922-A558-E5E0-7DEC99D9F7A0}"/>
+              </a:ext>
+            </a:extLst>
+          </p:cNvPr>
+          <p:cNvSpPr txBox="1">
+            <a:spLocks noChangeArrowheads="1"/>
+          </p:cNvSpPr>
+          <p:nvPr/>
+        </p:nvSpPr>
+        <p:spPr bwMode="auto">
+          <a:xfrm>
+            <a:off x="1201372" y="1598434"/>
+            <a:ext cx="5156930" cy="367119"/>
+          </a:xfrm>
+          <a:prstGeom prst="rect">
+            <a:avLst/>
+          </a:prstGeom>
+          <a:noFill/>
+          <a:ln>
+            <a:noFill/>
+          </a:ln>
+          <a:effectLst/>
+        </p:spPr>
+        <p:txBody>
+          <a:bodyPr rot="0" vert="horz" wrap="square" lIns="36576" tIns="36576" rIns="36576" bIns="36576" anchor="ctr" anchorCtr="0" upright="1">
+            <a:noAutofit/>
+          </a:bodyPr>
+          <a:lstStyle/>
+          <a:p>
+            <a:pPr>
+              <a:lnSpc>
+                <a:spcPct val="107000"/>
+              </a:lnSpc>
+              <a:spcAft>
+                <a:spcPts val="800"/>
+              </a:spcAft>
+            </a:pPr>
+            <a:r>
+              <a:rPr lang="it-IT" sz="1500">
+                <a:solidFill>
+                  <a:schemeClr val="bg1"/>
+                </a:solidFill>
+                <a:effectLst/>
+                <a:latin typeface="Avenir Next LT Pro" panose="020B0504020202020204" pitchFamily="34" charset="0"/>
+                <a:ea typeface="Calibri" panose="020F0502020204030204" pitchFamily="34" charset="0"/>
+                <a:cs typeface="Times New Roman" panose="02020603050405020304" pitchFamily="18" charset="0"/>
+              </a:rPr>
+              <a:t>Principali aggiornamenti normativi</a:t>
+            </a:r>
+          </a:p>
+        </p:txBody>
+      </p:sp>
+      <p:pic>
+        <p:nvPicPr>
+          <p:cNvPr id="25" name="Immagine 24" descr="Immagine che contiene interni, metallo, sedendo, edificio&#10;&#10;Descrizione generata automaticamente">
+            <a:extLst>
+              <a:ext uri="{FF2B5EF4-FFF2-40B4-BE49-F238E27FC236}">
+                <a16:creationId xmlns:a16="http://schemas.microsoft.com/office/drawing/2014/main" id="{5B0FCA5E-94D9-4D76-1822-F4662D452862}"/>
+              </a:ext>
+            </a:extLst>
+          </p:cNvPr>
+          <p:cNvPicPr/>
+          <p:nvPr/>
+        </p:nvPicPr>
+        <p:blipFill rotWithShape="1">
+          <a:blip r:embed="rId6" cstate="print">
+            <a:extLst>
+              <a:ext uri="{28A0092B-C50C-407E-A947-70E740481C1C}">
+                <a14:useLocalDpi xmlns:a14="http://schemas.microsoft.com/office/drawing/2010/main" val="0"/>
+              </a:ext>
+            </a:extLst>
+          </a:blip>
+          <a:srcRect t="17038" b="38097"/>
+          <a:stretch/>
+        </p:blipFill>
+        <p:spPr bwMode="auto">
+          <a:xfrm>
+            <a:off x="3176" y="0"/>
+            <a:ext cx="7556499" cy="1662545"/>
+          </a:xfrm>
+          <a:prstGeom prst="rect">
+            <a:avLst/>
+          </a:prstGeom>
+          <a:ln>
+            <a:noFill/>
+          </a:ln>
+          <a:extLst>
+            <a:ext uri="{53640926-AAD7-44D8-BBD7-CCE9431645EC}">
+              <a14:shadowObscured xmlns:a14="http://schemas.microsoft.com/office/drawing/2010/main"/>
+            </a:ext>
+          </a:extLst>
+        </p:spPr>
+      </p:pic>
+      <p:sp>
+        <p:nvSpPr>
+          <p:cNvPr id="34" name="Rettangolo 33">
+            <a:extLst>
+              <a:ext uri="{FF2B5EF4-FFF2-40B4-BE49-F238E27FC236}">
+                <a16:creationId xmlns:a16="http://schemas.microsoft.com/office/drawing/2014/main" id="{583C65BD-BC96-39E8-929B-156F7022DF95}"/>
+              </a:ext>
+            </a:extLst>
+          </p:cNvPr>
+          <p:cNvSpPr/>
+          <p:nvPr/>
+        </p:nvSpPr>
+        <p:spPr>
+          <a:xfrm>
+            <a:off x="0" y="0"/>
+            <a:ext cx="7559675" cy="1662545"/>
+          </a:xfrm>
+          <a:prstGeom prst="rect">
+            <a:avLst/>
+          </a:prstGeom>
+          <a:solidFill>
+            <a:srgbClr val="100F16">
+              <a:alpha val="48000"/>
+            </a:srgbClr>
+          </a:solidFill>
+          <a:ln w="12700">
+            <a:miter lim="400000"/>
+          </a:ln>
+          <a:effectLst/>
+        </p:spPr>
+        <p:txBody>
+          <a:bodyPr lIns="50800" tIns="50800" rIns="50800" bIns="50800" anchor="ctr"/>
+          <a:lstStyle/>
+          <a:p>
+            <a:pPr algn="ctr" defTabSz="1828754" hangingPunct="1">
+              <a:lnSpc>
+                <a:spcPct val="100000"/>
+              </a:lnSpc>
+            </a:pPr>
+            <a:endParaRPr lang="it-IT" sz="3200" kern="1200" cap="none" spc="0">
+              <a:solidFill>
+                <a:srgbClr val="FFFFFF"/>
+              </a:solidFill>
+              <a:latin typeface="Helvetica Light"/>
+              <a:sym typeface="Helvetica Light"/>
+            </a:endParaRPr>
+          </a:p>
+        </p:txBody>
+      </p:sp>
+      <p:sp>
+        <p:nvSpPr>
+          <p:cNvPr id="39" name="Titolo della presentazione…">
+            <a:extLst>
+              <a:ext uri="{FF2B5EF4-FFF2-40B4-BE49-F238E27FC236}">
+                <a16:creationId xmlns:a16="http://schemas.microsoft.com/office/drawing/2014/main" id="{D425AB7A-7E83-4573-56B3-7344836D944C}"/>
+              </a:ext>
+            </a:extLst>
+          </p:cNvPr>
+          <p:cNvSpPr txBox="1"/>
+          <p:nvPr/>
+        </p:nvSpPr>
+        <p:spPr>
+          <a:xfrm>
+            <a:off x="1348384" y="559834"/>
+            <a:ext cx="4862907" cy="547493"/>
+          </a:xfrm>
+          <a:prstGeom prst="rect">
+            <a:avLst/>
+          </a:prstGeom>
+          <a:ln w="12700">
+            <a:miter lim="400000"/>
+          </a:ln>
+          <a:extLst>
+            <a:ext uri="{C572A759-6A51-4108-AA02-DFA0A04FC94B}">
+              <ma14:wrappingTextBoxFlag xmlns="" xmlns:ma14="http://schemas.microsoft.com/office/mac/drawingml/2011/main" val="1"/>
+            </a:ext>
+          </a:extLst>
+        </p:spPr>
+        <p:txBody>
+          <a:bodyPr wrap="square" lIns="27259" tIns="27259" rIns="27259" bIns="27259">
+            <a:spAutoFit/>
+          </a:bodyPr>
+          <a:lstStyle/>
+          <a:p>
+            <a:pPr>
+              <a:defRPr sz="3200">
+                <a:solidFill>
+                  <a:srgbClr val="1F4B80"/>
+                </a:solidFill>
+                <a:latin typeface="Lucida Sans"/>
+                <a:ea typeface="Lucida Sans"/>
+                <a:cs typeface="Lucida Sans"/>
+                <a:sym typeface="Lucida Sans"/>
+              </a:defRPr>
+            </a:pPr>
+            <a:r>
+              <a:rPr lang="it-IT" sz="3200" i="1" dirty="0">
+                <a:solidFill>
+                  <a:schemeClr val="bg1"/>
+                </a:solidFill>
+                <a:latin typeface="Avenir Next LT Pro" panose="020B0504020202020204" pitchFamily="34" charset="0"/>
+              </a:rPr>
+              <a:t>Alert Normativo</a:t>
+            </a:r>
+          </a:p>
+        </p:txBody>
+      </p:sp>
+      <p:pic>
+        <p:nvPicPr>
+          <p:cNvPr id="40" name="Immagine 39">
+            <a:extLst>
+              <a:ext uri="{FF2B5EF4-FFF2-40B4-BE49-F238E27FC236}">
+                <a16:creationId xmlns:a16="http://schemas.microsoft.com/office/drawing/2014/main" id="{3BEA35BC-5184-E139-1EF1-F212FB62C7EB}"/>
+              </a:ext>
+            </a:extLst>
+          </p:cNvPr>
+          <p:cNvPicPr>
+            <a:picLocks noChangeAspect="1"/>
+          </p:cNvPicPr>
+          <p:nvPr/>
+        </p:nvPicPr>
+        <p:blipFill>
+          <a:blip r:embed="rId7"/>
+          <a:stretch>
+            <a:fillRect/>
+          </a:stretch>
+        </p:blipFill>
+        <p:spPr>
+          <a:xfrm>
+            <a:off x="71438" y="305346"/>
+            <a:ext cx="1775227" cy="1186673"/>
+          </a:xfrm>
+          <a:prstGeom prst="rect">
+            <a:avLst/>
+          </a:prstGeom>
+        </p:spPr>
+      </p:pic>
+      <p:pic>
+        <p:nvPicPr>
+          <p:cNvPr id="41" name="Immagine 40">
+            <a:extLst>
+              <a:ext uri="{FF2B5EF4-FFF2-40B4-BE49-F238E27FC236}">
+                <a16:creationId xmlns:a16="http://schemas.microsoft.com/office/drawing/2014/main" id="{223E53B0-8DE3-A14E-F2BD-6A423BDF72EA}"/>
+              </a:ext>
+            </a:extLst>
+          </p:cNvPr>
+          <p:cNvPicPr>
+            <a:picLocks noChangeAspect="1"/>
+          </p:cNvPicPr>
+          <p:nvPr/>
+        </p:nvPicPr>
+        <p:blipFill>
+          <a:blip r:embed="rId8" cstate="print">
+            <a:extLst>
+              <a:ext uri="{28A0092B-C50C-407E-A947-70E740481C1C}">
+                <a14:useLocalDpi xmlns:a14="http://schemas.microsoft.com/office/drawing/2010/main" val="0"/>
+              </a:ext>
+            </a:extLst>
+          </a:blip>
+          <a:srcRect/>
+          <a:stretch/>
+        </p:blipFill>
+        <p:spPr>
+          <a:xfrm>
+            <a:off x="7010998" y="10363699"/>
+            <a:ext cx="467110" cy="264444"/>
+          </a:xfrm>
+          <a:prstGeom prst="rect">
+            <a:avLst/>
+          </a:prstGeom>
+        </p:spPr>
+      </p:pic>
+      <p:sp>
+        <p:nvSpPr>
+          <p:cNvPr id="3" name="Rettangolo 2">
+            <a:extLst>
+              <a:ext uri="{FF2B5EF4-FFF2-40B4-BE49-F238E27FC236}">
+                <a16:creationId xmlns:a16="http://schemas.microsoft.com/office/drawing/2014/main" id="{F84E0F00-0F52-1C97-13C0-724CF9E91585}"/>
+              </a:ext>
+            </a:extLst>
+          </p:cNvPr>
+          <p:cNvSpPr>
+            <a:spLocks noChangeArrowheads="1"/>
+          </p:cNvSpPr>
+          <p:nvPr/>
+        </p:nvSpPr>
+        <p:spPr bwMode="auto">
+          <a:xfrm rot="16200000">
+            <a:off x="3316380" y="6446398"/>
+            <a:ext cx="923396" cy="7563199"/>
+          </a:xfrm>
+          <a:prstGeom prst="rect">
+            <a:avLst/>
+          </a:prstGeom>
+          <a:solidFill>
+            <a:srgbClr val="333F50"/>
+          </a:solidFill>
+          <a:ln>
+            <a:noFill/>
+          </a:ln>
+          <a:effectLst/>
+          <a:extLst>
+            <a:ext uri="{91240B29-F687-4F45-9708-019B960494DF}">
+              <a14:hiddenLine xmlns:a14="http://schemas.microsoft.com/office/drawing/2010/main" w="9525" algn="in">
+                <a:solidFill>
+                  <a:srgbClr val="212120"/>
+                </a:solidFill>
+                <a:miter lim="800000"/>
+                <a:headEnd/>
+                <a:tailEnd/>
+              </a14:hiddenLine>
+            </a:ext>
+            <a:ext uri="{AF507438-7753-43E0-B8FC-AC1667EBCBE1}">
+              <a14:hiddenEffects xmlns:a14="http://schemas.microsoft.com/office/drawing/2010/main">
+                <a:effectLst>
+                  <a:outerShdw dist="35921" dir="2700000" algn="ctr" rotWithShape="0">
+                    <a:srgbClr val="DCD6D4"/>
+                  </a:outerShdw>
+                </a:effectLst>
+              </a14:hiddenEffects>
+            </a:ext>
+          </a:extLst>
+        </p:spPr>
+        <p:txBody>
+          <a:bodyPr rot="0" vert="horz" wrap="square" lIns="36576" tIns="36576" rIns="36576" bIns="36576" anchor="t" anchorCtr="0" upright="1">
+            <a:noAutofit/>
+          </a:bodyPr>
+          <a:lstStyle/>
+          <a:p>
+            <a:pPr marL="0" marR="0" lvl="0" indent="0" algn="ctr" defTabSz="430322" rtl="0" eaLnBrk="1" fontAlgn="auto" latinLnBrk="0" hangingPunct="0">
+              <a:lnSpc>
+                <a:spcPct val="100000"/>
+              </a:lnSpc>
+              <a:spcBef>
+                <a:spcPts val="0"/>
+              </a:spcBef>
+              <a:spcAft>
+                <a:spcPts val="0"/>
+              </a:spcAft>
+              <a:buClrTx/>
+              <a:buSzTx/>
+              <a:buFontTx/>
+              <a:buNone/>
+              <a:tabLst/>
+              <a:defRPr/>
+            </a:pPr>
+            <a:endParaRPr kumimoji="0" lang="it-IT" sz="1768" b="1" i="0" u="none" strike="noStrike" kern="0" cap="none" spc="0" normalizeH="0" baseline="0" noProof="0">
+              <a:ln>
+                <a:noFill/>
+              </a:ln>
+              <a:solidFill>
+                <a:srgbClr val="000000"/>
+              </a:solidFill>
+              <a:effectLst/>
+              <a:uLnTx/>
+              <a:uFillTx/>
+              <a:latin typeface="Helvetica Neue"/>
+              <a:sym typeface="Helvetica Neue"/>
+            </a:endParaRPr>
+          </a:p>
+        </p:txBody>
+      </p:sp>
+      <p:sp>
+        <p:nvSpPr>
+          <p:cNvPr id="5" name="CasellaDiTesto 4">
+            <a:extLst>
+              <a:ext uri="{FF2B5EF4-FFF2-40B4-BE49-F238E27FC236}">
+                <a16:creationId xmlns:a16="http://schemas.microsoft.com/office/drawing/2014/main" id="{4BB5DE8E-3EDA-833C-1F3D-243FA56F8FFC}"/>
+              </a:ext>
+            </a:extLst>
+          </p:cNvPr>
+          <p:cNvSpPr txBox="1"/>
+          <p:nvPr/>
+        </p:nvSpPr>
+        <p:spPr>
+          <a:xfrm>
+            <a:off x="101586" y="9873419"/>
+            <a:ext cx="6667513" cy="441146"/>
+          </a:xfrm>
+          <a:prstGeom prst="rect">
+            <a:avLst/>
+          </a:prstGeom>
+          <a:noFill/>
+          <a:ln w="12700" cap="flat">
+            <a:noFill/>
+            <a:miter lim="400000"/>
+          </a:ln>
+          <a:effectLst/>
+          <a:sp3d/>
+        </p:spPr>
+        <p:style>
+          <a:lnRef idx="0">
+            <a:scrgbClr r="0" g="0" b="0"/>
+          </a:lnRef>
+          <a:fillRef idx="0">
+            <a:scrgbClr r="0" g="0" b="0"/>
+          </a:fillRef>
+          <a:effectRef idx="0">
+            <a:scrgbClr r="0" g="0" b="0"/>
+          </a:effectRef>
+          <a:fontRef idx="none"/>
+        </p:style>
+        <p:txBody>
+          <a:bodyPr rot="0" spcFirstLastPara="1" vertOverflow="overflow" horzOverflow="overflow" vert="horz" wrap="square" lIns="50800" tIns="50800" rIns="50800" bIns="50800" numCol="1" spcCol="38100" rtlCol="0" anchor="ctr">
+            <a:spAutoFit/>
+          </a:bodyPr>
+          <a:lstStyle/>
+          <a:p>
+            <a:pPr marL="0" marR="0" lvl="0" indent="0" algn="l" defTabSz="584200" rtl="0" eaLnBrk="1" fontAlgn="auto" latinLnBrk="0" hangingPunct="0">
+              <a:lnSpc>
+                <a:spcPct val="100000"/>
+              </a:lnSpc>
+              <a:spcBef>
+                <a:spcPts val="0"/>
+              </a:spcBef>
+              <a:spcAft>
+                <a:spcPts val="0"/>
+              </a:spcAft>
+              <a:buClrTx/>
+              <a:buSzTx/>
+              <a:buFontTx/>
+              <a:buNone/>
+              <a:tabLst/>
+              <a:defRPr/>
+            </a:pPr>
+            <a:r>
+              <a:rPr kumimoji="0" lang="it-IT" sz="1050" b="1" i="0" u="none" strike="noStrike" kern="0" cap="none" spc="0" normalizeH="0" baseline="0" noProof="0">
+                <a:ln>
+                  <a:noFill/>
+                </a:ln>
+                <a:solidFill>
+                  <a:srgbClr val="FFFFFF"/>
+                </a:solidFill>
+                <a:effectLst/>
+                <a:uLnTx/>
+                <a:uFillTx/>
+                <a:latin typeface="Avenir Next LT Pro" panose="020B0504020202020204" pitchFamily="34" charset="0"/>
+                <a:sym typeface="Helvetica Neue"/>
+              </a:rPr>
+              <a:t>Per informazioni e approfondimenti rivolgersi al Presidio Normativo Finance di SCS al seguente indirizzo e-mail: alert@scsconsulting.it</a:t>
+            </a:r>
+          </a:p>
+        </p:txBody>
+      </p:sp>
+      <p:sp>
+        <p:nvSpPr>
+          <p:cNvPr id="6" name="Rectangle 23">
+            <a:extLst>
+              <a:ext uri="{FF2B5EF4-FFF2-40B4-BE49-F238E27FC236}">
+                <a16:creationId xmlns:a16="http://schemas.microsoft.com/office/drawing/2014/main" id="{61F00F90-BFDD-5B41-EFDC-335F3CCA9408}"/>
+              </a:ext>
+            </a:extLst>
+          </p:cNvPr>
+          <p:cNvSpPr>
+            <a:spLocks noChangeArrowheads="1"/>
+          </p:cNvSpPr>
+          <p:nvPr/>
+        </p:nvSpPr>
+        <p:spPr bwMode="auto">
+          <a:xfrm>
+            <a:off x="85726" y="10372647"/>
+            <a:ext cx="6588000" cy="200055"/>
+          </a:xfrm>
+          <a:prstGeom prst="rect">
+            <a:avLst/>
+          </a:prstGeom>
+          <a:noFill/>
+          <a:ln>
+            <a:noFill/>
+          </a:ln>
+          <a:effectLst/>
+          <a:extLst>
+            <a:ext uri="{909E8E84-426E-40DD-AFC4-6F175D3DCCD1}">
+              <a14:hiddenFill xmlns:a14="http://schemas.microsoft.com/office/drawing/2010/main">
+                <a:solidFill>
+                  <a:schemeClr val="accent1"/>
+                </a:solidFill>
+              </a14:hiddenFill>
+            </a:ext>
+            <a:ext uri="{91240B29-F687-4F45-9708-019B960494DF}">
+              <a14:hiddenLine xmlns:a14="http://schemas.microsoft.com/office/drawing/2010/main" w="9525">
+                <a:solidFill>
+                  <a:schemeClr val="tx1"/>
+                </a:solidFill>
+                <a:miter lim="800000"/>
+                <a:headEnd/>
+                <a:tailEnd/>
+              </a14:hiddenLine>
+            </a:ext>
+            <a:ext uri="{AF507438-7753-43E0-B8FC-AC1667EBCBE1}">
+              <a14:hiddenEffects xmlns:a14="http://schemas.microsoft.com/office/drawing/2010/main">
+                <a:effectLst>
+                  <a:outerShdw dist="35921" dir="2700000" algn="ctr" rotWithShape="0">
+                    <a:schemeClr val="bg2"/>
+                  </a:outerShdw>
+                </a:effectLst>
+              </a14:hiddenEffects>
+            </a:ext>
+          </a:extLst>
+        </p:spPr>
+        <p:txBody>
+          <a:bodyPr vert="horz" wrap="square" lIns="91440" tIns="45720" rIns="91440" bIns="45720" numCol="1" anchor="ctr" anchorCtr="0" compatLnSpc="1">
+            <a:prstTxWarp prst="textNoShape">
+              <a:avLst/>
+            </a:prstTxWarp>
+            <a:spAutoFit/>
+          </a:bodyPr>
+          <a:lstStyle/>
+          <a:p>
+            <a:pPr marL="0" marR="0" lvl="0" indent="0" algn="l" defTabSz="914400" rtl="0" eaLnBrk="0" fontAlgn="base" latinLnBrk="0" hangingPunct="0">
+              <a:lnSpc>
+                <a:spcPct val="100000"/>
+              </a:lnSpc>
+              <a:spcBef>
+                <a:spcPct val="0"/>
+              </a:spcBef>
+              <a:spcAft>
+                <a:spcPct val="0"/>
+              </a:spcAft>
+              <a:buClrTx/>
+              <a:buSzTx/>
+              <a:buFontTx/>
+              <a:buNone/>
+              <a:tabLst/>
+              <a:defRPr/>
+            </a:pPr>
+            <a:r>
+              <a:rPr kumimoji="0" lang="it-IT" altLang="it-IT" sz="700" b="0" i="1" u="none" strike="noStrike" kern="0" cap="none" spc="0" normalizeH="0" baseline="0" noProof="0">
+                <a:ln>
+                  <a:noFill/>
+                </a:ln>
+                <a:solidFill>
+                  <a:srgbClr val="FFFFFF"/>
+                </a:solidFill>
+                <a:effectLst/>
+                <a:uLnTx/>
+                <a:uFillTx/>
+                <a:latin typeface="Avenir Next LT Pro" panose="020B0504020202020204" pitchFamily="34" charset="0"/>
+                <a:ea typeface="Calibri" panose="020F0502020204030204" pitchFamily="34" charset="0"/>
+                <a:cs typeface="Calibri" panose="020F0502020204030204" pitchFamily="34" charset="0"/>
+                <a:sym typeface="Helvetica Neue"/>
+              </a:rPr>
+              <a:t>Il presente documento comprende le news identificate come coerenti con il focus aziendale dell’Area Finance ed in linea con gli eventuali interessi correlati</a:t>
+            </a:r>
+            <a:endParaRPr kumimoji="0" lang="it-IT" altLang="it-IT" sz="700" b="0" i="0" u="none" strike="noStrike" kern="0" cap="none" spc="0" normalizeH="0" baseline="0" noProof="0">
+              <a:ln>
+                <a:noFill/>
+              </a:ln>
+              <a:solidFill>
+                <a:srgbClr val="FFFFFF"/>
+              </a:solidFill>
+              <a:effectLst/>
+              <a:uLnTx/>
+              <a:uFillTx/>
+              <a:latin typeface="Avenir Next LT Pro" panose="020B0504020202020204" pitchFamily="34" charset="0"/>
+              <a:cs typeface="Calibri" panose="020F0502020204030204" pitchFamily="34" charset="0"/>
+              <a:sym typeface="Helvetica Neue"/>
+            </a:endParaRPr>
+          </a:p>
+        </p:txBody>
+      </p:sp>
+      <p:pic>
+        <p:nvPicPr>
+          <p:cNvPr id="8" name="Immagine 7" descr="Immagine che contiene testo, clipart&#10;&#10;Descrizione generata automaticamente">
+            <a:extLst>
+              <a:ext uri="{FF2B5EF4-FFF2-40B4-BE49-F238E27FC236}">
+                <a16:creationId xmlns:a16="http://schemas.microsoft.com/office/drawing/2014/main" id="{CB78F81C-CB07-D7AF-E8CF-59615A1FE2D4}"/>
+              </a:ext>
+            </a:extLst>
+          </p:cNvPr>
+          <p:cNvPicPr>
+            <a:picLocks noChangeAspect="1"/>
+          </p:cNvPicPr>
+          <p:nvPr/>
+        </p:nvPicPr>
+        <p:blipFill>
+          <a:blip r:embed="rId7"/>
+          <a:stretch>
+            <a:fillRect/>
+          </a:stretch>
+        </p:blipFill>
+        <p:spPr>
+          <a:xfrm>
+            <a:off x="6769100" y="10092340"/>
+            <a:ext cx="654557" cy="437547"/>
+          </a:xfrm>
+          <a:prstGeom prst="rect">
+            <a:avLst/>
+          </a:prstGeom>
+        </p:spPr>
+      </p:pic>
+      <p:sp>
+        <p:nvSpPr>
+          <p:cNvPr id="24" name="CasellaDiTesto 23">
+            <a:extLst>
+              <a:ext uri="{FF2B5EF4-FFF2-40B4-BE49-F238E27FC236}">
+                <a16:creationId xmlns:a16="http://schemas.microsoft.com/office/drawing/2014/main" id="{B30A289B-B3CC-7131-9663-BF202E334D8C}"/>
+              </a:ext>
+            </a:extLst>
+          </p:cNvPr>
+          <p:cNvSpPr txBox="1"/>
+          <p:nvPr/>
+        </p:nvSpPr>
+        <p:spPr>
+          <a:xfrm>
+            <a:off x="4825994" y="89322"/>
+            <a:ext cx="2433740" cy="595035"/>
+          </a:xfrm>
+          <a:prstGeom prst="rect">
+            <a:avLst/>
+          </a:prstGeom>
+          <a:noFill/>
+          <a:ln w="12700" cap="flat">
+            <a:noFill/>
+            <a:miter lim="400000"/>
+          </a:ln>
+          <a:effectLst/>
+          <a:sp3d/>
+        </p:spPr>
+        <p:style>
+          <a:lnRef idx="0">
+            <a:scrgbClr r="0" g="0" b="0"/>
+          </a:lnRef>
+          <a:fillRef idx="0">
+            <a:scrgbClr r="0" g="0" b="0"/>
+          </a:fillRef>
+          <a:effectRef idx="0">
+            <a:scrgbClr r="0" g="0" b="0"/>
+          </a:effectRef>
+          <a:fontRef idx="none"/>
+        </p:style>
+        <p:txBody>
+          <a:bodyPr rot="0" spcFirstLastPara="1" vertOverflow="overflow" horzOverflow="overflow" vert="horz" wrap="square" lIns="50800" tIns="50800" rIns="50800" bIns="50800" numCol="1" spcCol="38100" rtlCol="0" anchor="ctr">
+            <a:spAutoFit/>
+          </a:bodyPr>
+          <a:lstStyle/>
+          <a:p>
+            <a:pPr marL="0" marR="0" indent="0" algn="r" defTabSz="584200" rtl="0" fontAlgn="auto" latinLnBrk="0" hangingPunct="0">
+              <a:lnSpc>
+                <a:spcPct val="100000"/>
+              </a:lnSpc>
+              <a:spcBef>
+                <a:spcPts val="0"/>
+              </a:spcBef>
+              <a:spcAft>
+                <a:spcPts val="0"/>
+              </a:spcAft>
+              <a:buClrTx/>
+              <a:buSzTx/>
+              <a:buFontTx/>
+              <a:buNone/>
+              <a:tabLst/>
+            </a:pPr>
+            <a:r>
+              <a:rPr kumimoji="0" lang="it-IT" sz="1600" b="1" i="1" u="none" strike="noStrike" cap="none" spc="0" normalizeH="0" baseline="0" dirty="0">
+                <a:ln>
+                  <a:noFill/>
+                </a:ln>
+                <a:solidFill>
+                  <a:schemeClr val="bg1"/>
+                </a:solidFill>
+                <a:effectLst/>
+                <a:uFillTx/>
+                <a:latin typeface="Avenir Next LT Pro" panose="020B0504020202020204" pitchFamily="34" charset="0"/>
+                <a:cs typeface="Calibri Light"/>
+                <a:sym typeface="Helvetica Neue"/>
+              </a:rPr>
+              <a:t>N. 2</a:t>
+            </a:r>
+            <a:endParaRPr kumimoji="0" lang="it-IT" sz="1600" b="1" i="1" u="none" strike="noStrike" cap="none" spc="0" normalizeH="0" baseline="0" dirty="0">
+              <a:ln>
+                <a:noFill/>
+              </a:ln>
+              <a:solidFill>
+                <a:schemeClr val="bg1"/>
+              </a:solidFill>
+              <a:effectLst/>
+              <a:uFillTx/>
+              <a:latin typeface="Avenir Next LT Pro" panose="020B0504020202020204" pitchFamily="34" charset="0"/>
+              <a:cs typeface="Calibri Light" panose="020F0302020204030204" pitchFamily="34" charset="0"/>
+              <a:sym typeface="Helvetica Neue"/>
+            </a:endParaRPr>
+          </a:p>
+          <a:p>
+            <a:pPr algn="r" defTabSz="584200"/>
+            <a:r>
+              <a:rPr lang="it-IT" sz="1600" i="1" dirty="0">
+                <a:solidFill>
+                  <a:schemeClr val="bg1"/>
+                </a:solidFill>
+                <a:latin typeface="Avenir Next LT Pro" panose="020B0504020202020204" pitchFamily="34" charset="0"/>
+                <a:cs typeface="Calibri Light"/>
+              </a:rPr>
+              <a:t>Maggio 2026</a:t>
+            </a:r>
+            <a:endParaRPr lang="it-IT" sz="1600" b="1" i="1" u="none" strike="noStrike" cap="none" spc="0" normalizeH="0" baseline="0" dirty="0">
+              <a:ln>
+                <a:noFill/>
+              </a:ln>
+              <a:solidFill>
+                <a:schemeClr val="bg1"/>
+              </a:solidFill>
+              <a:effectLst/>
+              <a:uFillTx/>
+              <a:latin typeface="Avenir Next LT Pro" panose="020B0504020202020204" pitchFamily="34" charset="0"/>
+              <a:cs typeface="Calibri Light" panose="020F0302020204030204" pitchFamily="34" charset="0"/>
+            </a:endParaRPr>
+          </a:p>
+        </p:txBody>
+      </p:sp>
+    </p:spTree>
+    <p:extLst>
+      <p:ext uri="{BB962C8B-B14F-4D97-AF65-F5344CB8AC3E}">
+        <p14:creationId xmlns:p14="http://schemas.microsoft.com/office/powerpoint/2010/main" val="2625272932"/>
+      </p:ext>
+    </p:extLst>
+  </p:cSld>
+  <p:clrMapOvr>
+    <a:masterClrMapping/>
+  </p:clrMapOvr>
+  <mc:AlternateContent xmlns:mc="http://schemas.openxmlformats.org/markup-compatibility/2006">
+    <mc:Choice xmlns:p14="http://schemas.microsoft.com/office/powerpoint/2010/main" Requires="p14">
+      <p:transition p14:dur="10"/>
+    </mc:Choice>
+    <mc:Fallback>
+      <p:transition/>
+    </mc:Fallback>
+  </mc:AlternateContent>
+</p:sld>
+</file>
+
 <file path=ppt/tags/tag1.xml><?xml version="1.0" encoding="utf-8"?>
 <p:tagLst xmlns:a="http://schemas.openxmlformats.org/drawingml/2006/main" xmlns:r="http://schemas.openxmlformats.org/officeDocument/2006/relationships" xmlns:p="http://schemas.openxmlformats.org/presentationml/2006/main">
   <p:tag name="THINKCELLUNDODONOTDELETE" val="0"/>
@@ -3399,6 +8394,36 @@
 </file>
 
 <file path=ppt/tags/tag3.xml><?xml version="1.0" encoding="utf-8"?>
+<p:tagLst xmlns:a="http://schemas.openxmlformats.org/drawingml/2006/main" xmlns:r="http://schemas.openxmlformats.org/officeDocument/2006/relationships" xmlns:p="http://schemas.openxmlformats.org/presentationml/2006/main">
+  <p:tag name="THINKCELLSHAPEDONOTDELETE" val="thinkcellActiveDocDoNotDelete"/>
+</p:tagLst>
+</file>
+
+<file path=ppt/tags/tag4.xml><?xml version="1.0" encoding="utf-8"?>
+<p:tagLst xmlns:a="http://schemas.openxmlformats.org/drawingml/2006/main" xmlns:r="http://schemas.openxmlformats.org/officeDocument/2006/relationships" xmlns:p="http://schemas.openxmlformats.org/presentationml/2006/main">
+  <p:tag name="THINKCELLSHAPEDONOTDELETE" val="thinkcellActiveDocDoNotDelete"/>
+</p:tagLst>
+</file>
+
+<file path=ppt/tags/tag5.xml><?xml version="1.0" encoding="utf-8"?>
+<p:tagLst xmlns:a="http://schemas.openxmlformats.org/drawingml/2006/main" xmlns:r="http://schemas.openxmlformats.org/officeDocument/2006/relationships" xmlns:p="http://schemas.openxmlformats.org/presentationml/2006/main">
+  <p:tag name="THINKCELLSHAPEDONOTDELETE" val="thinkcellActiveDocDoNotDelete"/>
+</p:tagLst>
+</file>
+
+<file path=ppt/tags/tag6.xml><?xml version="1.0" encoding="utf-8"?>
+<p:tagLst xmlns:a="http://schemas.openxmlformats.org/drawingml/2006/main" xmlns:r="http://schemas.openxmlformats.org/officeDocument/2006/relationships" xmlns:p="http://schemas.openxmlformats.org/presentationml/2006/main">
+  <p:tag name="THINKCELLSHAPEDONOTDELETE" val="thinkcellActiveDocDoNotDelete"/>
+</p:tagLst>
+</file>
+
+<file path=ppt/tags/tag7.xml><?xml version="1.0" encoding="utf-8"?>
+<p:tagLst xmlns:a="http://schemas.openxmlformats.org/drawingml/2006/main" xmlns:r="http://schemas.openxmlformats.org/officeDocument/2006/relationships" xmlns:p="http://schemas.openxmlformats.org/presentationml/2006/main">
+  <p:tag name="THINKCELLSHAPEDONOTDELETE" val="thinkcellActiveDocDoNotDelete"/>
+</p:tagLst>
+</file>
+
+<file path=ppt/tags/tag8.xml><?xml version="1.0" encoding="utf-8"?>
 <p:tagLst xmlns:a="http://schemas.openxmlformats.org/drawingml/2006/main" xmlns:r="http://schemas.openxmlformats.org/officeDocument/2006/relationships" xmlns:p="http://schemas.openxmlformats.org/presentationml/2006/main">
   <p:tag name="THINKCELLSHAPEDONOTDELETE" val="thinkcellActiveDocDoNotDelete"/>
 </p:tagLst>
@@ -5840,6 +10865,15 @@
 </file>
 
 <file path=customXml/item1.xml><?xml version="1.0" encoding="utf-8"?>
+<?mso-contentType ?>
+<FormTemplates xmlns="http://schemas.microsoft.com/sharepoint/v3/contenttype/forms">
+  <Display>DocumentLibraryForm</Display>
+  <Edit>DocumentLibraryForm</Edit>
+  <New>DocumentLibraryForm</New>
+</FormTemplates>
+</file>
+
+<file path=customXml/item2.xml><?xml version="1.0" encoding="utf-8"?>
 <ct:contentTypeSchema xmlns:ct="http://schemas.microsoft.com/office/2006/metadata/contentType" xmlns:ma="http://schemas.microsoft.com/office/2006/metadata/properties/metaAttributes" ct:_="" ma:_="" ma:contentTypeName="Document" ma:contentTypeID="0x010100FC310895730FBD47917AA269694BC14E" ma:contentTypeVersion="13" ma:contentTypeDescription="Create a new document." ma:contentTypeScope="" ma:versionID="3d58c28c5bfbd4d9d944e73c4b45910c">
   <xsd:schema xmlns:xsd="http://www.w3.org/2001/XMLSchema" xmlns:xs="http://www.w3.org/2001/XMLSchema" xmlns:p="http://schemas.microsoft.com/office/2006/metadata/properties" xmlns:ns2="cf2a3556-9ff1-4809-aede-0c4d87a6f17b" xmlns:ns3="20cea128-93c2-4565-b167-979e524c2c7f" targetNamespace="http://schemas.microsoft.com/office/2006/metadata/properties" ma:root="true" ma:fieldsID="8b729c930090f549128f10ee5c7ad702" ns2:_="" ns3:_="">
     <xsd:import namespace="cf2a3556-9ff1-4809-aede-0c4d87a6f17b"/>
@@ -6062,15 +11096,6 @@
 </ct:contentTypeSchema>
 </file>
 
-<file path=customXml/item2.xml><?xml version="1.0" encoding="utf-8"?>
-<?mso-contentType ?>
-<FormTemplates xmlns="http://schemas.microsoft.com/sharepoint/v3/contenttype/forms">
-  <Display>DocumentLibraryForm</Display>
-  <Edit>DocumentLibraryForm</Edit>
-  <New>DocumentLibraryForm</New>
-</FormTemplates>
-</file>
-
 <file path=customXml/item3.xml><?xml version="1.0" encoding="utf-8"?>
 <p:properties xmlns:p="http://schemas.microsoft.com/office/2006/metadata/properties" xmlns:xsi="http://www.w3.org/2001/XMLSchema-instance" xmlns:pc="http://schemas.microsoft.com/office/infopath/2007/PartnerControls">
   <documentManagement>
@@ -6083,6 +11108,14 @@
 </file>
 
 <file path=customXml/itemProps1.xml><?xml version="1.0" encoding="utf-8"?>
+<ds:datastoreItem xmlns:ds="http://schemas.openxmlformats.org/officeDocument/2006/customXml" ds:itemID="{D2873E39-CD59-4C25-BEA8-2D34AD81860E}">
+  <ds:schemaRefs>
+    <ds:schemaRef ds:uri="http://schemas.microsoft.com/sharepoint/v3/contenttype/forms"/>
+  </ds:schemaRefs>
+</ds:datastoreItem>
+</file>
+
+<file path=customXml/itemProps2.xml><?xml version="1.0" encoding="utf-8"?>
 <ds:datastoreItem xmlns:ds="http://schemas.openxmlformats.org/officeDocument/2006/customXml" ds:itemID="{53ED5772-172B-40B0-AD1E-D1FC72420372}">
   <ds:schemaRefs>
     <ds:schemaRef ds:uri="http://schemas.microsoft.com/office/2006/metadata/contentType"/>
@@ -6097,14 +11130,6 @@
     <ds:schemaRef ds:uri="http://purl.org/dc/elements/1.1/"/>
     <ds:schemaRef ds:uri="http://purl.org/dc/terms/"/>
     <ds:schemaRef ds:uri="http://schemas.microsoft.com/internal/obd"/>
-  </ds:schemaRefs>
-</ds:datastoreItem>
-</file>
-
-<file path=customXml/itemProps2.xml><?xml version="1.0" encoding="utf-8"?>
-<ds:datastoreItem xmlns:ds="http://schemas.openxmlformats.org/officeDocument/2006/customXml" ds:itemID="{D2873E39-CD59-4C25-BEA8-2D34AD81860E}">
-  <ds:schemaRefs>
-    <ds:schemaRef ds:uri="http://schemas.microsoft.com/sharepoint/v3/contenttype/forms"/>
   </ds:schemaRefs>
 </ds:datastoreItem>
 </file>
